--- a/PPT/胡丹-0727.pptx
+++ b/PPT/胡丹-0727.pptx
@@ -5,30 +5,29 @@
     <p:sldMasterId id="2147483648" r:id="rId1"/>
   </p:sldMasterIdLst>
   <p:notesMasterIdLst>
-    <p:notesMasterId r:id="rId18"/>
+    <p:notesMasterId r:id="rId17"/>
   </p:notesMasterIdLst>
   <p:sldIdLst>
     <p:sldId id="256" r:id="rId2"/>
-    <p:sldId id="272" r:id="rId3"/>
-    <p:sldId id="257" r:id="rId4"/>
-    <p:sldId id="258" r:id="rId5"/>
-    <p:sldId id="259" r:id="rId6"/>
-    <p:sldId id="260" r:id="rId7"/>
-    <p:sldId id="261" r:id="rId8"/>
-    <p:sldId id="262" r:id="rId9"/>
-    <p:sldId id="263" r:id="rId10"/>
-    <p:sldId id="264" r:id="rId11"/>
-    <p:sldId id="265" r:id="rId12"/>
-    <p:sldId id="266" r:id="rId13"/>
-    <p:sldId id="267" r:id="rId14"/>
-    <p:sldId id="269" r:id="rId15"/>
-    <p:sldId id="270" r:id="rId16"/>
-    <p:sldId id="271" r:id="rId17"/>
+    <p:sldId id="257" r:id="rId3"/>
+    <p:sldId id="258" r:id="rId4"/>
+    <p:sldId id="259" r:id="rId5"/>
+    <p:sldId id="260" r:id="rId6"/>
+    <p:sldId id="261" r:id="rId7"/>
+    <p:sldId id="262" r:id="rId8"/>
+    <p:sldId id="263" r:id="rId9"/>
+    <p:sldId id="264" r:id="rId10"/>
+    <p:sldId id="265" r:id="rId11"/>
+    <p:sldId id="266" r:id="rId12"/>
+    <p:sldId id="267" r:id="rId13"/>
+    <p:sldId id="269" r:id="rId14"/>
+    <p:sldId id="270" r:id="rId15"/>
+    <p:sldId id="271" r:id="rId16"/>
   </p:sldIdLst>
   <p:sldSz cx="12192000" cy="6858000"/>
   <p:notesSz cx="6858000" cy="9144000"/>
   <p:custDataLst>
-    <p:tags r:id="rId19"/>
+    <p:tags r:id="rId18"/>
   </p:custDataLst>
   <p:defaultTextStyle>
     <a:defPPr>
@@ -226,7 +225,7 @@
           <a:p>
             <a:fld id="{D2A48B96-639E-45A3-A0BA-2464DFDB1FAA}" type="datetimeFigureOut">
               <a:rPr lang="zh-CN" altLang="en-US" smtClean="0"/>
-              <a:t>2026/7/25</a:t>
+              <a:t>2026/8/24</a:t>
             </a:fld>
             <a:endParaRPr lang="zh-CN" altLang="en-US"/>
           </a:p>
@@ -616,11 +615,6 @@
           <a:bodyPr/>
           <a:lstStyle/>
           <a:p>
-            <a:endParaRPr lang="zh-CN" altLang="zh-CN" b="0" dirty="0">
-              <a:effectLst/>
-            </a:endParaRPr>
-          </a:p>
-          <a:p>
             <a:endParaRPr kumimoji="1" lang="zh-CN" altLang="en-US" dirty="0"/>
           </a:p>
         </p:txBody>
@@ -651,7 +645,7 @@
     </p:spTree>
     <p:extLst>
       <p:ext uri="{BB962C8B-B14F-4D97-AF65-F5344CB8AC3E}">
-        <p14:creationId xmlns:p14="http://schemas.microsoft.com/office/powerpoint/2010/main" val="4235224993"/>
+        <p14:creationId xmlns:p14="http://schemas.microsoft.com/office/powerpoint/2010/main" val="595312348"/>
       </p:ext>
     </p:extLst>
   </p:cSld>
@@ -735,7 +729,7 @@
     </p:spTree>
     <p:extLst>
       <p:ext uri="{BB962C8B-B14F-4D97-AF65-F5344CB8AC3E}">
-        <p14:creationId xmlns:p14="http://schemas.microsoft.com/office/powerpoint/2010/main" val="595312348"/>
+        <p14:creationId xmlns:p14="http://schemas.microsoft.com/office/powerpoint/2010/main" val="3008807683"/>
       </p:ext>
     </p:extLst>
   </p:cSld>
@@ -819,7 +813,7 @@
     </p:spTree>
     <p:extLst>
       <p:ext uri="{BB962C8B-B14F-4D97-AF65-F5344CB8AC3E}">
-        <p14:creationId xmlns:p14="http://schemas.microsoft.com/office/powerpoint/2010/main" val="3008807683"/>
+        <p14:creationId xmlns:p14="http://schemas.microsoft.com/office/powerpoint/2010/main" val="2372719196"/>
       </p:ext>
     </p:extLst>
   </p:cSld>
@@ -873,7 +867,30 @@
           <a:bodyPr/>
           <a:lstStyle/>
           <a:p>
-            <a:endParaRPr kumimoji="1" lang="zh-CN" altLang="en-US" dirty="0"/>
+            <a:pPr marL="0" marR="0" lvl="0" indent="0" algn="l" defTabSz="914400" rtl="0" eaLnBrk="1" fontAlgn="auto" latinLnBrk="0" hangingPunct="1">
+              <a:lnSpc>
+                <a:spcPct val="100000"/>
+              </a:lnSpc>
+              <a:spcBef>
+                <a:spcPts val="0"/>
+              </a:spcBef>
+              <a:spcAft>
+                <a:spcPts val="0"/>
+              </a:spcAft>
+              <a:buClrTx/>
+              <a:buSzTx/>
+              <a:buFontTx/>
+              <a:buNone/>
+              <a:tabLst/>
+              <a:defRPr/>
+            </a:pPr>
+            <a:endParaRPr lang="zh-CN" altLang="en-US" sz="1200" b="0" dirty="0">
+              <a:solidFill>
+                <a:srgbClr val="64748B"/>
+              </a:solidFill>
+              <a:latin typeface="微软雅黑"/>
+              <a:ea typeface="微软雅黑"/>
+            </a:endParaRPr>
           </a:p>
         </p:txBody>
       </p:sp>
@@ -903,7 +920,7 @@
     </p:spTree>
     <p:extLst>
       <p:ext uri="{BB962C8B-B14F-4D97-AF65-F5344CB8AC3E}">
-        <p14:creationId xmlns:p14="http://schemas.microsoft.com/office/powerpoint/2010/main" val="2372719196"/>
+        <p14:creationId xmlns:p14="http://schemas.microsoft.com/office/powerpoint/2010/main" val="3878256885"/>
       </p:ext>
     </p:extLst>
   </p:cSld>
@@ -957,30 +974,7 @@
           <a:bodyPr/>
           <a:lstStyle/>
           <a:p>
-            <a:pPr marL="0" marR="0" lvl="0" indent="0" algn="l" defTabSz="914400" rtl="0" eaLnBrk="1" fontAlgn="auto" latinLnBrk="0" hangingPunct="1">
-              <a:lnSpc>
-                <a:spcPct val="100000"/>
-              </a:lnSpc>
-              <a:spcBef>
-                <a:spcPts val="0"/>
-              </a:spcBef>
-              <a:spcAft>
-                <a:spcPts val="0"/>
-              </a:spcAft>
-              <a:buClrTx/>
-              <a:buSzTx/>
-              <a:buFontTx/>
-              <a:buNone/>
-              <a:tabLst/>
-              <a:defRPr/>
-            </a:pPr>
-            <a:endParaRPr lang="zh-CN" altLang="en-US" sz="1200" b="0" dirty="0">
-              <a:solidFill>
-                <a:srgbClr val="64748B"/>
-              </a:solidFill>
-              <a:latin typeface="微软雅黑"/>
-              <a:ea typeface="微软雅黑"/>
-            </a:endParaRPr>
+            <a:endParaRPr kumimoji="1" lang="zh-CN" altLang="en-US" dirty="0"/>
           </a:p>
         </p:txBody>
       </p:sp>
@@ -1002,90 +996,6 @@
             <a:fld id="{A6837353-30EB-4A48-80EB-173D804AEFBD}" type="slidenum">
               <a:rPr lang="zh-CN" altLang="en-US" smtClean="0"/>
               <a:t>15</a:t>
-            </a:fld>
-            <a:endParaRPr lang="zh-CN" altLang="en-US"/>
-          </a:p>
-        </p:txBody>
-      </p:sp>
-    </p:spTree>
-    <p:extLst>
-      <p:ext uri="{BB962C8B-B14F-4D97-AF65-F5344CB8AC3E}">
-        <p14:creationId xmlns:p14="http://schemas.microsoft.com/office/powerpoint/2010/main" val="3878256885"/>
-      </p:ext>
-    </p:extLst>
-  </p:cSld>
-  <p:clrMapOvr>
-    <a:masterClrMapping/>
-  </p:clrMapOvr>
-</p:notes>
-</file>
-
-<file path=ppt/notesSlides/notesSlide15.xml><?xml version="1.0" encoding="utf-8"?>
-<p:notes xmlns:a="http://schemas.openxmlformats.org/drawingml/2006/main" xmlns:r="http://schemas.openxmlformats.org/officeDocument/2006/relationships" xmlns:p="http://schemas.openxmlformats.org/presentationml/2006/main">
-  <p:cSld>
-    <p:spTree>
-      <p:nvGrpSpPr>
-        <p:cNvPr id="1" name=""/>
-        <p:cNvGrpSpPr/>
-        <p:nvPr/>
-      </p:nvGrpSpPr>
-      <p:grpSpPr>
-        <a:xfrm>
-          <a:off x="0" y="0"/>
-          <a:ext cx="0" cy="0"/>
-          <a:chOff x="0" y="0"/>
-          <a:chExt cx="0" cy="0"/>
-        </a:xfrm>
-      </p:grpSpPr>
-      <p:sp>
-        <p:nvSpPr>
-          <p:cNvPr id="2" name="幻灯片图像占位符 1"/>
-          <p:cNvSpPr>
-            <a:spLocks noGrp="1" noRot="1" noChangeAspect="1"/>
-          </p:cNvSpPr>
-          <p:nvPr>
-            <p:ph type="sldImg"/>
-          </p:nvPr>
-        </p:nvSpPr>
-        <p:spPr/>
-      </p:sp>
-      <p:sp>
-        <p:nvSpPr>
-          <p:cNvPr id="3" name="备注占位符 2"/>
-          <p:cNvSpPr>
-            <a:spLocks noGrp="1"/>
-          </p:cNvSpPr>
-          <p:nvPr>
-            <p:ph type="body" idx="1"/>
-          </p:nvPr>
-        </p:nvSpPr>
-        <p:spPr/>
-        <p:txBody>
-          <a:bodyPr/>
-          <a:lstStyle/>
-          <a:p>
-            <a:endParaRPr kumimoji="1" lang="zh-CN" altLang="en-US" dirty="0"/>
-          </a:p>
-        </p:txBody>
-      </p:sp>
-      <p:sp>
-        <p:nvSpPr>
-          <p:cNvPr id="4" name="灯片编号占位符 3"/>
-          <p:cNvSpPr>
-            <a:spLocks noGrp="1"/>
-          </p:cNvSpPr>
-          <p:nvPr>
-            <p:ph type="sldNum" sz="quarter" idx="5"/>
-          </p:nvPr>
-        </p:nvSpPr>
-        <p:spPr/>
-        <p:txBody>
-          <a:bodyPr/>
-          <a:lstStyle/>
-          <a:p>
-            <a:fld id="{A6837353-30EB-4A48-80EB-173D804AEFBD}" type="slidenum">
-              <a:rPr lang="zh-CN" altLang="en-US" smtClean="0"/>
-              <a:t>16</a:t>
             </a:fld>
             <a:endParaRPr lang="zh-CN" altLang="en-US"/>
           </a:p>
@@ -1148,7 +1058,24 @@
           <a:bodyPr/>
           <a:lstStyle/>
           <a:p>
-            <a:endParaRPr kumimoji="1" lang="zh-CN" altLang="en-US" dirty="0"/>
+            <a:pPr marL="0" marR="0" lvl="0" indent="0" algn="l" defTabSz="914400" rtl="0" eaLnBrk="1" fontAlgn="auto" latinLnBrk="0" hangingPunct="1">
+              <a:lnSpc>
+                <a:spcPct val="100000"/>
+              </a:lnSpc>
+              <a:spcBef>
+                <a:spcPts val="0"/>
+              </a:spcBef>
+              <a:spcAft>
+                <a:spcPts val="0"/>
+              </a:spcAft>
+              <a:buClrTx/>
+              <a:buSzTx/>
+              <a:buFontTx/>
+              <a:buNone/>
+              <a:tabLst/>
+              <a:defRPr/>
+            </a:pPr>
+            <a:endParaRPr lang="zh-CN" altLang="zh-CN" dirty="0"/>
           </a:p>
         </p:txBody>
       </p:sp>
@@ -1178,7 +1105,7 @@
     </p:spTree>
     <p:extLst>
       <p:ext uri="{BB962C8B-B14F-4D97-AF65-F5344CB8AC3E}">
-        <p14:creationId xmlns:p14="http://schemas.microsoft.com/office/powerpoint/2010/main" val="1320330182"/>
+        <p14:creationId xmlns:p14="http://schemas.microsoft.com/office/powerpoint/2010/main" val="3385094480"/>
       </p:ext>
     </p:extLst>
   </p:cSld>
@@ -1279,7 +1206,7 @@
     </p:spTree>
     <p:extLst>
       <p:ext uri="{BB962C8B-B14F-4D97-AF65-F5344CB8AC3E}">
-        <p14:creationId xmlns:p14="http://schemas.microsoft.com/office/powerpoint/2010/main" val="3385094480"/>
+        <p14:creationId xmlns:p14="http://schemas.microsoft.com/office/powerpoint/2010/main" val="48947220"/>
       </p:ext>
     </p:extLst>
   </p:cSld>
@@ -1333,24 +1260,7 @@
           <a:bodyPr/>
           <a:lstStyle/>
           <a:p>
-            <a:pPr marL="0" marR="0" lvl="0" indent="0" algn="l" defTabSz="914400" rtl="0" eaLnBrk="1" fontAlgn="auto" latinLnBrk="0" hangingPunct="1">
-              <a:lnSpc>
-                <a:spcPct val="100000"/>
-              </a:lnSpc>
-              <a:spcBef>
-                <a:spcPts val="0"/>
-              </a:spcBef>
-              <a:spcAft>
-                <a:spcPts val="0"/>
-              </a:spcAft>
-              <a:buClrTx/>
-              <a:buSzTx/>
-              <a:buFontTx/>
-              <a:buNone/>
-              <a:tabLst/>
-              <a:defRPr/>
-            </a:pPr>
-            <a:endParaRPr lang="zh-CN" altLang="zh-CN" dirty="0"/>
+            <a:endParaRPr kumimoji="1" lang="zh-CN" altLang="en-US" dirty="0"/>
           </a:p>
         </p:txBody>
       </p:sp>
@@ -1380,7 +1290,7 @@
     </p:spTree>
     <p:extLst>
       <p:ext uri="{BB962C8B-B14F-4D97-AF65-F5344CB8AC3E}">
-        <p14:creationId xmlns:p14="http://schemas.microsoft.com/office/powerpoint/2010/main" val="48947220"/>
+        <p14:creationId xmlns:p14="http://schemas.microsoft.com/office/powerpoint/2010/main" val="391473390"/>
       </p:ext>
     </p:extLst>
   </p:cSld>
@@ -1464,7 +1374,7 @@
     </p:spTree>
     <p:extLst>
       <p:ext uri="{BB962C8B-B14F-4D97-AF65-F5344CB8AC3E}">
-        <p14:creationId xmlns:p14="http://schemas.microsoft.com/office/powerpoint/2010/main" val="391473390"/>
+        <p14:creationId xmlns:p14="http://schemas.microsoft.com/office/powerpoint/2010/main" val="2460440331"/>
       </p:ext>
     </p:extLst>
   </p:cSld>
@@ -1539,7 +1449,7 @@
           <a:p>
             <a:fld id="{A6837353-30EB-4A48-80EB-173D804AEFBD}" type="slidenum">
               <a:rPr lang="zh-CN" altLang="en-US" smtClean="0"/>
-              <a:t>6</a:t>
+              <a:t>7</a:t>
             </a:fld>
             <a:endParaRPr lang="zh-CN" altLang="en-US"/>
           </a:p>
@@ -1548,7 +1458,7 @@
     </p:spTree>
     <p:extLst>
       <p:ext uri="{BB962C8B-B14F-4D97-AF65-F5344CB8AC3E}">
-        <p14:creationId xmlns:p14="http://schemas.microsoft.com/office/powerpoint/2010/main" val="2460440331"/>
+        <p14:creationId xmlns:p14="http://schemas.microsoft.com/office/powerpoint/2010/main" val="1157446704"/>
       </p:ext>
     </p:extLst>
   </p:cSld>
@@ -1602,7 +1512,27 @@
           <a:bodyPr/>
           <a:lstStyle/>
           <a:p>
-            <a:endParaRPr kumimoji="1" lang="zh-CN" altLang="en-US" dirty="0"/>
+            <a:pPr marL="0" marR="0" lvl="0" indent="0" algn="l" defTabSz="914400" rtl="0" eaLnBrk="1" fontAlgn="auto" latinLnBrk="0" hangingPunct="1">
+              <a:lnSpc>
+                <a:spcPct val="100000"/>
+              </a:lnSpc>
+              <a:spcBef>
+                <a:spcPts val="0"/>
+              </a:spcBef>
+              <a:spcAft>
+                <a:spcPts val="0"/>
+              </a:spcAft>
+              <a:buClrTx/>
+              <a:buSzTx/>
+              <a:buFontTx/>
+              <a:buNone/>
+              <a:tabLst/>
+              <a:defRPr/>
+            </a:pPr>
+            <a:endParaRPr lang="en" altLang="zh-CN" sz="1200" b="0" dirty="0">
+              <a:latin typeface="微软雅黑"/>
+              <a:ea typeface="微软雅黑"/>
+            </a:endParaRPr>
           </a:p>
         </p:txBody>
       </p:sp>
@@ -1632,7 +1562,7 @@
     </p:spTree>
     <p:extLst>
       <p:ext uri="{BB962C8B-B14F-4D97-AF65-F5344CB8AC3E}">
-        <p14:creationId xmlns:p14="http://schemas.microsoft.com/office/powerpoint/2010/main" val="1157446704"/>
+        <p14:creationId xmlns:p14="http://schemas.microsoft.com/office/powerpoint/2010/main" val="1485631326"/>
       </p:ext>
     </p:extLst>
   </p:cSld>
@@ -1703,7 +1633,30 @@
               <a:tabLst/>
               <a:defRPr/>
             </a:pPr>
-            <a:endParaRPr lang="en" altLang="zh-CN" sz="1200" b="0" dirty="0">
+            <a:endParaRPr lang="zh-CN" altLang="en-US" sz="1200" b="0" dirty="0">
+              <a:latin typeface="微软雅黑"/>
+              <a:ea typeface="微软雅黑"/>
+            </a:endParaRPr>
+          </a:p>
+          <a:p>
+            <a:pPr marL="0" marR="0" lvl="0" indent="0" algn="l" defTabSz="914400" rtl="0" eaLnBrk="1" fontAlgn="auto" latinLnBrk="0" hangingPunct="1">
+              <a:lnSpc>
+                <a:spcPct val="100000"/>
+              </a:lnSpc>
+              <a:spcBef>
+                <a:spcPts val="0"/>
+              </a:spcBef>
+              <a:spcAft>
+                <a:spcPts val="0"/>
+              </a:spcAft>
+              <a:buClrTx/>
+              <a:buSzTx/>
+              <a:buFontTx/>
+              <a:buNone/>
+              <a:tabLst/>
+              <a:defRPr/>
+            </a:pPr>
+            <a:endParaRPr lang="zh-CN" altLang="en-US" sz="1200" b="0" dirty="0">
               <a:latin typeface="微软雅黑"/>
               <a:ea typeface="微软雅黑"/>
             </a:endParaRPr>
@@ -1736,7 +1689,7 @@
     </p:spTree>
     <p:extLst>
       <p:ext uri="{BB962C8B-B14F-4D97-AF65-F5344CB8AC3E}">
-        <p14:creationId xmlns:p14="http://schemas.microsoft.com/office/powerpoint/2010/main" val="1485631326"/>
+        <p14:creationId xmlns:p14="http://schemas.microsoft.com/office/powerpoint/2010/main" val="2525457944"/>
       </p:ext>
     </p:extLst>
   </p:cSld>
@@ -1790,50 +1743,12 @@
           <a:bodyPr/>
           <a:lstStyle/>
           <a:p>
-            <a:pPr marL="0" marR="0" lvl="0" indent="0" algn="l" defTabSz="914400" rtl="0" eaLnBrk="1" fontAlgn="auto" latinLnBrk="0" hangingPunct="1">
-              <a:lnSpc>
-                <a:spcPct val="100000"/>
-              </a:lnSpc>
-              <a:spcBef>
-                <a:spcPts val="0"/>
-              </a:spcBef>
-              <a:spcAft>
-                <a:spcPts val="0"/>
-              </a:spcAft>
-              <a:buClrTx/>
-              <a:buSzTx/>
-              <a:buFontTx/>
-              <a:buNone/>
-              <a:tabLst/>
-              <a:defRPr/>
-            </a:pPr>
-            <a:endParaRPr lang="zh-CN" altLang="en-US" sz="1200" b="0" dirty="0">
-              <a:latin typeface="微软雅黑"/>
-              <a:ea typeface="微软雅黑"/>
+            <a:endParaRPr lang="zh-CN" altLang="zh-CN" b="0" dirty="0">
+              <a:effectLst/>
             </a:endParaRPr>
           </a:p>
           <a:p>
-            <a:pPr marL="0" marR="0" lvl="0" indent="0" algn="l" defTabSz="914400" rtl="0" eaLnBrk="1" fontAlgn="auto" latinLnBrk="0" hangingPunct="1">
-              <a:lnSpc>
-                <a:spcPct val="100000"/>
-              </a:lnSpc>
-              <a:spcBef>
-                <a:spcPts val="0"/>
-              </a:spcBef>
-              <a:spcAft>
-                <a:spcPts val="0"/>
-              </a:spcAft>
-              <a:buClrTx/>
-              <a:buSzTx/>
-              <a:buFontTx/>
-              <a:buNone/>
-              <a:tabLst/>
-              <a:defRPr/>
-            </a:pPr>
-            <a:endParaRPr lang="zh-CN" altLang="en-US" sz="1200" b="0" dirty="0">
-              <a:latin typeface="微软雅黑"/>
-              <a:ea typeface="微软雅黑"/>
-            </a:endParaRPr>
+            <a:endParaRPr kumimoji="1" lang="zh-CN" altLang="en-US" dirty="0"/>
           </a:p>
         </p:txBody>
       </p:sp>
@@ -1863,7 +1778,7 @@
     </p:spTree>
     <p:extLst>
       <p:ext uri="{BB962C8B-B14F-4D97-AF65-F5344CB8AC3E}">
-        <p14:creationId xmlns:p14="http://schemas.microsoft.com/office/powerpoint/2010/main" val="2525457944"/>
+        <p14:creationId xmlns:p14="http://schemas.microsoft.com/office/powerpoint/2010/main" val="4235224993"/>
       </p:ext>
     </p:extLst>
   </p:cSld>
@@ -2052,7 +1967,7 @@
           <a:p>
             <a:fld id="{2BBF8015-DF84-41FA-9E94-BA51DE2E4658}" type="datetime1">
               <a:rPr lang="en-US" altLang="zh-CN" smtClean="0"/>
-              <a:t>7/25/26</a:t>
+              <a:t>8/24/26</a:t>
             </a:fld>
             <a:endParaRPr lang="en-US"/>
           </a:p>
@@ -2215,7 +2130,7 @@
           <a:p>
             <a:fld id="{EC862101-079D-4F99-B83B-6106A3082DC1}" type="datetime1">
               <a:rPr lang="en-US" altLang="zh-CN" smtClean="0"/>
-              <a:t>7/25/26</a:t>
+              <a:t>8/24/26</a:t>
             </a:fld>
             <a:endParaRPr lang="en-US"/>
           </a:p>
@@ -2388,7 +2303,7 @@
           <a:p>
             <a:fld id="{4C16800F-0336-42AD-AB4C-E188E73DB4FB}" type="datetime1">
               <a:rPr lang="en-US" altLang="zh-CN" smtClean="0"/>
-              <a:t>7/25/26</a:t>
+              <a:t>8/24/26</a:t>
             </a:fld>
             <a:endParaRPr lang="en-US"/>
           </a:p>
@@ -2779,7 +2694,7 @@
           <a:p>
             <a:fld id="{6633B06F-833C-4282-8B21-93F195BE9DCF}" type="datetime1">
               <a:rPr lang="en-US" altLang="zh-CN" smtClean="0"/>
-              <a:t>7/25/26</a:t>
+              <a:t>8/24/26</a:t>
             </a:fld>
             <a:endParaRPr lang="en-US"/>
           </a:p>
@@ -3019,7 +2934,7 @@
           <a:p>
             <a:fld id="{80521281-1D44-441C-9DDE-B4936627E1FE}" type="datetime1">
               <a:rPr lang="en-US" altLang="zh-CN" smtClean="0"/>
-              <a:t>7/25/26</a:t>
+              <a:t>8/24/26</a:t>
             </a:fld>
             <a:endParaRPr lang="en-US"/>
           </a:p>
@@ -3299,7 +3214,7 @@
           <a:p>
             <a:fld id="{E88997AF-337D-4308-80A8-0E4FAAFEF77A}" type="datetime1">
               <a:rPr lang="en-US" altLang="zh-CN" smtClean="0"/>
-              <a:t>7/25/26</a:t>
+              <a:t>8/24/26</a:t>
             </a:fld>
             <a:endParaRPr lang="en-US"/>
           </a:p>
@@ -3713,7 +3628,7 @@
           <a:p>
             <a:fld id="{5B80E11C-AF29-404B-84BD-C97916AD109A}" type="datetime1">
               <a:rPr lang="en-US" altLang="zh-CN" smtClean="0"/>
-              <a:t>7/25/26</a:t>
+              <a:t>8/24/26</a:t>
             </a:fld>
             <a:endParaRPr lang="en-US"/>
           </a:p>
@@ -3825,7 +3740,7 @@
           <a:p>
             <a:fld id="{6EF8B016-4D35-4FFA-AAB2-911F490527D3}" type="datetime1">
               <a:rPr lang="en-US" altLang="zh-CN" smtClean="0"/>
-              <a:t>7/25/26</a:t>
+              <a:t>8/24/26</a:t>
             </a:fld>
             <a:endParaRPr lang="en-US"/>
           </a:p>
@@ -3915,7 +3830,7 @@
           <a:p>
             <a:fld id="{7998FBFD-206E-4DB4-97C7-5AD8A1A0F586}" type="datetime1">
               <a:rPr lang="en-US" altLang="zh-CN" smtClean="0"/>
-              <a:t>7/25/26</a:t>
+              <a:t>8/24/26</a:t>
             </a:fld>
             <a:endParaRPr lang="en-US"/>
           </a:p>
@@ -4185,7 +4100,7 @@
           <a:p>
             <a:fld id="{8795EDB8-0579-4265-A8F4-6EA70868C754}" type="datetime1">
               <a:rPr lang="en-US" altLang="zh-CN" smtClean="0"/>
-              <a:t>7/25/26</a:t>
+              <a:t>8/24/26</a:t>
             </a:fld>
             <a:endParaRPr lang="en-US"/>
           </a:p>
@@ -4432,7 +4347,7 @@
           <a:p>
             <a:fld id="{93223B87-9435-4C0A-8A1E-F5BBFA32C3C5}" type="datetime1">
               <a:rPr lang="en-US" altLang="zh-CN" smtClean="0"/>
-              <a:t>7/25/26</a:t>
+              <a:t>8/24/26</a:t>
             </a:fld>
             <a:endParaRPr lang="en-US"/>
           </a:p>
@@ -4712,7 +4627,7 @@
           <a:p>
             <a:fld id="{863614C7-14EB-4084-AC4C-AAFA56794DEF}" type="datetime1">
               <a:rPr lang="en-US" altLang="zh-CN" smtClean="0"/>
-              <a:t>7/25/26</a:t>
+              <a:t>8/24/26</a:t>
             </a:fld>
             <a:endParaRPr lang="en-US"/>
           </a:p>
@@ -5211,2307 +5126,6 @@
                 <a:latin typeface="微软雅黑"/>
                 <a:ea typeface="微软雅黑"/>
               </a:rPr>
-              <a:t>Embedding </a:t>
-            </a:r>
-            <a:r>
-              <a:rPr sz="2800" b="1" dirty="0" err="1">
-                <a:solidFill>
-                  <a:srgbClr val="FFFFFF"/>
-                </a:solidFill>
-                <a:latin typeface="微软雅黑"/>
-                <a:ea typeface="微软雅黑"/>
-              </a:rPr>
-              <a:t>结果分析</a:t>
-            </a:r>
-            <a:endParaRPr sz="2800" b="1" dirty="0">
-              <a:solidFill>
-                <a:srgbClr val="FFFFFF"/>
-              </a:solidFill>
-              <a:latin typeface="微软雅黑"/>
-              <a:ea typeface="微软雅黑"/>
-            </a:endParaRPr>
-          </a:p>
-        </p:txBody>
-      </p:sp>
-      <p:sp>
-        <p:nvSpPr>
-          <p:cNvPr id="4" name="TextBox 3"/>
-          <p:cNvSpPr txBox="1"/>
-          <p:nvPr/>
-        </p:nvSpPr>
-        <p:spPr>
-          <a:xfrm>
-            <a:off x="11018520" y="6505107"/>
-            <a:ext cx="621792" cy="175433"/>
-          </a:xfrm>
-          <a:prstGeom prst="rect">
-            <a:avLst/>
-          </a:prstGeom>
-          <a:noFill/>
-        </p:spPr>
-        <p:txBody>
-          <a:bodyPr wrap="square" lIns="18288" tIns="18288" rIns="18288" bIns="18288" anchor="ctr">
-            <a:spAutoFit/>
-          </a:bodyPr>
-          <a:lstStyle/>
-          <a:p>
-            <a:pPr algn="r">
-              <a:lnSpc>
-                <a:spcPct val="100000"/>
-              </a:lnSpc>
-              <a:spcAft>
-                <a:spcPts val="0"/>
-              </a:spcAft>
-            </a:pPr>
-            <a:r>
-              <a:rPr sz="900" b="1">
-                <a:latin typeface="微软雅黑"/>
-                <a:ea typeface="微软雅黑"/>
-              </a:rPr>
-              <a:t>09</a:t>
-            </a:r>
-          </a:p>
-        </p:txBody>
-      </p:sp>
-      <p:sp>
-        <p:nvSpPr>
-          <p:cNvPr id="5" name="TextBox 4"/>
-          <p:cNvSpPr txBox="1"/>
-          <p:nvPr/>
-        </p:nvSpPr>
-        <p:spPr>
-          <a:xfrm>
-            <a:off x="566928" y="897494"/>
-            <a:ext cx="4389120" cy="344710"/>
-          </a:xfrm>
-          <a:prstGeom prst="rect">
-            <a:avLst/>
-          </a:prstGeom>
-          <a:noFill/>
-        </p:spPr>
-        <p:txBody>
-          <a:bodyPr wrap="square" lIns="18288" tIns="18288" rIns="18288" bIns="18288" anchor="ctr">
-            <a:spAutoFit/>
-          </a:bodyPr>
-          <a:lstStyle/>
-          <a:p>
-            <a:pPr algn="l">
-              <a:lnSpc>
-                <a:spcPct val="100000"/>
-              </a:lnSpc>
-              <a:spcAft>
-                <a:spcPts val="0"/>
-              </a:spcAft>
-            </a:pPr>
-            <a:r>
-              <a:rPr sz="2000" b="1" dirty="0">
-                <a:latin typeface="微软雅黑"/>
-                <a:ea typeface="微软雅黑"/>
-              </a:rPr>
-              <a:t>Query </a:t>
-            </a:r>
-            <a:r>
-              <a:rPr sz="2000" b="1" dirty="0" err="1">
-                <a:latin typeface="微软雅黑"/>
-                <a:ea typeface="微软雅黑"/>
-              </a:rPr>
-              <a:t>长度分桶</a:t>
-            </a:r>
-            <a:endParaRPr sz="2000" b="1" dirty="0">
-              <a:latin typeface="微软雅黑"/>
-              <a:ea typeface="微软雅黑"/>
-            </a:endParaRPr>
-          </a:p>
-        </p:txBody>
-      </p:sp>
-      <p:graphicFrame>
-        <p:nvGraphicFramePr>
-          <p:cNvPr id="7" name="Table 6"/>
-          <p:cNvGraphicFramePr>
-            <a:graphicFrameLocks noGrp="1"/>
-          </p:cNvGraphicFramePr>
-          <p:nvPr>
-            <p:extLst>
-              <p:ext uri="{D42A27DB-BD31-4B8C-83A1-F6EECF244321}">
-                <p14:modId xmlns:p14="http://schemas.microsoft.com/office/powerpoint/2010/main" val="2089084342"/>
-              </p:ext>
-            </p:extLst>
-          </p:nvPr>
-        </p:nvGraphicFramePr>
-        <p:xfrm>
-          <a:off x="566928" y="1325880"/>
-          <a:ext cx="11073384" cy="1830820"/>
-        </p:xfrm>
-        <a:graphic>
-          <a:graphicData uri="http://schemas.openxmlformats.org/drawingml/2006/table">
-            <a:tbl>
-              <a:tblPr firstRow="1" bandRow="1">
-                <a:tableStyleId>{5C22544A-7EE6-4342-B048-85BDC9FD1C3A}</a:tableStyleId>
-              </a:tblPr>
-              <a:tblGrid>
-                <a:gridCol w="1882475">
-                  <a:extLst>
-                    <a:ext uri="{9D8B030D-6E8A-4147-A177-3AD203B41FA5}">
-                      <a16:colId xmlns:a16="http://schemas.microsoft.com/office/drawing/2014/main" val="20000"/>
-                    </a:ext>
-                  </a:extLst>
-                </a:gridCol>
-                <a:gridCol w="1439539">
-                  <a:extLst>
-                    <a:ext uri="{9D8B030D-6E8A-4147-A177-3AD203B41FA5}">
-                      <a16:colId xmlns:a16="http://schemas.microsoft.com/office/drawing/2014/main" val="20001"/>
-                    </a:ext>
-                  </a:extLst>
-                </a:gridCol>
-                <a:gridCol w="1882475">
-                  <a:extLst>
-                    <a:ext uri="{9D8B030D-6E8A-4147-A177-3AD203B41FA5}">
-                      <a16:colId xmlns:a16="http://schemas.microsoft.com/office/drawing/2014/main" val="20002"/>
-                    </a:ext>
-                  </a:extLst>
-                </a:gridCol>
-                <a:gridCol w="1993210">
-                  <a:extLst>
-                    <a:ext uri="{9D8B030D-6E8A-4147-A177-3AD203B41FA5}">
-                      <a16:colId xmlns:a16="http://schemas.microsoft.com/office/drawing/2014/main" val="20003"/>
-                    </a:ext>
-                  </a:extLst>
-                </a:gridCol>
-                <a:gridCol w="1882475">
-                  <a:extLst>
-                    <a:ext uri="{9D8B030D-6E8A-4147-A177-3AD203B41FA5}">
-                      <a16:colId xmlns:a16="http://schemas.microsoft.com/office/drawing/2014/main" val="20004"/>
-                    </a:ext>
-                  </a:extLst>
-                </a:gridCol>
-                <a:gridCol w="1993210">
-                  <a:extLst>
-                    <a:ext uri="{9D8B030D-6E8A-4147-A177-3AD203B41FA5}">
-                      <a16:colId xmlns:a16="http://schemas.microsoft.com/office/drawing/2014/main" val="20005"/>
-                    </a:ext>
-                  </a:extLst>
-                </a:gridCol>
-              </a:tblGrid>
-              <a:tr h="366164">
-                <a:tc>
-                  <a:txBody>
-                    <a:bodyPr/>
-                    <a:lstStyle/>
-                    <a:p>
-                      <a:pPr algn="ctr">
-                        <a:spcAft>
-                          <a:spcPts val="0"/>
-                        </a:spcAft>
-                      </a:pPr>
-                      <a:r>
-                        <a:rPr sz="1400" b="1" dirty="0">
-                          <a:solidFill>
-                            <a:schemeClr val="tx1"/>
-                          </a:solidFill>
-                          <a:latin typeface="微软雅黑"/>
-                          <a:ea typeface="微软雅黑"/>
-                        </a:rPr>
-                        <a:t>Query </a:t>
-                      </a:r>
-                      <a:r>
-                        <a:rPr sz="1400" b="1" dirty="0" err="1">
-                          <a:solidFill>
-                            <a:schemeClr val="tx1"/>
-                          </a:solidFill>
-                          <a:latin typeface="微软雅黑"/>
-                          <a:ea typeface="微软雅黑"/>
-                        </a:rPr>
-                        <a:t>长度</a:t>
-                      </a:r>
-                      <a:endParaRPr sz="1400" b="1" dirty="0">
-                        <a:solidFill>
-                          <a:schemeClr val="tx1"/>
-                        </a:solidFill>
-                        <a:latin typeface="微软雅黑"/>
-                        <a:ea typeface="微软雅黑"/>
-                      </a:endParaRPr>
-                    </a:p>
-                  </a:txBody>
-                  <a:tcPr marL="41148" marR="41148" marT="18288" marB="18288" anchor="ctr">
-                    <a:solidFill>
-                      <a:srgbClr val="E2E8F0"/>
-                    </a:solidFill>
-                  </a:tcPr>
-                </a:tc>
-                <a:tc>
-                  <a:txBody>
-                    <a:bodyPr/>
-                    <a:lstStyle/>
-                    <a:p>
-                      <a:pPr algn="ctr">
-                        <a:spcAft>
-                          <a:spcPts val="0"/>
-                        </a:spcAft>
-                      </a:pPr>
-                      <a:r>
-                        <a:rPr sz="1400" b="1" dirty="0" err="1">
-                          <a:solidFill>
-                            <a:schemeClr val="tx1"/>
-                          </a:solidFill>
-                          <a:latin typeface="微软雅黑"/>
-                          <a:ea typeface="微软雅黑"/>
-                        </a:rPr>
-                        <a:t>样本数</a:t>
-                      </a:r>
-                      <a:endParaRPr sz="1400" b="1" dirty="0">
-                        <a:solidFill>
-                          <a:schemeClr val="tx1"/>
-                        </a:solidFill>
-                        <a:latin typeface="微软雅黑"/>
-                        <a:ea typeface="微软雅黑"/>
-                      </a:endParaRPr>
-                    </a:p>
-                  </a:txBody>
-                  <a:tcPr marL="41148" marR="41148" marT="18288" marB="18288" anchor="ctr">
-                    <a:solidFill>
-                      <a:srgbClr val="E2E8F0"/>
-                    </a:solidFill>
-                  </a:tcPr>
-                </a:tc>
-                <a:tc>
-                  <a:txBody>
-                    <a:bodyPr/>
-                    <a:lstStyle/>
-                    <a:p>
-                      <a:pPr algn="ctr">
-                        <a:spcAft>
-                          <a:spcPts val="0"/>
-                        </a:spcAft>
-                      </a:pPr>
-                      <a:r>
-                        <a:rPr sz="1400" b="1" dirty="0">
-                          <a:solidFill>
-                            <a:schemeClr val="tx1"/>
-                          </a:solidFill>
-                          <a:latin typeface="微软雅黑"/>
-                          <a:ea typeface="微软雅黑"/>
-                        </a:rPr>
-                        <a:t>0.6B Hit@1</a:t>
-                      </a:r>
-                    </a:p>
-                  </a:txBody>
-                  <a:tcPr marL="41148" marR="41148" marT="18288" marB="18288" anchor="ctr">
-                    <a:solidFill>
-                      <a:srgbClr val="E2E8F0"/>
-                    </a:solidFill>
-                  </a:tcPr>
-                </a:tc>
-                <a:tc>
-                  <a:txBody>
-                    <a:bodyPr/>
-                    <a:lstStyle/>
-                    <a:p>
-                      <a:pPr algn="ctr">
-                        <a:spcAft>
-                          <a:spcPts val="0"/>
-                        </a:spcAft>
-                      </a:pPr>
-                      <a:r>
-                        <a:rPr sz="1400" b="1" dirty="0">
-                          <a:solidFill>
-                            <a:schemeClr val="tx1"/>
-                          </a:solidFill>
-                          <a:latin typeface="微软雅黑"/>
-                          <a:ea typeface="微软雅黑"/>
-                        </a:rPr>
-                        <a:t>0.6B Hit@10</a:t>
-                      </a:r>
-                    </a:p>
-                  </a:txBody>
-                  <a:tcPr marL="41148" marR="41148" marT="18288" marB="18288" anchor="ctr">
-                    <a:solidFill>
-                      <a:srgbClr val="E2E8F0"/>
-                    </a:solidFill>
-                  </a:tcPr>
-                </a:tc>
-                <a:tc>
-                  <a:txBody>
-                    <a:bodyPr/>
-                    <a:lstStyle/>
-                    <a:p>
-                      <a:pPr algn="ctr">
-                        <a:spcAft>
-                          <a:spcPts val="0"/>
-                        </a:spcAft>
-                      </a:pPr>
-                      <a:r>
-                        <a:rPr sz="1400" b="1" dirty="0">
-                          <a:solidFill>
-                            <a:schemeClr val="tx1"/>
-                          </a:solidFill>
-                          <a:latin typeface="微软雅黑"/>
-                          <a:ea typeface="微软雅黑"/>
-                        </a:rPr>
-                        <a:t>4B Hit@1</a:t>
-                      </a:r>
-                    </a:p>
-                  </a:txBody>
-                  <a:tcPr marL="41148" marR="41148" marT="18288" marB="18288" anchor="ctr">
-                    <a:solidFill>
-                      <a:srgbClr val="E2E8F0"/>
-                    </a:solidFill>
-                  </a:tcPr>
-                </a:tc>
-                <a:tc>
-                  <a:txBody>
-                    <a:bodyPr/>
-                    <a:lstStyle/>
-                    <a:p>
-                      <a:pPr algn="ctr">
-                        <a:spcAft>
-                          <a:spcPts val="0"/>
-                        </a:spcAft>
-                      </a:pPr>
-                      <a:r>
-                        <a:rPr sz="1400" b="1" dirty="0">
-                          <a:solidFill>
-                            <a:schemeClr val="tx1"/>
-                          </a:solidFill>
-                          <a:latin typeface="微软雅黑"/>
-                          <a:ea typeface="微软雅黑"/>
-                        </a:rPr>
-                        <a:t>4B Hit@10</a:t>
-                      </a:r>
-                    </a:p>
-                  </a:txBody>
-                  <a:tcPr marL="41148" marR="41148" marT="18288" marB="18288" anchor="ctr">
-                    <a:solidFill>
-                      <a:srgbClr val="E2E8F0"/>
-                    </a:solidFill>
-                  </a:tcPr>
-                </a:tc>
-                <a:extLst>
-                  <a:ext uri="{0D108BD9-81ED-4DB2-BD59-A6C34878D82A}">
-                    <a16:rowId xmlns:a16="http://schemas.microsoft.com/office/drawing/2014/main" val="10000"/>
-                  </a:ext>
-                </a:extLst>
-              </a:tr>
-              <a:tr h="366164">
-                <a:tc>
-                  <a:txBody>
-                    <a:bodyPr/>
-                    <a:lstStyle/>
-                    <a:p>
-                      <a:pPr algn="ctr">
-                        <a:spcAft>
-                          <a:spcPts val="0"/>
-                        </a:spcAft>
-                      </a:pPr>
-                      <a:r>
-                        <a:rPr sz="1400" b="1" dirty="0">
-                          <a:solidFill>
-                            <a:schemeClr val="tx1"/>
-                          </a:solidFill>
-                          <a:latin typeface="微软雅黑"/>
-                          <a:ea typeface="微软雅黑"/>
-                        </a:rPr>
-                        <a:t>1–2 </a:t>
-                      </a:r>
-                      <a:r>
-                        <a:rPr sz="1400" b="1" dirty="0" err="1">
-                          <a:solidFill>
-                            <a:schemeClr val="tx1"/>
-                          </a:solidFill>
-                          <a:latin typeface="微软雅黑"/>
-                          <a:ea typeface="微软雅黑"/>
-                        </a:rPr>
-                        <a:t>字</a:t>
-                      </a:r>
-                      <a:endParaRPr sz="1400" b="1" dirty="0">
-                        <a:solidFill>
-                          <a:schemeClr val="tx1"/>
-                        </a:solidFill>
-                        <a:latin typeface="微软雅黑"/>
-                        <a:ea typeface="微软雅黑"/>
-                      </a:endParaRPr>
-                    </a:p>
-                  </a:txBody>
-                  <a:tcPr marL="41148" marR="41148" marT="18288" marB="18288" anchor="ctr">
-                    <a:solidFill>
-                      <a:srgbClr val="FFFFFF"/>
-                    </a:solidFill>
-                  </a:tcPr>
-                </a:tc>
-                <a:tc>
-                  <a:txBody>
-                    <a:bodyPr/>
-                    <a:lstStyle/>
-                    <a:p>
-                      <a:pPr algn="ctr">
-                        <a:spcAft>
-                          <a:spcPts val="0"/>
-                        </a:spcAft>
-                      </a:pPr>
-                      <a:r>
-                        <a:rPr sz="1400" b="0" dirty="0">
-                          <a:solidFill>
-                            <a:schemeClr val="tx1"/>
-                          </a:solidFill>
-                          <a:latin typeface="微软雅黑"/>
-                          <a:ea typeface="微软雅黑"/>
-                        </a:rPr>
-                        <a:t>2,927</a:t>
-                      </a:r>
-                    </a:p>
-                  </a:txBody>
-                  <a:tcPr marL="41148" marR="41148" marT="18288" marB="18288" anchor="ctr">
-                    <a:solidFill>
-                      <a:srgbClr val="FFFFFF"/>
-                    </a:solidFill>
-                  </a:tcPr>
-                </a:tc>
-                <a:tc>
-                  <a:txBody>
-                    <a:bodyPr/>
-                    <a:lstStyle/>
-                    <a:p>
-                      <a:pPr algn="ctr">
-                        <a:spcAft>
-                          <a:spcPts val="0"/>
-                        </a:spcAft>
-                      </a:pPr>
-                      <a:r>
-                        <a:rPr sz="1400" b="0" dirty="0">
-                          <a:solidFill>
-                            <a:schemeClr val="tx1"/>
-                          </a:solidFill>
-                          <a:latin typeface="微软雅黑"/>
-                          <a:ea typeface="微软雅黑"/>
-                        </a:rPr>
-                        <a:t>0.92%</a:t>
-                      </a:r>
-                    </a:p>
-                  </a:txBody>
-                  <a:tcPr marL="41148" marR="41148" marT="18288" marB="18288" anchor="ctr">
-                    <a:solidFill>
-                      <a:srgbClr val="FFFFFF"/>
-                    </a:solidFill>
-                  </a:tcPr>
-                </a:tc>
-                <a:tc>
-                  <a:txBody>
-                    <a:bodyPr/>
-                    <a:lstStyle/>
-                    <a:p>
-                      <a:pPr algn="ctr">
-                        <a:spcAft>
-                          <a:spcPts val="0"/>
-                        </a:spcAft>
-                      </a:pPr>
-                      <a:r>
-                        <a:rPr sz="1400" b="0" dirty="0">
-                          <a:solidFill>
-                            <a:schemeClr val="tx1"/>
-                          </a:solidFill>
-                          <a:latin typeface="微软雅黑"/>
-                          <a:ea typeface="微软雅黑"/>
-                        </a:rPr>
-                        <a:t>5.06%</a:t>
-                      </a:r>
-                    </a:p>
-                  </a:txBody>
-                  <a:tcPr marL="41148" marR="41148" marT="18288" marB="18288" anchor="ctr">
-                    <a:solidFill>
-                      <a:srgbClr val="FFFFFF"/>
-                    </a:solidFill>
-                  </a:tcPr>
-                </a:tc>
-                <a:tc>
-                  <a:txBody>
-                    <a:bodyPr/>
-                    <a:lstStyle/>
-                    <a:p>
-                      <a:pPr algn="ctr">
-                        <a:spcAft>
-                          <a:spcPts val="0"/>
-                        </a:spcAft>
-                      </a:pPr>
-                      <a:r>
-                        <a:rPr sz="1400" b="0" dirty="0">
-                          <a:solidFill>
-                            <a:schemeClr val="tx1"/>
-                          </a:solidFill>
-                          <a:latin typeface="微软雅黑"/>
-                          <a:ea typeface="微软雅黑"/>
-                        </a:rPr>
-                        <a:t>0.51%</a:t>
-                      </a:r>
-                    </a:p>
-                  </a:txBody>
-                  <a:tcPr marL="41148" marR="41148" marT="18288" marB="18288" anchor="ctr">
-                    <a:solidFill>
-                      <a:srgbClr val="FFFFFF"/>
-                    </a:solidFill>
-                  </a:tcPr>
-                </a:tc>
-                <a:tc>
-                  <a:txBody>
-                    <a:bodyPr/>
-                    <a:lstStyle/>
-                    <a:p>
-                      <a:pPr algn="ctr">
-                        <a:spcAft>
-                          <a:spcPts val="0"/>
-                        </a:spcAft>
-                      </a:pPr>
-                      <a:r>
-                        <a:rPr sz="1400" b="0" dirty="0">
-                          <a:solidFill>
-                            <a:schemeClr val="tx1"/>
-                          </a:solidFill>
-                          <a:latin typeface="微软雅黑"/>
-                          <a:ea typeface="微软雅黑"/>
-                        </a:rPr>
-                        <a:t>2.43%</a:t>
-                      </a:r>
-                    </a:p>
-                  </a:txBody>
-                  <a:tcPr marL="41148" marR="41148" marT="18288" marB="18288" anchor="ctr">
-                    <a:solidFill>
-                      <a:srgbClr val="FFFFFF"/>
-                    </a:solidFill>
-                  </a:tcPr>
-                </a:tc>
-                <a:extLst>
-                  <a:ext uri="{0D108BD9-81ED-4DB2-BD59-A6C34878D82A}">
-                    <a16:rowId xmlns:a16="http://schemas.microsoft.com/office/drawing/2014/main" val="10001"/>
-                  </a:ext>
-                </a:extLst>
-              </a:tr>
-              <a:tr h="366164">
-                <a:tc>
-                  <a:txBody>
-                    <a:bodyPr/>
-                    <a:lstStyle/>
-                    <a:p>
-                      <a:pPr algn="ctr">
-                        <a:spcAft>
-                          <a:spcPts val="0"/>
-                        </a:spcAft>
-                      </a:pPr>
-                      <a:r>
-                        <a:rPr sz="1400" b="1">
-                          <a:solidFill>
-                            <a:schemeClr val="tx1"/>
-                          </a:solidFill>
-                          <a:latin typeface="微软雅黑"/>
-                          <a:ea typeface="微软雅黑"/>
-                        </a:rPr>
-                        <a:t>3–5 字</a:t>
-                      </a:r>
-                    </a:p>
-                  </a:txBody>
-                  <a:tcPr marL="41148" marR="41148" marT="18288" marB="18288" anchor="ctr">
-                    <a:solidFill>
-                      <a:srgbClr val="F8FAFC"/>
-                    </a:solidFill>
-                  </a:tcPr>
-                </a:tc>
-                <a:tc>
-                  <a:txBody>
-                    <a:bodyPr/>
-                    <a:lstStyle/>
-                    <a:p>
-                      <a:pPr algn="ctr">
-                        <a:spcAft>
-                          <a:spcPts val="0"/>
-                        </a:spcAft>
-                      </a:pPr>
-                      <a:r>
-                        <a:rPr sz="1400" b="0" dirty="0">
-                          <a:solidFill>
-                            <a:schemeClr val="tx1"/>
-                          </a:solidFill>
-                          <a:latin typeface="微软雅黑"/>
-                          <a:ea typeface="微软雅黑"/>
-                        </a:rPr>
-                        <a:t>4,552</a:t>
-                      </a:r>
-                    </a:p>
-                  </a:txBody>
-                  <a:tcPr marL="41148" marR="41148" marT="18288" marB="18288" anchor="ctr">
-                    <a:solidFill>
-                      <a:srgbClr val="F8FAFC"/>
-                    </a:solidFill>
-                  </a:tcPr>
-                </a:tc>
-                <a:tc>
-                  <a:txBody>
-                    <a:bodyPr/>
-                    <a:lstStyle/>
-                    <a:p>
-                      <a:pPr algn="ctr">
-                        <a:spcAft>
-                          <a:spcPts val="0"/>
-                        </a:spcAft>
-                      </a:pPr>
-                      <a:r>
-                        <a:rPr sz="1400" b="0" dirty="0">
-                          <a:solidFill>
-                            <a:schemeClr val="tx1"/>
-                          </a:solidFill>
-                          <a:latin typeface="微软雅黑"/>
-                          <a:ea typeface="微软雅黑"/>
-                        </a:rPr>
-                        <a:t>8.88%</a:t>
-                      </a:r>
-                    </a:p>
-                  </a:txBody>
-                  <a:tcPr marL="41148" marR="41148" marT="18288" marB="18288" anchor="ctr">
-                    <a:solidFill>
-                      <a:srgbClr val="F8FAFC"/>
-                    </a:solidFill>
-                  </a:tcPr>
-                </a:tc>
-                <a:tc>
-                  <a:txBody>
-                    <a:bodyPr/>
-                    <a:lstStyle/>
-                    <a:p>
-                      <a:pPr algn="ctr">
-                        <a:spcAft>
-                          <a:spcPts val="0"/>
-                        </a:spcAft>
-                      </a:pPr>
-                      <a:r>
-                        <a:rPr sz="1400" b="0" dirty="0">
-                          <a:solidFill>
-                            <a:schemeClr val="tx1"/>
-                          </a:solidFill>
-                          <a:latin typeface="微软雅黑"/>
-                          <a:ea typeface="微软雅黑"/>
-                        </a:rPr>
-                        <a:t>28.12%</a:t>
-                      </a:r>
-                    </a:p>
-                  </a:txBody>
-                  <a:tcPr marL="41148" marR="41148" marT="18288" marB="18288" anchor="ctr">
-                    <a:solidFill>
-                      <a:srgbClr val="F8FAFC"/>
-                    </a:solidFill>
-                  </a:tcPr>
-                </a:tc>
-                <a:tc>
-                  <a:txBody>
-                    <a:bodyPr/>
-                    <a:lstStyle/>
-                    <a:p>
-                      <a:pPr algn="ctr">
-                        <a:spcAft>
-                          <a:spcPts val="0"/>
-                        </a:spcAft>
-                      </a:pPr>
-                      <a:r>
-                        <a:rPr sz="1400" b="0" dirty="0">
-                          <a:solidFill>
-                            <a:schemeClr val="tx1"/>
-                          </a:solidFill>
-                          <a:latin typeface="微软雅黑"/>
-                          <a:ea typeface="微软雅黑"/>
-                        </a:rPr>
-                        <a:t>6.30%</a:t>
-                      </a:r>
-                    </a:p>
-                  </a:txBody>
-                  <a:tcPr marL="41148" marR="41148" marT="18288" marB="18288" anchor="ctr">
-                    <a:solidFill>
-                      <a:srgbClr val="F8FAFC"/>
-                    </a:solidFill>
-                  </a:tcPr>
-                </a:tc>
-                <a:tc>
-                  <a:txBody>
-                    <a:bodyPr/>
-                    <a:lstStyle/>
-                    <a:p>
-                      <a:pPr algn="ctr">
-                        <a:spcAft>
-                          <a:spcPts val="0"/>
-                        </a:spcAft>
-                      </a:pPr>
-                      <a:r>
-                        <a:rPr sz="1400" b="0" dirty="0">
-                          <a:solidFill>
-                            <a:schemeClr val="tx1"/>
-                          </a:solidFill>
-                          <a:latin typeface="微软雅黑"/>
-                          <a:ea typeface="微软雅黑"/>
-                        </a:rPr>
-                        <a:t>17.99%</a:t>
-                      </a:r>
-                    </a:p>
-                  </a:txBody>
-                  <a:tcPr marL="41148" marR="41148" marT="18288" marB="18288" anchor="ctr">
-                    <a:solidFill>
-                      <a:srgbClr val="F8FAFC"/>
-                    </a:solidFill>
-                  </a:tcPr>
-                </a:tc>
-                <a:extLst>
-                  <a:ext uri="{0D108BD9-81ED-4DB2-BD59-A6C34878D82A}">
-                    <a16:rowId xmlns:a16="http://schemas.microsoft.com/office/drawing/2014/main" val="10002"/>
-                  </a:ext>
-                </a:extLst>
-              </a:tr>
-              <a:tr h="366164">
-                <a:tc>
-                  <a:txBody>
-                    <a:bodyPr/>
-                    <a:lstStyle/>
-                    <a:p>
-                      <a:pPr algn="ctr">
-                        <a:spcAft>
-                          <a:spcPts val="0"/>
-                        </a:spcAft>
-                      </a:pPr>
-                      <a:r>
-                        <a:rPr sz="1400" b="1">
-                          <a:solidFill>
-                            <a:schemeClr val="tx1"/>
-                          </a:solidFill>
-                          <a:latin typeface="微软雅黑"/>
-                          <a:ea typeface="微软雅黑"/>
-                        </a:rPr>
-                        <a:t>6–10 字</a:t>
-                      </a:r>
-                    </a:p>
-                  </a:txBody>
-                  <a:tcPr marL="41148" marR="41148" marT="18288" marB="18288" anchor="ctr">
-                    <a:solidFill>
-                      <a:srgbClr val="FFFFFF"/>
-                    </a:solidFill>
-                  </a:tcPr>
-                </a:tc>
-                <a:tc>
-                  <a:txBody>
-                    <a:bodyPr/>
-                    <a:lstStyle/>
-                    <a:p>
-                      <a:pPr algn="ctr">
-                        <a:spcAft>
-                          <a:spcPts val="0"/>
-                        </a:spcAft>
-                      </a:pPr>
-                      <a:r>
-                        <a:rPr sz="1400" b="0">
-                          <a:solidFill>
-                            <a:schemeClr val="tx1"/>
-                          </a:solidFill>
-                          <a:latin typeface="微软雅黑"/>
-                          <a:ea typeface="微软雅黑"/>
-                        </a:rPr>
-                        <a:t>1,796</a:t>
-                      </a:r>
-                    </a:p>
-                  </a:txBody>
-                  <a:tcPr marL="41148" marR="41148" marT="18288" marB="18288" anchor="ctr">
-                    <a:solidFill>
-                      <a:srgbClr val="FFFFFF"/>
-                    </a:solidFill>
-                  </a:tcPr>
-                </a:tc>
-                <a:tc>
-                  <a:txBody>
-                    <a:bodyPr/>
-                    <a:lstStyle/>
-                    <a:p>
-                      <a:pPr algn="ctr">
-                        <a:spcAft>
-                          <a:spcPts val="0"/>
-                        </a:spcAft>
-                      </a:pPr>
-                      <a:r>
-                        <a:rPr sz="1400" b="0" dirty="0">
-                          <a:solidFill>
-                            <a:schemeClr val="tx1"/>
-                          </a:solidFill>
-                          <a:latin typeface="微软雅黑"/>
-                          <a:ea typeface="微软雅黑"/>
-                        </a:rPr>
-                        <a:t>27.56%</a:t>
-                      </a:r>
-                    </a:p>
-                  </a:txBody>
-                  <a:tcPr marL="41148" marR="41148" marT="18288" marB="18288" anchor="ctr">
-                    <a:solidFill>
-                      <a:srgbClr val="FFFFFF"/>
-                    </a:solidFill>
-                  </a:tcPr>
-                </a:tc>
-                <a:tc>
-                  <a:txBody>
-                    <a:bodyPr/>
-                    <a:lstStyle/>
-                    <a:p>
-                      <a:pPr algn="ctr">
-                        <a:spcAft>
-                          <a:spcPts val="0"/>
-                        </a:spcAft>
-                      </a:pPr>
-                      <a:r>
-                        <a:rPr sz="1400" b="0" dirty="0">
-                          <a:solidFill>
-                            <a:schemeClr val="tx1"/>
-                          </a:solidFill>
-                          <a:latin typeface="微软雅黑"/>
-                          <a:ea typeface="微软雅黑"/>
-                        </a:rPr>
-                        <a:t>54.62%</a:t>
-                      </a:r>
-                    </a:p>
-                  </a:txBody>
-                  <a:tcPr marL="41148" marR="41148" marT="18288" marB="18288" anchor="ctr">
-                    <a:solidFill>
-                      <a:srgbClr val="FFFFFF"/>
-                    </a:solidFill>
-                  </a:tcPr>
-                </a:tc>
-                <a:tc>
-                  <a:txBody>
-                    <a:bodyPr/>
-                    <a:lstStyle/>
-                    <a:p>
-                      <a:pPr algn="ctr">
-                        <a:spcAft>
-                          <a:spcPts val="0"/>
-                        </a:spcAft>
-                      </a:pPr>
-                      <a:r>
-                        <a:rPr sz="1400" b="0" dirty="0">
-                          <a:solidFill>
-                            <a:schemeClr val="tx1"/>
-                          </a:solidFill>
-                          <a:latin typeface="微软雅黑"/>
-                          <a:ea typeface="微软雅黑"/>
-                        </a:rPr>
-                        <a:t>23.16%</a:t>
-                      </a:r>
-                    </a:p>
-                  </a:txBody>
-                  <a:tcPr marL="41148" marR="41148" marT="18288" marB="18288" anchor="ctr">
-                    <a:solidFill>
-                      <a:srgbClr val="FFFFFF"/>
-                    </a:solidFill>
-                  </a:tcPr>
-                </a:tc>
-                <a:tc>
-                  <a:txBody>
-                    <a:bodyPr/>
-                    <a:lstStyle/>
-                    <a:p>
-                      <a:pPr algn="ctr">
-                        <a:spcAft>
-                          <a:spcPts val="0"/>
-                        </a:spcAft>
-                      </a:pPr>
-                      <a:r>
-                        <a:rPr sz="1400" b="0" dirty="0">
-                          <a:solidFill>
-                            <a:schemeClr val="tx1"/>
-                          </a:solidFill>
-                          <a:latin typeface="微软雅黑"/>
-                          <a:ea typeface="微软雅黑"/>
-                        </a:rPr>
-                        <a:t>48.22%</a:t>
-                      </a:r>
-                    </a:p>
-                  </a:txBody>
-                  <a:tcPr marL="41148" marR="41148" marT="18288" marB="18288" anchor="ctr">
-                    <a:solidFill>
-                      <a:srgbClr val="FFFFFF"/>
-                    </a:solidFill>
-                  </a:tcPr>
-                </a:tc>
-                <a:extLst>
-                  <a:ext uri="{0D108BD9-81ED-4DB2-BD59-A6C34878D82A}">
-                    <a16:rowId xmlns:a16="http://schemas.microsoft.com/office/drawing/2014/main" val="10003"/>
-                  </a:ext>
-                </a:extLst>
-              </a:tr>
-              <a:tr h="366164">
-                <a:tc>
-                  <a:txBody>
-                    <a:bodyPr/>
-                    <a:lstStyle/>
-                    <a:p>
-                      <a:pPr algn="ctr">
-                        <a:spcAft>
-                          <a:spcPts val="0"/>
-                        </a:spcAft>
-                      </a:pPr>
-                      <a:r>
-                        <a:rPr sz="1400" b="1" dirty="0">
-                          <a:solidFill>
-                            <a:schemeClr val="tx1"/>
-                          </a:solidFill>
-                          <a:latin typeface="微软雅黑"/>
-                          <a:ea typeface="微软雅黑"/>
-                        </a:rPr>
-                        <a:t>&gt;10 </a:t>
-                      </a:r>
-                      <a:r>
-                        <a:rPr sz="1400" b="1" dirty="0" err="1">
-                          <a:solidFill>
-                            <a:schemeClr val="tx1"/>
-                          </a:solidFill>
-                          <a:latin typeface="微软雅黑"/>
-                          <a:ea typeface="微软雅黑"/>
-                        </a:rPr>
-                        <a:t>字</a:t>
-                      </a:r>
-                      <a:endParaRPr sz="1400" b="1" dirty="0">
-                        <a:solidFill>
-                          <a:schemeClr val="tx1"/>
-                        </a:solidFill>
-                        <a:latin typeface="微软雅黑"/>
-                        <a:ea typeface="微软雅黑"/>
-                      </a:endParaRPr>
-                    </a:p>
-                  </a:txBody>
-                  <a:tcPr marL="41148" marR="41148" marT="18288" marB="18288" anchor="ctr">
-                    <a:solidFill>
-                      <a:srgbClr val="F8FAFC"/>
-                    </a:solidFill>
-                  </a:tcPr>
-                </a:tc>
-                <a:tc>
-                  <a:txBody>
-                    <a:bodyPr/>
-                    <a:lstStyle/>
-                    <a:p>
-                      <a:pPr algn="ctr">
-                        <a:spcAft>
-                          <a:spcPts val="0"/>
-                        </a:spcAft>
-                      </a:pPr>
-                      <a:r>
-                        <a:rPr sz="1400" b="0" dirty="0">
-                          <a:solidFill>
-                            <a:schemeClr val="tx1"/>
-                          </a:solidFill>
-                          <a:latin typeface="微软雅黑"/>
-                          <a:ea typeface="微软雅黑"/>
-                        </a:rPr>
-                        <a:t>725</a:t>
-                      </a:r>
-                    </a:p>
-                  </a:txBody>
-                  <a:tcPr marL="41148" marR="41148" marT="18288" marB="18288" anchor="ctr">
-                    <a:solidFill>
-                      <a:srgbClr val="F8FAFC"/>
-                    </a:solidFill>
-                  </a:tcPr>
-                </a:tc>
-                <a:tc>
-                  <a:txBody>
-                    <a:bodyPr/>
-                    <a:lstStyle/>
-                    <a:p>
-                      <a:pPr algn="ctr">
-                        <a:spcAft>
-                          <a:spcPts val="0"/>
-                        </a:spcAft>
-                      </a:pPr>
-                      <a:r>
-                        <a:rPr sz="1400" b="0" dirty="0">
-                          <a:solidFill>
-                            <a:schemeClr val="tx1"/>
-                          </a:solidFill>
-                          <a:latin typeface="微软雅黑"/>
-                          <a:ea typeface="微软雅黑"/>
-                        </a:rPr>
-                        <a:t>38.21%</a:t>
-                      </a:r>
-                    </a:p>
-                  </a:txBody>
-                  <a:tcPr marL="41148" marR="41148" marT="18288" marB="18288" anchor="ctr">
-                    <a:solidFill>
-                      <a:srgbClr val="F8FAFC"/>
-                    </a:solidFill>
-                  </a:tcPr>
-                </a:tc>
-                <a:tc>
-                  <a:txBody>
-                    <a:bodyPr/>
-                    <a:lstStyle/>
-                    <a:p>
-                      <a:pPr algn="ctr">
-                        <a:spcAft>
-                          <a:spcPts val="0"/>
-                        </a:spcAft>
-                      </a:pPr>
-                      <a:r>
-                        <a:rPr sz="1400" b="0">
-                          <a:solidFill>
-                            <a:schemeClr val="tx1"/>
-                          </a:solidFill>
-                          <a:latin typeface="微软雅黑"/>
-                          <a:ea typeface="微软雅黑"/>
-                        </a:rPr>
-                        <a:t>57.38%</a:t>
-                      </a:r>
-                    </a:p>
-                  </a:txBody>
-                  <a:tcPr marL="41148" marR="41148" marT="18288" marB="18288" anchor="ctr">
-                    <a:solidFill>
-                      <a:srgbClr val="F8FAFC"/>
-                    </a:solidFill>
-                  </a:tcPr>
-                </a:tc>
-                <a:tc>
-                  <a:txBody>
-                    <a:bodyPr/>
-                    <a:lstStyle/>
-                    <a:p>
-                      <a:pPr algn="ctr">
-                        <a:spcAft>
-                          <a:spcPts val="0"/>
-                        </a:spcAft>
-                      </a:pPr>
-                      <a:r>
-                        <a:rPr sz="1400" b="0" dirty="0">
-                          <a:solidFill>
-                            <a:schemeClr val="tx1"/>
-                          </a:solidFill>
-                          <a:latin typeface="微软雅黑"/>
-                          <a:ea typeface="微软雅黑"/>
-                        </a:rPr>
-                        <a:t>35.03%</a:t>
-                      </a:r>
-                    </a:p>
-                  </a:txBody>
-                  <a:tcPr marL="41148" marR="41148" marT="18288" marB="18288" anchor="ctr">
-                    <a:solidFill>
-                      <a:srgbClr val="F8FAFC"/>
-                    </a:solidFill>
-                  </a:tcPr>
-                </a:tc>
-                <a:tc>
-                  <a:txBody>
-                    <a:bodyPr/>
-                    <a:lstStyle/>
-                    <a:p>
-                      <a:pPr algn="ctr">
-                        <a:spcAft>
-                          <a:spcPts val="0"/>
-                        </a:spcAft>
-                      </a:pPr>
-                      <a:r>
-                        <a:rPr sz="1400" b="0" dirty="0">
-                          <a:solidFill>
-                            <a:schemeClr val="tx1"/>
-                          </a:solidFill>
-                          <a:latin typeface="微软雅黑"/>
-                          <a:ea typeface="微软雅黑"/>
-                        </a:rPr>
-                        <a:t>49.93%</a:t>
-                      </a:r>
-                    </a:p>
-                  </a:txBody>
-                  <a:tcPr marL="41148" marR="41148" marT="18288" marB="18288" anchor="ctr">
-                    <a:solidFill>
-                      <a:srgbClr val="F8FAFC"/>
-                    </a:solidFill>
-                  </a:tcPr>
-                </a:tc>
-                <a:extLst>
-                  <a:ext uri="{0D108BD9-81ED-4DB2-BD59-A6C34878D82A}">
-                    <a16:rowId xmlns:a16="http://schemas.microsoft.com/office/drawing/2014/main" val="10004"/>
-                  </a:ext>
-                </a:extLst>
-              </a:tr>
-            </a:tbl>
-          </a:graphicData>
-        </a:graphic>
-      </p:graphicFrame>
-      <p:sp>
-        <p:nvSpPr>
-          <p:cNvPr id="21" name="TextBox 4">
-            <a:extLst>
-              <a:ext uri="{FF2B5EF4-FFF2-40B4-BE49-F238E27FC236}">
-                <a16:creationId xmlns:a16="http://schemas.microsoft.com/office/drawing/2014/main" id="{4BF5F2B0-078C-6A93-699C-BD06A9C8B254}"/>
-              </a:ext>
-            </a:extLst>
-          </p:cNvPr>
-          <p:cNvSpPr txBox="1"/>
-          <p:nvPr/>
-        </p:nvSpPr>
-        <p:spPr>
-          <a:xfrm>
-            <a:off x="566928" y="3301249"/>
-            <a:ext cx="4389120" cy="344710"/>
-          </a:xfrm>
-          <a:prstGeom prst="rect">
-            <a:avLst/>
-          </a:prstGeom>
-          <a:noFill/>
-        </p:spPr>
-        <p:txBody>
-          <a:bodyPr wrap="square" lIns="18288" tIns="18288" rIns="18288" bIns="18288" anchor="ctr">
-            <a:spAutoFit/>
-          </a:bodyPr>
-          <a:lstStyle/>
-          <a:p>
-            <a:pPr algn="l">
-              <a:lnSpc>
-                <a:spcPct val="100000"/>
-              </a:lnSpc>
-              <a:spcAft>
-                <a:spcPts val="0"/>
-              </a:spcAft>
-            </a:pPr>
-            <a:r>
-              <a:rPr lang="en-US" altLang="zh-CN" sz="2000" b="1" dirty="0">
-                <a:latin typeface="微软雅黑"/>
-                <a:ea typeface="微软雅黑"/>
-              </a:rPr>
-              <a:t>Case </a:t>
-            </a:r>
-            <a:r>
-              <a:rPr lang="zh-CN" altLang="en-US" sz="2000" b="1" dirty="0">
-                <a:latin typeface="微软雅黑"/>
-                <a:ea typeface="微软雅黑"/>
-              </a:rPr>
-              <a:t>分析</a:t>
-            </a:r>
-            <a:endParaRPr sz="2000" b="1" dirty="0">
-              <a:latin typeface="微软雅黑"/>
-              <a:ea typeface="微软雅黑"/>
-            </a:endParaRPr>
-          </a:p>
-        </p:txBody>
-      </p:sp>
-      <p:graphicFrame>
-        <p:nvGraphicFramePr>
-          <p:cNvPr id="22" name="Table 6">
-            <a:extLst>
-              <a:ext uri="{FF2B5EF4-FFF2-40B4-BE49-F238E27FC236}">
-                <a16:creationId xmlns:a16="http://schemas.microsoft.com/office/drawing/2014/main" id="{7AE9D80F-3A2B-91ED-5C5D-476C8F974B7D}"/>
-              </a:ext>
-            </a:extLst>
-          </p:cNvPr>
-          <p:cNvGraphicFramePr>
-            <a:graphicFrameLocks noGrp="1"/>
-          </p:cNvGraphicFramePr>
-          <p:nvPr>
-            <p:extLst>
-              <p:ext uri="{D42A27DB-BD31-4B8C-83A1-F6EECF244321}">
-                <p14:modId xmlns:p14="http://schemas.microsoft.com/office/powerpoint/2010/main" val="1833809065"/>
-              </p:ext>
-            </p:extLst>
-          </p:nvPr>
-        </p:nvGraphicFramePr>
-        <p:xfrm>
-          <a:off x="566928" y="3805201"/>
-          <a:ext cx="11055095" cy="2617902"/>
-        </p:xfrm>
-        <a:graphic>
-          <a:graphicData uri="http://schemas.openxmlformats.org/drawingml/2006/table">
-            <a:tbl>
-              <a:tblPr firstRow="1" bandRow="1">
-                <a:tableStyleId>{5C22544A-7EE6-4342-B048-85BDC9FD1C3A}</a:tableStyleId>
-              </a:tblPr>
-              <a:tblGrid>
-                <a:gridCol w="1590747">
-                  <a:extLst>
-                    <a:ext uri="{9D8B030D-6E8A-4147-A177-3AD203B41FA5}">
-                      <a16:colId xmlns:a16="http://schemas.microsoft.com/office/drawing/2014/main" val="20000"/>
-                    </a:ext>
-                  </a:extLst>
-                </a:gridCol>
-                <a:gridCol w="1980375">
-                  <a:extLst>
-                    <a:ext uri="{9D8B030D-6E8A-4147-A177-3AD203B41FA5}">
-                      <a16:colId xmlns:a16="http://schemas.microsoft.com/office/drawing/2014/main" val="20001"/>
-                    </a:ext>
-                  </a:extLst>
-                </a:gridCol>
-                <a:gridCol w="1105325">
-                  <a:extLst>
-                    <a:ext uri="{9D8B030D-6E8A-4147-A177-3AD203B41FA5}">
-                      <a16:colId xmlns:a16="http://schemas.microsoft.com/office/drawing/2014/main" val="20002"/>
-                    </a:ext>
-                  </a:extLst>
-                </a:gridCol>
-                <a:gridCol w="1024729">
-                  <a:extLst>
-                    <a:ext uri="{9D8B030D-6E8A-4147-A177-3AD203B41FA5}">
-                      <a16:colId xmlns:a16="http://schemas.microsoft.com/office/drawing/2014/main" val="20003"/>
-                    </a:ext>
-                  </a:extLst>
-                </a:gridCol>
-                <a:gridCol w="5353919">
-                  <a:extLst>
-                    <a:ext uri="{9D8B030D-6E8A-4147-A177-3AD203B41FA5}">
-                      <a16:colId xmlns:a16="http://schemas.microsoft.com/office/drawing/2014/main" val="20004"/>
-                    </a:ext>
-                  </a:extLst>
-                </a:gridCol>
-              </a:tblGrid>
-              <a:tr h="373986">
-                <a:tc>
-                  <a:txBody>
-                    <a:bodyPr/>
-                    <a:lstStyle/>
-                    <a:p>
-                      <a:pPr algn="ctr" fontAlgn="t">
-                        <a:buNone/>
-                      </a:pPr>
-                      <a:r>
-                        <a:rPr lang="zh-CN" sz="1400" dirty="0">
-                          <a:solidFill>
-                            <a:schemeClr val="tx1"/>
-                          </a:solidFill>
-                          <a:effectLst/>
-                          <a:latin typeface="Microsoft YaHei" panose="020B0503020204020204" pitchFamily="34" charset="-122"/>
-                          <a:ea typeface="Microsoft YaHei" panose="020B0503020204020204" pitchFamily="34" charset="-122"/>
-                        </a:rPr>
-                        <a:t>Query</a:t>
-                      </a:r>
-                    </a:p>
-                  </a:txBody>
-                  <a:tcPr anchor="ctr">
-                    <a:solidFill>
-                      <a:srgbClr val="E2E8F0"/>
-                    </a:solidFill>
-                  </a:tcPr>
-                </a:tc>
-                <a:tc>
-                  <a:txBody>
-                    <a:bodyPr/>
-                    <a:lstStyle/>
-                    <a:p>
-                      <a:pPr algn="ctr" fontAlgn="t">
-                        <a:buNone/>
-                      </a:pPr>
-                      <a:r>
-                        <a:rPr lang="zh-CN" sz="1400">
-                          <a:solidFill>
-                            <a:schemeClr val="tx1"/>
-                          </a:solidFill>
-                          <a:effectLst/>
-                          <a:latin typeface="Microsoft YaHei" panose="020B0503020204020204" pitchFamily="34" charset="-122"/>
-                          <a:ea typeface="Microsoft YaHei" panose="020B0503020204020204" pitchFamily="34" charset="-122"/>
-                        </a:rPr>
-                        <a:t>目标 POI</a:t>
-                      </a:r>
-                    </a:p>
-                  </a:txBody>
-                  <a:tcPr anchor="ctr">
-                    <a:solidFill>
-                      <a:srgbClr val="E2E8F0"/>
-                    </a:solidFill>
-                  </a:tcPr>
-                </a:tc>
-                <a:tc>
-                  <a:txBody>
-                    <a:bodyPr/>
-                    <a:lstStyle/>
-                    <a:p>
-                      <a:pPr algn="ctr" fontAlgn="t">
-                        <a:buNone/>
-                      </a:pPr>
-                      <a:r>
-                        <a:rPr lang="zh-CN" sz="1400">
-                          <a:solidFill>
-                            <a:schemeClr val="tx1"/>
-                          </a:solidFill>
-                          <a:effectLst/>
-                          <a:latin typeface="Microsoft YaHei" panose="020B0503020204020204" pitchFamily="34" charset="-122"/>
-                          <a:ea typeface="Microsoft YaHei" panose="020B0503020204020204" pitchFamily="34" charset="-122"/>
-                        </a:rPr>
-                        <a:t>0.6B 排名</a:t>
-                      </a:r>
-                    </a:p>
-                  </a:txBody>
-                  <a:tcPr anchor="ctr">
-                    <a:solidFill>
-                      <a:srgbClr val="E2E8F0"/>
-                    </a:solidFill>
-                  </a:tcPr>
-                </a:tc>
-                <a:tc>
-                  <a:txBody>
-                    <a:bodyPr/>
-                    <a:lstStyle/>
-                    <a:p>
-                      <a:pPr algn="ctr" fontAlgn="t">
-                        <a:buNone/>
-                      </a:pPr>
-                      <a:r>
-                        <a:rPr lang="zh-CN" sz="1400" dirty="0">
-                          <a:solidFill>
-                            <a:schemeClr val="tx1"/>
-                          </a:solidFill>
-                          <a:effectLst/>
-                          <a:latin typeface="Microsoft YaHei" panose="020B0503020204020204" pitchFamily="34" charset="-122"/>
-                          <a:ea typeface="Microsoft YaHei" panose="020B0503020204020204" pitchFamily="34" charset="-122"/>
-                        </a:rPr>
-                        <a:t>4B 排名</a:t>
-                      </a:r>
-                    </a:p>
-                  </a:txBody>
-                  <a:tcPr anchor="ctr">
-                    <a:solidFill>
-                      <a:srgbClr val="E2E8F0"/>
-                    </a:solidFill>
-                  </a:tcPr>
-                </a:tc>
-                <a:tc>
-                  <a:txBody>
-                    <a:bodyPr/>
-                    <a:lstStyle/>
-                    <a:p>
-                      <a:pPr algn="ctr" fontAlgn="t">
-                        <a:buNone/>
-                      </a:pPr>
-                      <a:r>
-                        <a:rPr lang="zh-CN" sz="1400">
-                          <a:solidFill>
-                            <a:schemeClr val="tx1"/>
-                          </a:solidFill>
-                          <a:effectLst/>
-                          <a:latin typeface="Microsoft YaHei" panose="020B0503020204020204" pitchFamily="34" charset="-122"/>
-                          <a:ea typeface="Microsoft YaHei" panose="020B0503020204020204" pitchFamily="34" charset="-122"/>
-                        </a:rPr>
-                        <a:t>现象</a:t>
-                      </a:r>
-                    </a:p>
-                  </a:txBody>
-                  <a:tcPr anchor="ctr">
-                    <a:solidFill>
-                      <a:srgbClr val="E2E8F0"/>
-                    </a:solidFill>
-                  </a:tcPr>
-                </a:tc>
-                <a:extLst>
-                  <a:ext uri="{0D108BD9-81ED-4DB2-BD59-A6C34878D82A}">
-                    <a16:rowId xmlns:a16="http://schemas.microsoft.com/office/drawing/2014/main" val="10000"/>
-                  </a:ext>
-                </a:extLst>
-              </a:tr>
-              <a:tr h="373986">
-                <a:tc>
-                  <a:txBody>
-                    <a:bodyPr/>
-                    <a:lstStyle/>
-                    <a:p>
-                      <a:pPr algn="ctr" fontAlgn="t">
-                        <a:buNone/>
-                      </a:pPr>
-                      <a:r>
-                        <a:rPr lang="zh-CN" sz="1400">
-                          <a:solidFill>
-                            <a:schemeClr val="tx1"/>
-                          </a:solidFill>
-                          <a:effectLst/>
-                          <a:latin typeface="Microsoft YaHei" panose="020B0503020204020204" pitchFamily="34" charset="-122"/>
-                          <a:ea typeface="Microsoft YaHei" panose="020B0503020204020204" pitchFamily="34" charset="-122"/>
-                        </a:rPr>
-                        <a:t>双桥万达</a:t>
-                      </a:r>
-                    </a:p>
-                  </a:txBody>
-                  <a:tcPr anchor="ctr">
-                    <a:solidFill>
-                      <a:srgbClr val="FFFFFF"/>
-                    </a:solidFill>
-                  </a:tcPr>
-                </a:tc>
-                <a:tc>
-                  <a:txBody>
-                    <a:bodyPr/>
-                    <a:lstStyle/>
-                    <a:p>
-                      <a:pPr algn="ctr" fontAlgn="t">
-                        <a:buNone/>
-                      </a:pPr>
-                      <a:r>
-                        <a:rPr lang="zh-CN" sz="1400">
-                          <a:solidFill>
-                            <a:schemeClr val="tx1"/>
-                          </a:solidFill>
-                          <a:effectLst/>
-                          <a:latin typeface="Microsoft YaHei" panose="020B0503020204020204" pitchFamily="34" charset="-122"/>
-                          <a:ea typeface="Microsoft YaHei" panose="020B0503020204020204" pitchFamily="34" charset="-122"/>
-                        </a:rPr>
-                        <a:t>万达广场（双桥店）</a:t>
-                      </a:r>
-                    </a:p>
-                  </a:txBody>
-                  <a:tcPr anchor="ctr">
-                    <a:solidFill>
-                      <a:srgbClr val="FFFFFF"/>
-                    </a:solidFill>
-                  </a:tcPr>
-                </a:tc>
-                <a:tc>
-                  <a:txBody>
-                    <a:bodyPr/>
-                    <a:lstStyle/>
-                    <a:p>
-                      <a:pPr algn="ctr" fontAlgn="t">
-                        <a:buNone/>
-                      </a:pPr>
-                      <a:r>
-                        <a:rPr lang="zh-CN" sz="1400">
-                          <a:solidFill>
-                            <a:schemeClr val="tx1"/>
-                          </a:solidFill>
-                          <a:effectLst/>
-                          <a:latin typeface="Microsoft YaHei" panose="020B0503020204020204" pitchFamily="34" charset="-122"/>
-                          <a:ea typeface="Microsoft YaHei" panose="020B0503020204020204" pitchFamily="34" charset="-122"/>
-                        </a:rPr>
-                        <a:t>5</a:t>
-                      </a:r>
-                    </a:p>
-                  </a:txBody>
-                  <a:tcPr anchor="ctr">
-                    <a:solidFill>
-                      <a:srgbClr val="FFFFFF"/>
-                    </a:solidFill>
-                  </a:tcPr>
-                </a:tc>
-                <a:tc>
-                  <a:txBody>
-                    <a:bodyPr/>
-                    <a:lstStyle/>
-                    <a:p>
-                      <a:pPr algn="ctr" fontAlgn="t">
-                        <a:buNone/>
-                      </a:pPr>
-                      <a:r>
-                        <a:rPr lang="zh-CN" sz="1400">
-                          <a:solidFill>
-                            <a:schemeClr val="tx1"/>
-                          </a:solidFill>
-                          <a:effectLst/>
-                          <a:latin typeface="Microsoft YaHei" panose="020B0503020204020204" pitchFamily="34" charset="-122"/>
-                          <a:ea typeface="Microsoft YaHei" panose="020B0503020204020204" pitchFamily="34" charset="-122"/>
-                        </a:rPr>
-                        <a:t>&gt;20</a:t>
-                      </a:r>
-                    </a:p>
-                  </a:txBody>
-                  <a:tcPr anchor="ctr">
-                    <a:solidFill>
-                      <a:srgbClr val="FFFFFF"/>
-                    </a:solidFill>
-                  </a:tcPr>
-                </a:tc>
-                <a:tc>
-                  <a:txBody>
-                    <a:bodyPr/>
-                    <a:lstStyle/>
-                    <a:p>
-                      <a:pPr algn="ctr" fontAlgn="t">
-                        <a:buNone/>
-                      </a:pPr>
-                      <a:r>
-                        <a:rPr lang="zh-CN" sz="1400">
-                          <a:solidFill>
-                            <a:schemeClr val="tx1"/>
-                          </a:solidFill>
-                          <a:effectLst/>
-                          <a:latin typeface="Microsoft YaHei" panose="020B0503020204020204" pitchFamily="34" charset="-122"/>
-                          <a:ea typeface="Microsoft YaHei" panose="020B0503020204020204" pitchFamily="34" charset="-122"/>
-                        </a:rPr>
-                        <a:t>0.6B 主要返回双桥万达及其入口；4B Top-1 为“万达桥”</a:t>
-                      </a:r>
-                    </a:p>
-                  </a:txBody>
-                  <a:tcPr anchor="ctr">
-                    <a:solidFill>
-                      <a:srgbClr val="FFFFFF"/>
-                    </a:solidFill>
-                  </a:tcPr>
-                </a:tc>
-                <a:extLst>
-                  <a:ext uri="{0D108BD9-81ED-4DB2-BD59-A6C34878D82A}">
-                    <a16:rowId xmlns:a16="http://schemas.microsoft.com/office/drawing/2014/main" val="10001"/>
-                  </a:ext>
-                </a:extLst>
-              </a:tr>
-              <a:tr h="373986">
-                <a:tc>
-                  <a:txBody>
-                    <a:bodyPr/>
-                    <a:lstStyle/>
-                    <a:p>
-                      <a:pPr algn="ctr" fontAlgn="t">
-                        <a:buNone/>
-                      </a:pPr>
-                      <a:r>
-                        <a:rPr lang="zh-CN" sz="1400">
-                          <a:solidFill>
-                            <a:schemeClr val="tx1"/>
-                          </a:solidFill>
-                          <a:effectLst/>
-                          <a:latin typeface="Microsoft YaHei" panose="020B0503020204020204" pitchFamily="34" charset="-122"/>
-                          <a:ea typeface="Microsoft YaHei" panose="020B0503020204020204" pitchFamily="34" charset="-122"/>
-                        </a:rPr>
-                        <a:t>北京大学东门</a:t>
-                      </a:r>
-                    </a:p>
-                  </a:txBody>
-                  <a:tcPr anchor="ctr">
-                    <a:solidFill>
-                      <a:srgbClr val="F8FAFC"/>
-                    </a:solidFill>
-                  </a:tcPr>
-                </a:tc>
-                <a:tc>
-                  <a:txBody>
-                    <a:bodyPr/>
-                    <a:lstStyle/>
-                    <a:p>
-                      <a:pPr algn="ctr" fontAlgn="t">
-                        <a:buNone/>
-                      </a:pPr>
-                      <a:r>
-                        <a:rPr lang="zh-CN" sz="1400">
-                          <a:solidFill>
-                            <a:schemeClr val="tx1"/>
-                          </a:solidFill>
-                          <a:effectLst/>
-                          <a:latin typeface="Microsoft YaHei" panose="020B0503020204020204" pitchFamily="34" charset="-122"/>
-                          <a:ea typeface="Microsoft YaHei" panose="020B0503020204020204" pitchFamily="34" charset="-122"/>
-                        </a:rPr>
-                        <a:t>北京大学-东门</a:t>
-                      </a:r>
-                    </a:p>
-                  </a:txBody>
-                  <a:tcPr anchor="ctr">
-                    <a:solidFill>
-                      <a:srgbClr val="F8FAFC"/>
-                    </a:solidFill>
-                  </a:tcPr>
-                </a:tc>
-                <a:tc>
-                  <a:txBody>
-                    <a:bodyPr/>
-                    <a:lstStyle/>
-                    <a:p>
-                      <a:pPr algn="ctr" fontAlgn="t">
-                        <a:buNone/>
-                      </a:pPr>
-                      <a:r>
-                        <a:rPr lang="zh-CN" sz="1400">
-                          <a:solidFill>
-                            <a:schemeClr val="tx1"/>
-                          </a:solidFill>
-                          <a:effectLst/>
-                          <a:latin typeface="Microsoft YaHei" panose="020B0503020204020204" pitchFamily="34" charset="-122"/>
-                          <a:ea typeface="Microsoft YaHei" panose="020B0503020204020204" pitchFamily="34" charset="-122"/>
-                        </a:rPr>
-                        <a:t>1</a:t>
-                      </a:r>
-                    </a:p>
-                  </a:txBody>
-                  <a:tcPr anchor="ctr">
-                    <a:solidFill>
-                      <a:srgbClr val="F8FAFC"/>
-                    </a:solidFill>
-                  </a:tcPr>
-                </a:tc>
-                <a:tc>
-                  <a:txBody>
-                    <a:bodyPr/>
-                    <a:lstStyle/>
-                    <a:p>
-                      <a:pPr algn="ctr" fontAlgn="t">
-                        <a:buNone/>
-                      </a:pPr>
-                      <a:r>
-                        <a:rPr lang="zh-CN" sz="1400">
-                          <a:solidFill>
-                            <a:schemeClr val="tx1"/>
-                          </a:solidFill>
-                          <a:effectLst/>
-                          <a:latin typeface="Microsoft YaHei" panose="020B0503020204020204" pitchFamily="34" charset="-122"/>
-                          <a:ea typeface="Microsoft YaHei" panose="020B0503020204020204" pitchFamily="34" charset="-122"/>
-                        </a:rPr>
-                        <a:t>&gt;20</a:t>
-                      </a:r>
-                    </a:p>
-                  </a:txBody>
-                  <a:tcPr anchor="ctr">
-                    <a:solidFill>
-                      <a:srgbClr val="F8FAFC"/>
-                    </a:solidFill>
-                  </a:tcPr>
-                </a:tc>
-                <a:tc>
-                  <a:txBody>
-                    <a:bodyPr/>
-                    <a:lstStyle/>
-                    <a:p>
-                      <a:pPr algn="ctr" fontAlgn="t">
-                        <a:buNone/>
-                      </a:pPr>
-                      <a:r>
-                        <a:rPr lang="zh-CN" sz="1400">
-                          <a:solidFill>
-                            <a:schemeClr val="tx1"/>
-                          </a:solidFill>
-                          <a:effectLst/>
-                          <a:latin typeface="Microsoft YaHei" panose="020B0503020204020204" pitchFamily="34" charset="-122"/>
-                          <a:ea typeface="Microsoft YaHei" panose="020B0503020204020204" pitchFamily="34" charset="-122"/>
-                        </a:rPr>
-                        <a:t>4B 返回“小东门”等相近入口，没有准确匹配目标实体</a:t>
-                      </a:r>
-                    </a:p>
-                  </a:txBody>
-                  <a:tcPr anchor="ctr">
-                    <a:solidFill>
-                      <a:srgbClr val="F8FAFC"/>
-                    </a:solidFill>
-                  </a:tcPr>
-                </a:tc>
-                <a:extLst>
-                  <a:ext uri="{0D108BD9-81ED-4DB2-BD59-A6C34878D82A}">
-                    <a16:rowId xmlns:a16="http://schemas.microsoft.com/office/drawing/2014/main" val="10002"/>
-                  </a:ext>
-                </a:extLst>
-              </a:tr>
-              <a:tr h="373986">
-                <a:tc>
-                  <a:txBody>
-                    <a:bodyPr/>
-                    <a:lstStyle/>
-                    <a:p>
-                      <a:pPr algn="ctr" fontAlgn="t">
-                        <a:buNone/>
-                      </a:pPr>
-                      <a:r>
-                        <a:rPr lang="zh-CN" sz="1400">
-                          <a:solidFill>
-                            <a:schemeClr val="tx1"/>
-                          </a:solidFill>
-                          <a:effectLst/>
-                          <a:latin typeface="Microsoft YaHei" panose="020B0503020204020204" pitchFamily="34" charset="-122"/>
-                          <a:ea typeface="Microsoft YaHei" panose="020B0503020204020204" pitchFamily="34" charset="-122"/>
-                        </a:rPr>
-                        <a:t>九品烤鸭店</a:t>
-                      </a:r>
-                    </a:p>
-                  </a:txBody>
-                  <a:tcPr anchor="ctr">
-                    <a:solidFill>
-                      <a:srgbClr val="FFFFFF"/>
-                    </a:solidFill>
-                  </a:tcPr>
-                </a:tc>
-                <a:tc>
-                  <a:txBody>
-                    <a:bodyPr/>
-                    <a:lstStyle/>
-                    <a:p>
-                      <a:pPr algn="ctr" fontAlgn="t">
-                        <a:buNone/>
-                      </a:pPr>
-                      <a:r>
-                        <a:rPr lang="zh-CN" sz="1400">
-                          <a:solidFill>
-                            <a:schemeClr val="tx1"/>
-                          </a:solidFill>
-                          <a:effectLst/>
-                          <a:latin typeface="Microsoft YaHei" panose="020B0503020204020204" pitchFamily="34" charset="-122"/>
-                          <a:ea typeface="Microsoft YaHei" panose="020B0503020204020204" pitchFamily="34" charset="-122"/>
-                        </a:rPr>
-                        <a:t>九品烤鸭店（角门店）</a:t>
-                      </a:r>
-                    </a:p>
-                  </a:txBody>
-                  <a:tcPr anchor="ctr">
-                    <a:solidFill>
-                      <a:srgbClr val="FFFFFF"/>
-                    </a:solidFill>
-                  </a:tcPr>
-                </a:tc>
-                <a:tc>
-                  <a:txBody>
-                    <a:bodyPr/>
-                    <a:lstStyle/>
-                    <a:p>
-                      <a:pPr algn="ctr" fontAlgn="t">
-                        <a:buNone/>
-                      </a:pPr>
-                      <a:r>
-                        <a:rPr lang="zh-CN" sz="1400">
-                          <a:solidFill>
-                            <a:schemeClr val="tx1"/>
-                          </a:solidFill>
-                          <a:effectLst/>
-                          <a:latin typeface="Microsoft YaHei" panose="020B0503020204020204" pitchFamily="34" charset="-122"/>
-                          <a:ea typeface="Microsoft YaHei" panose="020B0503020204020204" pitchFamily="34" charset="-122"/>
-                        </a:rPr>
-                        <a:t>1</a:t>
-                      </a:r>
-                    </a:p>
-                  </a:txBody>
-                  <a:tcPr anchor="ctr">
-                    <a:solidFill>
-                      <a:srgbClr val="FFFFFF"/>
-                    </a:solidFill>
-                  </a:tcPr>
-                </a:tc>
-                <a:tc>
-                  <a:txBody>
-                    <a:bodyPr/>
-                    <a:lstStyle/>
-                    <a:p>
-                      <a:pPr algn="ctr" fontAlgn="t">
-                        <a:buNone/>
-                      </a:pPr>
-                      <a:r>
-                        <a:rPr lang="zh-CN" sz="1400">
-                          <a:solidFill>
-                            <a:schemeClr val="tx1"/>
-                          </a:solidFill>
-                          <a:effectLst/>
-                          <a:latin typeface="Microsoft YaHei" panose="020B0503020204020204" pitchFamily="34" charset="-122"/>
-                          <a:ea typeface="Microsoft YaHei" panose="020B0503020204020204" pitchFamily="34" charset="-122"/>
-                        </a:rPr>
-                        <a:t>17</a:t>
-                      </a:r>
-                    </a:p>
-                  </a:txBody>
-                  <a:tcPr anchor="ctr">
-                    <a:solidFill>
-                      <a:srgbClr val="FFFFFF"/>
-                    </a:solidFill>
-                  </a:tcPr>
-                </a:tc>
-                <a:tc>
-                  <a:txBody>
-                    <a:bodyPr/>
-                    <a:lstStyle/>
-                    <a:p>
-                      <a:pPr algn="ctr" fontAlgn="t">
-                        <a:buNone/>
-                      </a:pPr>
-                      <a:r>
-                        <a:rPr lang="zh-CN" sz="1400">
-                          <a:solidFill>
-                            <a:schemeClr val="tx1"/>
-                          </a:solidFill>
-                          <a:effectLst/>
-                          <a:latin typeface="Microsoft YaHei" panose="020B0503020204020204" pitchFamily="34" charset="-122"/>
-                          <a:ea typeface="Microsoft YaHei" panose="020B0503020204020204" pitchFamily="34" charset="-122"/>
-                        </a:rPr>
-                        <a:t>4B 更偏向“烤鸭京味”等语义相关餐饮 POI</a:t>
-                      </a:r>
-                    </a:p>
-                  </a:txBody>
-                  <a:tcPr anchor="ctr">
-                    <a:solidFill>
-                      <a:srgbClr val="FFFFFF"/>
-                    </a:solidFill>
-                  </a:tcPr>
-                </a:tc>
-                <a:extLst>
-                  <a:ext uri="{0D108BD9-81ED-4DB2-BD59-A6C34878D82A}">
-                    <a16:rowId xmlns:a16="http://schemas.microsoft.com/office/drawing/2014/main" val="10003"/>
-                  </a:ext>
-                </a:extLst>
-              </a:tr>
-              <a:tr h="373986">
-                <a:tc>
-                  <a:txBody>
-                    <a:bodyPr/>
-                    <a:lstStyle/>
-                    <a:p>
-                      <a:pPr algn="ctr" fontAlgn="t">
-                        <a:buNone/>
-                      </a:pPr>
-                      <a:r>
-                        <a:rPr lang="zh-CN" sz="1400">
-                          <a:solidFill>
-                            <a:schemeClr val="tx1"/>
-                          </a:solidFill>
-                          <a:effectLst/>
-                          <a:latin typeface="Microsoft YaHei" panose="020B0503020204020204" pitchFamily="34" charset="-122"/>
-                          <a:ea typeface="Microsoft YaHei" panose="020B0503020204020204" pitchFamily="34" charset="-122"/>
-                        </a:rPr>
-                        <a:t>国家博物馆</a:t>
-                      </a:r>
-                    </a:p>
-                  </a:txBody>
-                  <a:tcPr anchor="ctr">
-                    <a:solidFill>
-                      <a:srgbClr val="F8FAFC"/>
-                    </a:solidFill>
-                  </a:tcPr>
-                </a:tc>
-                <a:tc>
-                  <a:txBody>
-                    <a:bodyPr/>
-                    <a:lstStyle/>
-                    <a:p>
-                      <a:pPr algn="ctr" fontAlgn="t">
-                        <a:buNone/>
-                      </a:pPr>
-                      <a:r>
-                        <a:rPr lang="zh-CN" sz="1400">
-                          <a:solidFill>
-                            <a:schemeClr val="tx1"/>
-                          </a:solidFill>
-                          <a:effectLst/>
-                          <a:latin typeface="Microsoft YaHei" panose="020B0503020204020204" pitchFamily="34" charset="-122"/>
-                          <a:ea typeface="Microsoft YaHei" panose="020B0503020204020204" pitchFamily="34" charset="-122"/>
-                        </a:rPr>
-                        <a:t>中国国家博物馆</a:t>
-                      </a:r>
-                    </a:p>
-                  </a:txBody>
-                  <a:tcPr anchor="ctr">
-                    <a:solidFill>
-                      <a:srgbClr val="F8FAFC"/>
-                    </a:solidFill>
-                  </a:tcPr>
-                </a:tc>
-                <a:tc>
-                  <a:txBody>
-                    <a:bodyPr/>
-                    <a:lstStyle/>
-                    <a:p>
-                      <a:pPr algn="ctr" fontAlgn="t">
-                        <a:buNone/>
-                      </a:pPr>
-                      <a:r>
-                        <a:rPr lang="zh-CN" sz="1400">
-                          <a:solidFill>
-                            <a:schemeClr val="tx1"/>
-                          </a:solidFill>
-                          <a:effectLst/>
-                          <a:latin typeface="Microsoft YaHei" panose="020B0503020204020204" pitchFamily="34" charset="-122"/>
-                          <a:ea typeface="Microsoft YaHei" panose="020B0503020204020204" pitchFamily="34" charset="-122"/>
-                        </a:rPr>
-                        <a:t>13</a:t>
-                      </a:r>
-                    </a:p>
-                  </a:txBody>
-                  <a:tcPr anchor="ctr">
-                    <a:solidFill>
-                      <a:srgbClr val="F8FAFC"/>
-                    </a:solidFill>
-                  </a:tcPr>
-                </a:tc>
-                <a:tc>
-                  <a:txBody>
-                    <a:bodyPr/>
-                    <a:lstStyle/>
-                    <a:p>
-                      <a:pPr algn="ctr" fontAlgn="t">
-                        <a:buNone/>
-                      </a:pPr>
-                      <a:r>
-                        <a:rPr lang="zh-CN" sz="1400">
-                          <a:solidFill>
-                            <a:schemeClr val="tx1"/>
-                          </a:solidFill>
-                          <a:effectLst/>
-                          <a:latin typeface="Microsoft YaHei" panose="020B0503020204020204" pitchFamily="34" charset="-122"/>
-                          <a:ea typeface="Microsoft YaHei" panose="020B0503020204020204" pitchFamily="34" charset="-122"/>
-                        </a:rPr>
-                        <a:t>1</a:t>
-                      </a:r>
-                    </a:p>
-                  </a:txBody>
-                  <a:tcPr anchor="ctr">
-                    <a:solidFill>
-                      <a:srgbClr val="F8FAFC"/>
-                    </a:solidFill>
-                  </a:tcPr>
-                </a:tc>
-                <a:tc>
-                  <a:txBody>
-                    <a:bodyPr/>
-                    <a:lstStyle/>
-                    <a:p>
-                      <a:pPr algn="ctr" fontAlgn="t">
-                        <a:buNone/>
-                      </a:pPr>
-                      <a:r>
-                        <a:rPr lang="zh-CN" sz="1400">
-                          <a:solidFill>
-                            <a:schemeClr val="tx1"/>
-                          </a:solidFill>
-                          <a:effectLst/>
-                          <a:latin typeface="Microsoft YaHei" panose="020B0503020204020204" pitchFamily="34" charset="-122"/>
-                          <a:ea typeface="Microsoft YaHei" panose="020B0503020204020204" pitchFamily="34" charset="-122"/>
-                        </a:rPr>
-                        <a:t>4B 能较好处理简称与完整名称之间的对应</a:t>
-                      </a:r>
-                    </a:p>
-                  </a:txBody>
-                  <a:tcPr anchor="ctr">
-                    <a:solidFill>
-                      <a:srgbClr val="F8FAFC"/>
-                    </a:solidFill>
-                  </a:tcPr>
-                </a:tc>
-                <a:extLst>
-                  <a:ext uri="{0D108BD9-81ED-4DB2-BD59-A6C34878D82A}">
-                    <a16:rowId xmlns:a16="http://schemas.microsoft.com/office/drawing/2014/main" val="10004"/>
-                  </a:ext>
-                </a:extLst>
-              </a:tr>
-              <a:tr h="373986">
-                <a:tc>
-                  <a:txBody>
-                    <a:bodyPr/>
-                    <a:lstStyle/>
-                    <a:p>
-                      <a:pPr algn="ctr" fontAlgn="t">
-                        <a:buNone/>
-                      </a:pPr>
-                      <a:r>
-                        <a:rPr lang="zh-CN" sz="1400">
-                          <a:solidFill>
-                            <a:schemeClr val="tx1"/>
-                          </a:solidFill>
-                          <a:effectLst/>
-                          <a:latin typeface="Microsoft YaHei" panose="020B0503020204020204" pitchFamily="34" charset="-122"/>
-                          <a:ea typeface="Microsoft YaHei" panose="020B0503020204020204" pitchFamily="34" charset="-122"/>
-                        </a:rPr>
-                        <a:t>万寿路二十号院</a:t>
-                      </a:r>
-                    </a:p>
-                  </a:txBody>
-                  <a:tcPr anchor="ctr">
-                    <a:solidFill>
-                      <a:srgbClr val="F8FAFC"/>
-                    </a:solidFill>
-                  </a:tcPr>
-                </a:tc>
-                <a:tc>
-                  <a:txBody>
-                    <a:bodyPr/>
-                    <a:lstStyle/>
-                    <a:p>
-                      <a:pPr algn="ctr" fontAlgn="t">
-                        <a:buNone/>
-                      </a:pPr>
-                      <a:r>
-                        <a:rPr lang="zh-CN" sz="1400">
-                          <a:solidFill>
-                            <a:schemeClr val="tx1"/>
-                          </a:solidFill>
-                          <a:effectLst/>
-                          <a:latin typeface="Microsoft YaHei" panose="020B0503020204020204" pitchFamily="34" charset="-122"/>
-                          <a:ea typeface="Microsoft YaHei" panose="020B0503020204020204" pitchFamily="34" charset="-122"/>
-                        </a:rPr>
-                        <a:t>万寿路20号院</a:t>
-                      </a:r>
-                    </a:p>
-                  </a:txBody>
-                  <a:tcPr anchor="ctr">
-                    <a:solidFill>
-                      <a:srgbClr val="F8FAFC"/>
-                    </a:solidFill>
-                  </a:tcPr>
-                </a:tc>
-                <a:tc>
-                  <a:txBody>
-                    <a:bodyPr/>
-                    <a:lstStyle/>
-                    <a:p>
-                      <a:pPr algn="ctr" fontAlgn="t">
-                        <a:buNone/>
-                      </a:pPr>
-                      <a:r>
-                        <a:rPr lang="zh-CN" sz="1400">
-                          <a:solidFill>
-                            <a:schemeClr val="tx1"/>
-                          </a:solidFill>
-                          <a:effectLst/>
-                          <a:latin typeface="Microsoft YaHei" panose="020B0503020204020204" pitchFamily="34" charset="-122"/>
-                          <a:ea typeface="Microsoft YaHei" panose="020B0503020204020204" pitchFamily="34" charset="-122"/>
-                        </a:rPr>
-                        <a:t>6</a:t>
-                      </a:r>
-                    </a:p>
-                  </a:txBody>
-                  <a:tcPr anchor="ctr">
-                    <a:solidFill>
-                      <a:srgbClr val="F8FAFC"/>
-                    </a:solidFill>
-                  </a:tcPr>
-                </a:tc>
-                <a:tc>
-                  <a:txBody>
-                    <a:bodyPr/>
-                    <a:lstStyle/>
-                    <a:p>
-                      <a:pPr algn="ctr" fontAlgn="t">
-                        <a:buNone/>
-                      </a:pPr>
-                      <a:r>
-                        <a:rPr lang="zh-CN" sz="1400">
-                          <a:solidFill>
-                            <a:schemeClr val="tx1"/>
-                          </a:solidFill>
-                          <a:effectLst/>
-                          <a:latin typeface="Microsoft YaHei" panose="020B0503020204020204" pitchFamily="34" charset="-122"/>
-                          <a:ea typeface="Microsoft YaHei" panose="020B0503020204020204" pitchFamily="34" charset="-122"/>
-                        </a:rPr>
-                        <a:t>1</a:t>
-                      </a:r>
-                    </a:p>
-                  </a:txBody>
-                  <a:tcPr anchor="ctr">
-                    <a:solidFill>
-                      <a:srgbClr val="F8FAFC"/>
-                    </a:solidFill>
-                  </a:tcPr>
-                </a:tc>
-                <a:tc>
-                  <a:txBody>
-                    <a:bodyPr/>
-                    <a:lstStyle/>
-                    <a:p>
-                      <a:pPr algn="ctr" fontAlgn="t">
-                        <a:buNone/>
-                      </a:pPr>
-                      <a:r>
-                        <a:rPr lang="zh-CN" sz="1400">
-                          <a:solidFill>
-                            <a:schemeClr val="tx1"/>
-                          </a:solidFill>
-                          <a:effectLst/>
-                          <a:latin typeface="Microsoft YaHei" panose="020B0503020204020204" pitchFamily="34" charset="-122"/>
-                          <a:ea typeface="Microsoft YaHei" panose="020B0503020204020204" pitchFamily="34" charset="-122"/>
-                        </a:rPr>
-                        <a:t>4B 更好地处理中文数字与阿拉伯数字的归一化</a:t>
-                      </a:r>
-                    </a:p>
-                  </a:txBody>
-                  <a:tcPr anchor="ctr">
-                    <a:solidFill>
-                      <a:srgbClr val="F8FAFC"/>
-                    </a:solidFill>
-                  </a:tcPr>
-                </a:tc>
-                <a:extLst>
-                  <a:ext uri="{0D108BD9-81ED-4DB2-BD59-A6C34878D82A}">
-                    <a16:rowId xmlns:a16="http://schemas.microsoft.com/office/drawing/2014/main" val="2382626879"/>
-                  </a:ext>
-                </a:extLst>
-              </a:tr>
-              <a:tr h="373986">
-                <a:tc>
-                  <a:txBody>
-                    <a:bodyPr/>
-                    <a:lstStyle/>
-                    <a:p>
-                      <a:pPr algn="ctr" fontAlgn="t">
-                        <a:buNone/>
-                      </a:pPr>
-                      <a:r>
-                        <a:rPr lang="zh-CN" sz="1400">
-                          <a:solidFill>
-                            <a:schemeClr val="tx1"/>
-                          </a:solidFill>
-                          <a:effectLst/>
-                          <a:latin typeface="Microsoft YaHei" panose="020B0503020204020204" pitchFamily="34" charset="-122"/>
-                          <a:ea typeface="Microsoft YaHei" panose="020B0503020204020204" pitchFamily="34" charset="-122"/>
-                        </a:rPr>
-                        <a:t>北京西站</a:t>
-                      </a:r>
-                    </a:p>
-                  </a:txBody>
-                  <a:tcPr anchor="ctr">
-                    <a:solidFill>
-                      <a:srgbClr val="F8FAFC"/>
-                    </a:solidFill>
-                  </a:tcPr>
-                </a:tc>
-                <a:tc>
-                  <a:txBody>
-                    <a:bodyPr/>
-                    <a:lstStyle/>
-                    <a:p>
-                      <a:pPr algn="ctr" fontAlgn="t">
-                        <a:buNone/>
-                      </a:pPr>
-                      <a:r>
-                        <a:rPr lang="zh-CN" sz="1400">
-                          <a:solidFill>
-                            <a:schemeClr val="tx1"/>
-                          </a:solidFill>
-                          <a:effectLst/>
-                          <a:latin typeface="Microsoft YaHei" panose="020B0503020204020204" pitchFamily="34" charset="-122"/>
-                          <a:ea typeface="Microsoft YaHei" panose="020B0503020204020204" pitchFamily="34" charset="-122"/>
-                        </a:rPr>
-                        <a:t>北京西站-2F北进站口</a:t>
-                      </a:r>
-                    </a:p>
-                  </a:txBody>
-                  <a:tcPr anchor="ctr">
-                    <a:solidFill>
-                      <a:srgbClr val="F8FAFC"/>
-                    </a:solidFill>
-                  </a:tcPr>
-                </a:tc>
-                <a:tc>
-                  <a:txBody>
-                    <a:bodyPr/>
-                    <a:lstStyle/>
-                    <a:p>
-                      <a:pPr algn="ctr" fontAlgn="t">
-                        <a:buNone/>
-                      </a:pPr>
-                      <a:r>
-                        <a:rPr lang="zh-CN" sz="1400">
-                          <a:solidFill>
-                            <a:schemeClr val="tx1"/>
-                          </a:solidFill>
-                          <a:effectLst/>
-                          <a:latin typeface="Microsoft YaHei" panose="020B0503020204020204" pitchFamily="34" charset="-122"/>
-                          <a:ea typeface="Microsoft YaHei" panose="020B0503020204020204" pitchFamily="34" charset="-122"/>
-                        </a:rPr>
-                        <a:t>&gt;20</a:t>
-                      </a:r>
-                    </a:p>
-                  </a:txBody>
-                  <a:tcPr anchor="ctr">
-                    <a:solidFill>
-                      <a:srgbClr val="F8FAFC"/>
-                    </a:solidFill>
-                  </a:tcPr>
-                </a:tc>
-                <a:tc>
-                  <a:txBody>
-                    <a:bodyPr/>
-                    <a:lstStyle/>
-                    <a:p>
-                      <a:pPr algn="ctr" fontAlgn="t">
-                        <a:buNone/>
-                      </a:pPr>
-                      <a:r>
-                        <a:rPr lang="zh-CN" sz="1400">
-                          <a:solidFill>
-                            <a:schemeClr val="tx1"/>
-                          </a:solidFill>
-                          <a:effectLst/>
-                          <a:latin typeface="Microsoft YaHei" panose="020B0503020204020204" pitchFamily="34" charset="-122"/>
-                          <a:ea typeface="Microsoft YaHei" panose="020B0503020204020204" pitchFamily="34" charset="-122"/>
-                        </a:rPr>
-                        <a:t>&gt;20</a:t>
-                      </a:r>
-                    </a:p>
-                  </a:txBody>
-                  <a:tcPr anchor="ctr">
-                    <a:solidFill>
-                      <a:srgbClr val="F8FAFC"/>
-                    </a:solidFill>
-                  </a:tcPr>
-                </a:tc>
-                <a:tc>
-                  <a:txBody>
-                    <a:bodyPr/>
-                    <a:lstStyle/>
-                    <a:p>
-                      <a:pPr algn="ctr" fontAlgn="t">
-                        <a:buNone/>
-                      </a:pPr>
-                      <a:r>
-                        <a:rPr lang="zh-CN" sz="1400" dirty="0">
-                          <a:solidFill>
-                            <a:schemeClr val="tx1"/>
-                          </a:solidFill>
-                          <a:effectLst/>
-                          <a:latin typeface="Microsoft YaHei" panose="020B0503020204020204" pitchFamily="34" charset="-122"/>
-                          <a:ea typeface="Microsoft YaHei" panose="020B0503020204020204" pitchFamily="34" charset="-122"/>
-                        </a:rPr>
-                        <a:t>Query 只指向主站，缺少入口粒度和位置条件</a:t>
-                      </a:r>
-                    </a:p>
-                  </a:txBody>
-                  <a:tcPr anchor="ctr">
-                    <a:solidFill>
-                      <a:srgbClr val="F8FAFC"/>
-                    </a:solidFill>
-                  </a:tcPr>
-                </a:tc>
-                <a:extLst>
-                  <a:ext uri="{0D108BD9-81ED-4DB2-BD59-A6C34878D82A}">
-                    <a16:rowId xmlns:a16="http://schemas.microsoft.com/office/drawing/2014/main" val="3626183382"/>
-                  </a:ext>
-                </a:extLst>
-              </a:tr>
-            </a:tbl>
-          </a:graphicData>
-        </a:graphic>
-      </p:graphicFrame>
-    </p:spTree>
-  </p:cSld>
-  <p:clrMapOvr>
-    <a:masterClrMapping/>
-  </p:clrMapOvr>
-</p:sld>
-</file>
-
-<file path=ppt/slides/slide11.xml><?xml version="1.0" encoding="utf-8"?>
-<p:sld xmlns:a="http://schemas.openxmlformats.org/drawingml/2006/main" xmlns:r="http://schemas.openxmlformats.org/officeDocument/2006/relationships" xmlns:p="http://schemas.openxmlformats.org/presentationml/2006/main">
-  <p:cSld>
-    <p:spTree>
-      <p:nvGrpSpPr>
-        <p:cNvPr id="1" name=""/>
-        <p:cNvGrpSpPr/>
-        <p:nvPr/>
-      </p:nvGrpSpPr>
-      <p:grpSpPr>
-        <a:xfrm>
-          <a:off x="0" y="0"/>
-          <a:ext cx="0" cy="0"/>
-          <a:chOff x="0" y="0"/>
-          <a:chExt cx="0" cy="0"/>
-        </a:xfrm>
-      </p:grpSpPr>
-      <p:sp>
-        <p:nvSpPr>
-          <p:cNvPr id="2" name="Title 1"/>
-          <p:cNvSpPr>
-            <a:spLocks noGrp="1"/>
-          </p:cNvSpPr>
-          <p:nvPr>
-            <p:ph type="title"/>
-          </p:nvPr>
-        </p:nvSpPr>
-        <p:spPr>
-          <a:xfrm>
-            <a:off x="54864" y="0"/>
-            <a:ext cx="11567160" cy="758952"/>
-          </a:xfrm>
-        </p:spPr>
-        <p:txBody>
-          <a:bodyPr wrap="square" tIns="91440" bIns="91440" anchor="ctr"/>
-          <a:lstStyle/>
-          <a:p>
-            <a:pPr algn="l">
-              <a:lnSpc>
-                <a:spcPct val="100000"/>
-              </a:lnSpc>
-              <a:spcAft>
-                <a:spcPts val="0"/>
-              </a:spcAft>
-            </a:pPr>
-            <a:r>
-              <a:rPr sz="2800" b="1" dirty="0">
-                <a:solidFill>
-                  <a:srgbClr val="FFFFFF"/>
-                </a:solidFill>
-                <a:latin typeface="微软雅黑"/>
-                <a:ea typeface="微软雅黑"/>
-              </a:rPr>
               <a:t>RQ-VAE </a:t>
             </a:r>
           </a:p>
@@ -10350,7 +7964,7 @@
 </p:sld>
 </file>
 
-<file path=ppt/slides/slide12.xml><?xml version="1.0" encoding="utf-8"?>
+<file path=ppt/slides/slide11.xml><?xml version="1.0" encoding="utf-8"?>
 <p:sld xmlns:a="http://schemas.openxmlformats.org/drawingml/2006/main" xmlns:r="http://schemas.openxmlformats.org/officeDocument/2006/relationships" xmlns:p="http://schemas.openxmlformats.org/presentationml/2006/main">
   <p:cSld>
     <p:spTree>
@@ -11817,7 +9431,7 @@
 </p:sld>
 </file>
 
-<file path=ppt/slides/slide13.xml><?xml version="1.0" encoding="utf-8"?>
+<file path=ppt/slides/slide12.xml><?xml version="1.0" encoding="utf-8"?>
 <p:sld xmlns:a="http://schemas.openxmlformats.org/drawingml/2006/main" xmlns:r="http://schemas.openxmlformats.org/officeDocument/2006/relationships" xmlns:p="http://schemas.openxmlformats.org/presentationml/2006/main">
   <p:cSld>
     <p:spTree>
@@ -12587,7 +10201,7 @@
 </p:sld>
 </file>
 
-<file path=ppt/slides/slide14.xml><?xml version="1.0" encoding="utf-8"?>
+<file path=ppt/slides/slide13.xml><?xml version="1.0" encoding="utf-8"?>
 <p:sld xmlns:a="http://schemas.openxmlformats.org/drawingml/2006/main" xmlns:r="http://schemas.openxmlformats.org/officeDocument/2006/relationships" xmlns:p="http://schemas.openxmlformats.org/presentationml/2006/main">
   <p:cSld>
     <p:spTree>
@@ -12802,7 +10416,7 @@
 </p:sld>
 </file>
 
-<file path=ppt/slides/slide15.xml><?xml version="1.0" encoding="utf-8"?>
+<file path=ppt/slides/slide14.xml><?xml version="1.0" encoding="utf-8"?>
 <p:sld xmlns:a="http://schemas.openxmlformats.org/drawingml/2006/main" xmlns:r="http://schemas.openxmlformats.org/officeDocument/2006/relationships" xmlns:p="http://schemas.openxmlformats.org/presentationml/2006/main">
   <p:cSld>
     <p:spTree>
@@ -14558,7 +12172,7 @@
 </p:sld>
 </file>
 
-<file path=ppt/slides/slide16.xml><?xml version="1.0" encoding="utf-8"?>
+<file path=ppt/slides/slide15.xml><?xml version="1.0" encoding="utf-8"?>
 <p:sld xmlns:a="http://schemas.openxmlformats.org/drawingml/2006/main" xmlns:r="http://schemas.openxmlformats.org/officeDocument/2006/relationships" xmlns:p="http://schemas.openxmlformats.org/presentationml/2006/main">
   <p:cSld>
     <p:spTree>
@@ -15275,306 +12889,6 @@
 </file>
 
 <file path=ppt/slides/slide2.xml><?xml version="1.0" encoding="utf-8"?>
-<p:sld xmlns:a="http://schemas.openxmlformats.org/drawingml/2006/main" xmlns:r="http://schemas.openxmlformats.org/officeDocument/2006/relationships" xmlns:p="http://schemas.openxmlformats.org/presentationml/2006/main">
-  <p:cSld>
-    <p:spTree>
-      <p:nvGrpSpPr>
-        <p:cNvPr id="1" name="">
-          <a:extLst>
-            <a:ext uri="{FF2B5EF4-FFF2-40B4-BE49-F238E27FC236}">
-              <a16:creationId xmlns:a16="http://schemas.microsoft.com/office/drawing/2014/main" id="{4FF970D6-28A9-A204-E4BB-D202BFF230CC}"/>
-            </a:ext>
-          </a:extLst>
-        </p:cNvPr>
-        <p:cNvGrpSpPr/>
-        <p:nvPr/>
-      </p:nvGrpSpPr>
-      <p:grpSpPr>
-        <a:xfrm>
-          <a:off x="0" y="0"/>
-          <a:ext cx="0" cy="0"/>
-          <a:chOff x="0" y="0"/>
-          <a:chExt cx="0" cy="0"/>
-        </a:xfrm>
-      </p:grpSpPr>
-      <p:sp>
-        <p:nvSpPr>
-          <p:cNvPr id="4" name="TextBox 3">
-            <a:extLst>
-              <a:ext uri="{FF2B5EF4-FFF2-40B4-BE49-F238E27FC236}">
-                <a16:creationId xmlns:a16="http://schemas.microsoft.com/office/drawing/2014/main" id="{FBFD03A1-0C34-BBC7-6F46-C7564D052C63}"/>
-              </a:ext>
-            </a:extLst>
-          </p:cNvPr>
-          <p:cNvSpPr txBox="1"/>
-          <p:nvPr/>
-        </p:nvSpPr>
-        <p:spPr>
-          <a:xfrm>
-            <a:off x="11018520" y="6492240"/>
-            <a:ext cx="621792" cy="201168"/>
-          </a:xfrm>
-          <a:prstGeom prst="rect">
-            <a:avLst/>
-          </a:prstGeom>
-          <a:noFill/>
-        </p:spPr>
-        <p:txBody>
-          <a:bodyPr wrap="square" lIns="18288" tIns="18288" rIns="18288" bIns="18288" anchor="ctr">
-            <a:spAutoFit/>
-          </a:bodyPr>
-          <a:lstStyle/>
-          <a:p>
-            <a:pPr algn="r">
-              <a:lnSpc>
-                <a:spcPct val="100000"/>
-              </a:lnSpc>
-              <a:spcAft>
-                <a:spcPts val="0"/>
-              </a:spcAft>
-            </a:pPr>
-            <a:r>
-              <a:rPr lang="en-US" sz="900" b="1" noProof="1">
-                <a:solidFill>
-                  <a:srgbClr val="64748B"/>
-                </a:solidFill>
-                <a:latin typeface="微软雅黑"/>
-                <a:ea typeface="微软雅黑"/>
-              </a:rPr>
-              <a:t>01</a:t>
-            </a:r>
-          </a:p>
-        </p:txBody>
-      </p:sp>
-      <p:pic>
-        <p:nvPicPr>
-          <p:cNvPr id="2" name="图片 1">
-            <a:extLst>
-              <a:ext uri="{FF2B5EF4-FFF2-40B4-BE49-F238E27FC236}">
-                <a16:creationId xmlns:a16="http://schemas.microsoft.com/office/drawing/2014/main" id="{33D40482-CFE2-5E83-FB97-60A3BC4B9E23}"/>
-              </a:ext>
-            </a:extLst>
-          </p:cNvPr>
-          <p:cNvPicPr>
-            <a:picLocks noChangeAspect="1"/>
-          </p:cNvPicPr>
-          <p:nvPr/>
-        </p:nvPicPr>
-        <p:blipFill>
-          <a:blip r:embed="rId3"/>
-          <a:stretch>
-            <a:fillRect/>
-          </a:stretch>
-        </p:blipFill>
-        <p:spPr>
-          <a:xfrm>
-            <a:off x="3364523" y="838257"/>
-            <a:ext cx="7923625" cy="5925251"/>
-          </a:xfrm>
-          <a:prstGeom prst="rect">
-            <a:avLst/>
-          </a:prstGeom>
-        </p:spPr>
-      </p:pic>
-      <p:sp>
-        <p:nvSpPr>
-          <p:cNvPr id="6" name="Title 1">
-            <a:extLst>
-              <a:ext uri="{FF2B5EF4-FFF2-40B4-BE49-F238E27FC236}">
-                <a16:creationId xmlns:a16="http://schemas.microsoft.com/office/drawing/2014/main" id="{41C8971F-529B-E3A2-4F94-D275BEB33B60}"/>
-              </a:ext>
-            </a:extLst>
-          </p:cNvPr>
-          <p:cNvSpPr>
-            <a:spLocks noGrp="1"/>
-          </p:cNvSpPr>
-          <p:nvPr>
-            <p:ph type="title"/>
-          </p:nvPr>
-        </p:nvSpPr>
-        <p:spPr>
-          <a:xfrm>
-            <a:off x="54864" y="0"/>
-            <a:ext cx="11567160" cy="758952"/>
-          </a:xfrm>
-        </p:spPr>
-        <p:txBody>
-          <a:bodyPr wrap="square" tIns="91440" bIns="91440" anchor="ctr"/>
-          <a:lstStyle/>
-          <a:p>
-            <a:pPr algn="l">
-              <a:lnSpc>
-                <a:spcPct val="100000"/>
-              </a:lnSpc>
-              <a:spcAft>
-                <a:spcPts val="0"/>
-              </a:spcAft>
-            </a:pPr>
-            <a:r>
-              <a:rPr lang="zh-CN" altLang="en-US" sz="2800" b="1" noProof="1">
-                <a:solidFill>
-                  <a:srgbClr val="FFFFFF"/>
-                </a:solidFill>
-                <a:latin typeface="微软雅黑"/>
-                <a:ea typeface="微软雅黑"/>
-              </a:rPr>
-              <a:t>生成式检索</a:t>
-            </a:r>
-            <a:endParaRPr lang="zh-CN" sz="2800" b="1" noProof="1">
-              <a:solidFill>
-                <a:srgbClr val="FFFFFF"/>
-              </a:solidFill>
-              <a:latin typeface="微软雅黑"/>
-              <a:ea typeface="微软雅黑"/>
-            </a:endParaRPr>
-          </a:p>
-        </p:txBody>
-      </p:sp>
-      <p:sp>
-        <p:nvSpPr>
-          <p:cNvPr id="7" name="文本框 6">
-            <a:extLst>
-              <a:ext uri="{FF2B5EF4-FFF2-40B4-BE49-F238E27FC236}">
-                <a16:creationId xmlns:a16="http://schemas.microsoft.com/office/drawing/2014/main" id="{E6C87AB5-09A7-0312-82B3-7624705373AB}"/>
-              </a:ext>
-            </a:extLst>
-          </p:cNvPr>
-          <p:cNvSpPr txBox="1"/>
-          <p:nvPr/>
-        </p:nvSpPr>
-        <p:spPr>
-          <a:xfrm>
-            <a:off x="287570" y="1019908"/>
-            <a:ext cx="2871450" cy="5078313"/>
-          </a:xfrm>
-          <a:prstGeom prst="rect">
-            <a:avLst/>
-          </a:prstGeom>
-          <a:noFill/>
-        </p:spPr>
-        <p:txBody>
-          <a:bodyPr wrap="square" rtlCol="0">
-            <a:spAutoFit/>
-          </a:bodyPr>
-          <a:lstStyle/>
-          <a:p>
-            <a:r>
-              <a:rPr lang="en" altLang="zh-CN" dirty="0" err="1">
-                <a:latin typeface="Microsoft YaHei" panose="020B0503020204020204" pitchFamily="34" charset="-122"/>
-                <a:ea typeface="Microsoft YaHei" panose="020B0503020204020204" pitchFamily="34" charset="-122"/>
-              </a:rPr>
-              <a:t>OneSearch</a:t>
-            </a:r>
-            <a:r>
-              <a:rPr lang="zh-CN" altLang="en-US" dirty="0">
-                <a:latin typeface="Microsoft YaHei" panose="020B0503020204020204" pitchFamily="34" charset="-122"/>
-                <a:ea typeface="Microsoft YaHei" panose="020B0503020204020204" pitchFamily="34" charset="-122"/>
-              </a:rPr>
-              <a:t>框架包括四个部分：</a:t>
-            </a:r>
-            <a:endParaRPr lang="en-US" altLang="zh-CN" dirty="0">
-              <a:latin typeface="Microsoft YaHei" panose="020B0503020204020204" pitchFamily="34" charset="-122"/>
-              <a:ea typeface="Microsoft YaHei" panose="020B0503020204020204" pitchFamily="34" charset="-122"/>
-            </a:endParaRPr>
-          </a:p>
-          <a:p>
-            <a:pPr marL="285750" indent="-285750">
-              <a:buFont typeface="Arial" panose="020B0604020202020204" pitchFamily="34" charset="0"/>
-              <a:buChar char="•"/>
-            </a:pPr>
-            <a:r>
-              <a:rPr lang="zh-CN" altLang="en-US" dirty="0">
-                <a:latin typeface="Microsoft YaHei" panose="020B0503020204020204" pitchFamily="34" charset="-122"/>
-                <a:ea typeface="Microsoft YaHei" panose="020B0503020204020204" pitchFamily="34" charset="-122"/>
-              </a:rPr>
-              <a:t>关键字增强的层次量化编码，它采用对齐的表示和核心关键字来构建精细的层次量化表征模式；</a:t>
-            </a:r>
-            <a:endParaRPr lang="en-US" altLang="zh-CN" dirty="0">
-              <a:latin typeface="Microsoft YaHei" panose="020B0503020204020204" pitchFamily="34" charset="-122"/>
-              <a:ea typeface="Microsoft YaHei" panose="020B0503020204020204" pitchFamily="34" charset="-122"/>
-            </a:endParaRPr>
-          </a:p>
-          <a:p>
-            <a:pPr marL="285750" indent="-285750">
-              <a:buFont typeface="Arial" panose="020B0604020202020204" pitchFamily="34" charset="0"/>
-              <a:buChar char="•"/>
-            </a:pPr>
-            <a:r>
-              <a:rPr lang="zh-CN" altLang="en-US" dirty="0">
-                <a:latin typeface="Microsoft YaHei" panose="020B0503020204020204" pitchFamily="34" charset="-122"/>
-                <a:ea typeface="Microsoft YaHei" panose="020B0503020204020204" pitchFamily="34" charset="-122"/>
-              </a:rPr>
-              <a:t>多视角行为序列注入，利用序列推理用户画像和偏好；</a:t>
-            </a:r>
-            <a:endParaRPr lang="en-US" altLang="zh-CN" dirty="0">
-              <a:latin typeface="Microsoft YaHei" panose="020B0503020204020204" pitchFamily="34" charset="-122"/>
-              <a:ea typeface="Microsoft YaHei" panose="020B0503020204020204" pitchFamily="34" charset="-122"/>
-            </a:endParaRPr>
-          </a:p>
-          <a:p>
-            <a:pPr marL="285750" indent="-285750">
-              <a:buFont typeface="Arial" panose="020B0604020202020204" pitchFamily="34" charset="0"/>
-              <a:buChar char="•"/>
-            </a:pPr>
-            <a:r>
-              <a:rPr lang="zh-CN" altLang="en-US" dirty="0">
-                <a:latin typeface="Microsoft YaHei" panose="020B0503020204020204" pitchFamily="34" charset="-122"/>
-                <a:ea typeface="Microsoft YaHei" panose="020B0503020204020204" pitchFamily="34" charset="-122"/>
-              </a:rPr>
-              <a:t>融合生成特征进行生成式检索的统一编码器解码器架构；</a:t>
-            </a:r>
-            <a:endParaRPr lang="en-US" altLang="zh-CN" dirty="0">
-              <a:latin typeface="Microsoft YaHei" panose="020B0503020204020204" pitchFamily="34" charset="-122"/>
-              <a:ea typeface="Microsoft YaHei" panose="020B0503020204020204" pitchFamily="34" charset="-122"/>
-            </a:endParaRPr>
-          </a:p>
-          <a:p>
-            <a:pPr marL="285750" indent="-285750">
-              <a:buFont typeface="Arial" panose="020B0604020202020204" pitchFamily="34" charset="0"/>
-              <a:buChar char="•"/>
-            </a:pPr>
-            <a:r>
-              <a:rPr lang="zh-CN" altLang="en-US" dirty="0">
-                <a:latin typeface="Microsoft YaHei" panose="020B0503020204020204" pitchFamily="34" charset="-122"/>
-                <a:ea typeface="Microsoft YaHei" panose="020B0503020204020204" pitchFamily="34" charset="-122"/>
-              </a:rPr>
-              <a:t>偏好感知奖励制度，它包含一个多级</a:t>
-            </a:r>
-            <a:r>
-              <a:rPr lang="en" altLang="zh-CN" dirty="0">
-                <a:latin typeface="Microsoft YaHei" panose="020B0503020204020204" pitchFamily="34" charset="-122"/>
-                <a:ea typeface="Microsoft YaHei" panose="020B0503020204020204" pitchFamily="34" charset="-122"/>
-              </a:rPr>
-              <a:t>SFT</a:t>
-            </a:r>
-            <a:r>
-              <a:rPr lang="zh-CN" altLang="en-US" dirty="0">
-                <a:latin typeface="Microsoft YaHei" panose="020B0503020204020204" pitchFamily="34" charset="-122"/>
-                <a:ea typeface="Microsoft YaHei" panose="020B0503020204020204" pitchFamily="34" charset="-122"/>
-              </a:rPr>
-              <a:t>过程和一个自适应奖励制度，以增强模型的个性化排序能力。</a:t>
-            </a:r>
-            <a:endParaRPr kumimoji="1" lang="zh-CN" altLang="en-US" dirty="0">
-              <a:latin typeface="Microsoft YaHei" panose="020B0503020204020204" pitchFamily="34" charset="-122"/>
-              <a:ea typeface="Microsoft YaHei" panose="020B0503020204020204" pitchFamily="34" charset="-122"/>
-            </a:endParaRPr>
-          </a:p>
-        </p:txBody>
-      </p:sp>
-    </p:spTree>
-    <p:extLst>
-      <p:ext uri="{BB962C8B-B14F-4D97-AF65-F5344CB8AC3E}">
-        <p14:creationId xmlns:p14="http://schemas.microsoft.com/office/powerpoint/2010/main" val="1881176216"/>
-      </p:ext>
-    </p:extLst>
-  </p:cSld>
-  <p:clrMapOvr>
-    <a:masterClrMapping/>
-  </p:clrMapOvr>
-</p:sld>
-</file>
-
-<file path=ppt/slides/slide3.xml><?xml version="1.0" encoding="utf-8"?>
 <p:sld xmlns:a="http://schemas.openxmlformats.org/drawingml/2006/main" xmlns:r="http://schemas.openxmlformats.org/officeDocument/2006/relationships" xmlns:p="http://schemas.openxmlformats.org/presentationml/2006/main">
   <p:cSld>
     <p:spTree>
@@ -16848,7 +14162,7 @@
 </p:sld>
 </file>
 
-<file path=ppt/slides/slide4.xml><?xml version="1.0" encoding="utf-8"?>
+<file path=ppt/slides/slide3.xml><?xml version="1.0" encoding="utf-8"?>
 <p:sld xmlns:a="http://schemas.openxmlformats.org/drawingml/2006/main" xmlns:r="http://schemas.openxmlformats.org/officeDocument/2006/relationships" xmlns:p="http://schemas.openxmlformats.org/presentationml/2006/main">
   <p:cSld>
     <p:spTree>
@@ -17646,7 +14960,7 @@
 </p:sld>
 </file>
 
-<file path=ppt/slides/slide5.xml><?xml version="1.0" encoding="utf-8"?>
+<file path=ppt/slides/slide4.xml><?xml version="1.0" encoding="utf-8"?>
 <p:sld xmlns:a="http://schemas.openxmlformats.org/drawingml/2006/main" xmlns:r="http://schemas.openxmlformats.org/officeDocument/2006/relationships" xmlns:p="http://schemas.openxmlformats.org/presentationml/2006/main">
   <p:cSld>
     <p:spTree>
@@ -18896,7 +16210,7 @@
 </p:sld>
 </file>
 
-<file path=ppt/slides/slide6.xml><?xml version="1.0" encoding="utf-8"?>
+<file path=ppt/slides/slide5.xml><?xml version="1.0" encoding="utf-8"?>
 <p:sld xmlns:a="http://schemas.openxmlformats.org/drawingml/2006/main" xmlns:r="http://schemas.openxmlformats.org/officeDocument/2006/relationships" xmlns:p="http://schemas.openxmlformats.org/presentationml/2006/main">
   <p:cSld>
     <p:spTree>
@@ -21142,7 +18456,7 @@
 </p:sld>
 </file>
 
-<file path=ppt/slides/slide7.xml><?xml version="1.0" encoding="utf-8"?>
+<file path=ppt/slides/slide6.xml><?xml version="1.0" encoding="utf-8"?>
 <p:sld xmlns:a="http://schemas.openxmlformats.org/drawingml/2006/main" xmlns:r="http://schemas.openxmlformats.org/officeDocument/2006/relationships" xmlns:p="http://schemas.openxmlformats.org/presentationml/2006/main">
   <p:cSld>
     <p:spTree>
@@ -22011,7 +19325,7 @@
 </p:sld>
 </file>
 
-<file path=ppt/slides/slide8.xml><?xml version="1.0" encoding="utf-8"?>
+<file path=ppt/slides/slide7.xml><?xml version="1.0" encoding="utf-8"?>
 <p:sld xmlns:a="http://schemas.openxmlformats.org/drawingml/2006/main" xmlns:r="http://schemas.openxmlformats.org/officeDocument/2006/relationships" xmlns:p="http://schemas.openxmlformats.org/presentationml/2006/main">
   <p:cSld>
     <p:spTree>
@@ -22800,7 +20114,7 @@
 </p:sld>
 </file>
 
-<file path=ppt/slides/slide9.xml><?xml version="1.0" encoding="utf-8"?>
+<file path=ppt/slides/slide8.xml><?xml version="1.0" encoding="utf-8"?>
 <p:sld xmlns:a="http://schemas.openxmlformats.org/drawingml/2006/main" xmlns:r="http://schemas.openxmlformats.org/officeDocument/2006/relationships" xmlns:p="http://schemas.openxmlformats.org/presentationml/2006/main">
   <p:cSld>
     <p:spTree>
@@ -23819,6 +21133,2307 @@
           </a:p>
         </p:txBody>
       </p:sp>
+    </p:spTree>
+  </p:cSld>
+  <p:clrMapOvr>
+    <a:masterClrMapping/>
+  </p:clrMapOvr>
+</p:sld>
+</file>
+
+<file path=ppt/slides/slide9.xml><?xml version="1.0" encoding="utf-8"?>
+<p:sld xmlns:a="http://schemas.openxmlformats.org/drawingml/2006/main" xmlns:r="http://schemas.openxmlformats.org/officeDocument/2006/relationships" xmlns:p="http://schemas.openxmlformats.org/presentationml/2006/main">
+  <p:cSld>
+    <p:spTree>
+      <p:nvGrpSpPr>
+        <p:cNvPr id="1" name=""/>
+        <p:cNvGrpSpPr/>
+        <p:nvPr/>
+      </p:nvGrpSpPr>
+      <p:grpSpPr>
+        <a:xfrm>
+          <a:off x="0" y="0"/>
+          <a:ext cx="0" cy="0"/>
+          <a:chOff x="0" y="0"/>
+          <a:chExt cx="0" cy="0"/>
+        </a:xfrm>
+      </p:grpSpPr>
+      <p:sp>
+        <p:nvSpPr>
+          <p:cNvPr id="2" name="Title 1"/>
+          <p:cNvSpPr>
+            <a:spLocks noGrp="1"/>
+          </p:cNvSpPr>
+          <p:nvPr>
+            <p:ph type="title"/>
+          </p:nvPr>
+        </p:nvSpPr>
+        <p:spPr>
+          <a:xfrm>
+            <a:off x="54864" y="0"/>
+            <a:ext cx="11567160" cy="758952"/>
+          </a:xfrm>
+        </p:spPr>
+        <p:txBody>
+          <a:bodyPr wrap="square" tIns="91440" bIns="91440" anchor="ctr"/>
+          <a:lstStyle/>
+          <a:p>
+            <a:pPr algn="l">
+              <a:lnSpc>
+                <a:spcPct val="100000"/>
+              </a:lnSpc>
+              <a:spcAft>
+                <a:spcPts val="0"/>
+              </a:spcAft>
+            </a:pPr>
+            <a:r>
+              <a:rPr sz="2800" b="1" dirty="0">
+                <a:solidFill>
+                  <a:srgbClr val="FFFFFF"/>
+                </a:solidFill>
+                <a:latin typeface="微软雅黑"/>
+                <a:ea typeface="微软雅黑"/>
+              </a:rPr>
+              <a:t>Embedding </a:t>
+            </a:r>
+            <a:r>
+              <a:rPr sz="2800" b="1" dirty="0" err="1">
+                <a:solidFill>
+                  <a:srgbClr val="FFFFFF"/>
+                </a:solidFill>
+                <a:latin typeface="微软雅黑"/>
+                <a:ea typeface="微软雅黑"/>
+              </a:rPr>
+              <a:t>结果分析</a:t>
+            </a:r>
+            <a:endParaRPr sz="2800" b="1" dirty="0">
+              <a:solidFill>
+                <a:srgbClr val="FFFFFF"/>
+              </a:solidFill>
+              <a:latin typeface="微软雅黑"/>
+              <a:ea typeface="微软雅黑"/>
+            </a:endParaRPr>
+          </a:p>
+        </p:txBody>
+      </p:sp>
+      <p:sp>
+        <p:nvSpPr>
+          <p:cNvPr id="4" name="TextBox 3"/>
+          <p:cNvSpPr txBox="1"/>
+          <p:nvPr/>
+        </p:nvSpPr>
+        <p:spPr>
+          <a:xfrm>
+            <a:off x="11018520" y="6505107"/>
+            <a:ext cx="621792" cy="175433"/>
+          </a:xfrm>
+          <a:prstGeom prst="rect">
+            <a:avLst/>
+          </a:prstGeom>
+          <a:noFill/>
+        </p:spPr>
+        <p:txBody>
+          <a:bodyPr wrap="square" lIns="18288" tIns="18288" rIns="18288" bIns="18288" anchor="ctr">
+            <a:spAutoFit/>
+          </a:bodyPr>
+          <a:lstStyle/>
+          <a:p>
+            <a:pPr algn="r">
+              <a:lnSpc>
+                <a:spcPct val="100000"/>
+              </a:lnSpc>
+              <a:spcAft>
+                <a:spcPts val="0"/>
+              </a:spcAft>
+            </a:pPr>
+            <a:r>
+              <a:rPr sz="900" b="1">
+                <a:latin typeface="微软雅黑"/>
+                <a:ea typeface="微软雅黑"/>
+              </a:rPr>
+              <a:t>09</a:t>
+            </a:r>
+          </a:p>
+        </p:txBody>
+      </p:sp>
+      <p:sp>
+        <p:nvSpPr>
+          <p:cNvPr id="5" name="TextBox 4"/>
+          <p:cNvSpPr txBox="1"/>
+          <p:nvPr/>
+        </p:nvSpPr>
+        <p:spPr>
+          <a:xfrm>
+            <a:off x="566928" y="897494"/>
+            <a:ext cx="4389120" cy="344710"/>
+          </a:xfrm>
+          <a:prstGeom prst="rect">
+            <a:avLst/>
+          </a:prstGeom>
+          <a:noFill/>
+        </p:spPr>
+        <p:txBody>
+          <a:bodyPr wrap="square" lIns="18288" tIns="18288" rIns="18288" bIns="18288" anchor="ctr">
+            <a:spAutoFit/>
+          </a:bodyPr>
+          <a:lstStyle/>
+          <a:p>
+            <a:pPr algn="l">
+              <a:lnSpc>
+                <a:spcPct val="100000"/>
+              </a:lnSpc>
+              <a:spcAft>
+                <a:spcPts val="0"/>
+              </a:spcAft>
+            </a:pPr>
+            <a:r>
+              <a:rPr sz="2000" b="1" dirty="0">
+                <a:latin typeface="微软雅黑"/>
+                <a:ea typeface="微软雅黑"/>
+              </a:rPr>
+              <a:t>Query </a:t>
+            </a:r>
+            <a:r>
+              <a:rPr sz="2000" b="1" dirty="0" err="1">
+                <a:latin typeface="微软雅黑"/>
+                <a:ea typeface="微软雅黑"/>
+              </a:rPr>
+              <a:t>长度分桶</a:t>
+            </a:r>
+            <a:endParaRPr sz="2000" b="1" dirty="0">
+              <a:latin typeface="微软雅黑"/>
+              <a:ea typeface="微软雅黑"/>
+            </a:endParaRPr>
+          </a:p>
+        </p:txBody>
+      </p:sp>
+      <p:graphicFrame>
+        <p:nvGraphicFramePr>
+          <p:cNvPr id="7" name="Table 6"/>
+          <p:cNvGraphicFramePr>
+            <a:graphicFrameLocks noGrp="1"/>
+          </p:cNvGraphicFramePr>
+          <p:nvPr>
+            <p:extLst>
+              <p:ext uri="{D42A27DB-BD31-4B8C-83A1-F6EECF244321}">
+                <p14:modId xmlns:p14="http://schemas.microsoft.com/office/powerpoint/2010/main" val="2089084342"/>
+              </p:ext>
+            </p:extLst>
+          </p:nvPr>
+        </p:nvGraphicFramePr>
+        <p:xfrm>
+          <a:off x="566928" y="1325880"/>
+          <a:ext cx="11073384" cy="1830820"/>
+        </p:xfrm>
+        <a:graphic>
+          <a:graphicData uri="http://schemas.openxmlformats.org/drawingml/2006/table">
+            <a:tbl>
+              <a:tblPr firstRow="1" bandRow="1">
+                <a:tableStyleId>{5C22544A-7EE6-4342-B048-85BDC9FD1C3A}</a:tableStyleId>
+              </a:tblPr>
+              <a:tblGrid>
+                <a:gridCol w="1882475">
+                  <a:extLst>
+                    <a:ext uri="{9D8B030D-6E8A-4147-A177-3AD203B41FA5}">
+                      <a16:colId xmlns:a16="http://schemas.microsoft.com/office/drawing/2014/main" val="20000"/>
+                    </a:ext>
+                  </a:extLst>
+                </a:gridCol>
+                <a:gridCol w="1439539">
+                  <a:extLst>
+                    <a:ext uri="{9D8B030D-6E8A-4147-A177-3AD203B41FA5}">
+                      <a16:colId xmlns:a16="http://schemas.microsoft.com/office/drawing/2014/main" val="20001"/>
+                    </a:ext>
+                  </a:extLst>
+                </a:gridCol>
+                <a:gridCol w="1882475">
+                  <a:extLst>
+                    <a:ext uri="{9D8B030D-6E8A-4147-A177-3AD203B41FA5}">
+                      <a16:colId xmlns:a16="http://schemas.microsoft.com/office/drawing/2014/main" val="20002"/>
+                    </a:ext>
+                  </a:extLst>
+                </a:gridCol>
+                <a:gridCol w="1993210">
+                  <a:extLst>
+                    <a:ext uri="{9D8B030D-6E8A-4147-A177-3AD203B41FA5}">
+                      <a16:colId xmlns:a16="http://schemas.microsoft.com/office/drawing/2014/main" val="20003"/>
+                    </a:ext>
+                  </a:extLst>
+                </a:gridCol>
+                <a:gridCol w="1882475">
+                  <a:extLst>
+                    <a:ext uri="{9D8B030D-6E8A-4147-A177-3AD203B41FA5}">
+                      <a16:colId xmlns:a16="http://schemas.microsoft.com/office/drawing/2014/main" val="20004"/>
+                    </a:ext>
+                  </a:extLst>
+                </a:gridCol>
+                <a:gridCol w="1993210">
+                  <a:extLst>
+                    <a:ext uri="{9D8B030D-6E8A-4147-A177-3AD203B41FA5}">
+                      <a16:colId xmlns:a16="http://schemas.microsoft.com/office/drawing/2014/main" val="20005"/>
+                    </a:ext>
+                  </a:extLst>
+                </a:gridCol>
+              </a:tblGrid>
+              <a:tr h="366164">
+                <a:tc>
+                  <a:txBody>
+                    <a:bodyPr/>
+                    <a:lstStyle/>
+                    <a:p>
+                      <a:pPr algn="ctr">
+                        <a:spcAft>
+                          <a:spcPts val="0"/>
+                        </a:spcAft>
+                      </a:pPr>
+                      <a:r>
+                        <a:rPr sz="1400" b="1" dirty="0">
+                          <a:solidFill>
+                            <a:schemeClr val="tx1"/>
+                          </a:solidFill>
+                          <a:latin typeface="微软雅黑"/>
+                          <a:ea typeface="微软雅黑"/>
+                        </a:rPr>
+                        <a:t>Query </a:t>
+                      </a:r>
+                      <a:r>
+                        <a:rPr sz="1400" b="1" dirty="0" err="1">
+                          <a:solidFill>
+                            <a:schemeClr val="tx1"/>
+                          </a:solidFill>
+                          <a:latin typeface="微软雅黑"/>
+                          <a:ea typeface="微软雅黑"/>
+                        </a:rPr>
+                        <a:t>长度</a:t>
+                      </a:r>
+                      <a:endParaRPr sz="1400" b="1" dirty="0">
+                        <a:solidFill>
+                          <a:schemeClr val="tx1"/>
+                        </a:solidFill>
+                        <a:latin typeface="微软雅黑"/>
+                        <a:ea typeface="微软雅黑"/>
+                      </a:endParaRPr>
+                    </a:p>
+                  </a:txBody>
+                  <a:tcPr marL="41148" marR="41148" marT="18288" marB="18288" anchor="ctr">
+                    <a:solidFill>
+                      <a:srgbClr val="E2E8F0"/>
+                    </a:solidFill>
+                  </a:tcPr>
+                </a:tc>
+                <a:tc>
+                  <a:txBody>
+                    <a:bodyPr/>
+                    <a:lstStyle/>
+                    <a:p>
+                      <a:pPr algn="ctr">
+                        <a:spcAft>
+                          <a:spcPts val="0"/>
+                        </a:spcAft>
+                      </a:pPr>
+                      <a:r>
+                        <a:rPr sz="1400" b="1" dirty="0" err="1">
+                          <a:solidFill>
+                            <a:schemeClr val="tx1"/>
+                          </a:solidFill>
+                          <a:latin typeface="微软雅黑"/>
+                          <a:ea typeface="微软雅黑"/>
+                        </a:rPr>
+                        <a:t>样本数</a:t>
+                      </a:r>
+                      <a:endParaRPr sz="1400" b="1" dirty="0">
+                        <a:solidFill>
+                          <a:schemeClr val="tx1"/>
+                        </a:solidFill>
+                        <a:latin typeface="微软雅黑"/>
+                        <a:ea typeface="微软雅黑"/>
+                      </a:endParaRPr>
+                    </a:p>
+                  </a:txBody>
+                  <a:tcPr marL="41148" marR="41148" marT="18288" marB="18288" anchor="ctr">
+                    <a:solidFill>
+                      <a:srgbClr val="E2E8F0"/>
+                    </a:solidFill>
+                  </a:tcPr>
+                </a:tc>
+                <a:tc>
+                  <a:txBody>
+                    <a:bodyPr/>
+                    <a:lstStyle/>
+                    <a:p>
+                      <a:pPr algn="ctr">
+                        <a:spcAft>
+                          <a:spcPts val="0"/>
+                        </a:spcAft>
+                      </a:pPr>
+                      <a:r>
+                        <a:rPr sz="1400" b="1" dirty="0">
+                          <a:solidFill>
+                            <a:schemeClr val="tx1"/>
+                          </a:solidFill>
+                          <a:latin typeface="微软雅黑"/>
+                          <a:ea typeface="微软雅黑"/>
+                        </a:rPr>
+                        <a:t>0.6B Hit@1</a:t>
+                      </a:r>
+                    </a:p>
+                  </a:txBody>
+                  <a:tcPr marL="41148" marR="41148" marT="18288" marB="18288" anchor="ctr">
+                    <a:solidFill>
+                      <a:srgbClr val="E2E8F0"/>
+                    </a:solidFill>
+                  </a:tcPr>
+                </a:tc>
+                <a:tc>
+                  <a:txBody>
+                    <a:bodyPr/>
+                    <a:lstStyle/>
+                    <a:p>
+                      <a:pPr algn="ctr">
+                        <a:spcAft>
+                          <a:spcPts val="0"/>
+                        </a:spcAft>
+                      </a:pPr>
+                      <a:r>
+                        <a:rPr sz="1400" b="1" dirty="0">
+                          <a:solidFill>
+                            <a:schemeClr val="tx1"/>
+                          </a:solidFill>
+                          <a:latin typeface="微软雅黑"/>
+                          <a:ea typeface="微软雅黑"/>
+                        </a:rPr>
+                        <a:t>0.6B Hit@10</a:t>
+                      </a:r>
+                    </a:p>
+                  </a:txBody>
+                  <a:tcPr marL="41148" marR="41148" marT="18288" marB="18288" anchor="ctr">
+                    <a:solidFill>
+                      <a:srgbClr val="E2E8F0"/>
+                    </a:solidFill>
+                  </a:tcPr>
+                </a:tc>
+                <a:tc>
+                  <a:txBody>
+                    <a:bodyPr/>
+                    <a:lstStyle/>
+                    <a:p>
+                      <a:pPr algn="ctr">
+                        <a:spcAft>
+                          <a:spcPts val="0"/>
+                        </a:spcAft>
+                      </a:pPr>
+                      <a:r>
+                        <a:rPr sz="1400" b="1" dirty="0">
+                          <a:solidFill>
+                            <a:schemeClr val="tx1"/>
+                          </a:solidFill>
+                          <a:latin typeface="微软雅黑"/>
+                          <a:ea typeface="微软雅黑"/>
+                        </a:rPr>
+                        <a:t>4B Hit@1</a:t>
+                      </a:r>
+                    </a:p>
+                  </a:txBody>
+                  <a:tcPr marL="41148" marR="41148" marT="18288" marB="18288" anchor="ctr">
+                    <a:solidFill>
+                      <a:srgbClr val="E2E8F0"/>
+                    </a:solidFill>
+                  </a:tcPr>
+                </a:tc>
+                <a:tc>
+                  <a:txBody>
+                    <a:bodyPr/>
+                    <a:lstStyle/>
+                    <a:p>
+                      <a:pPr algn="ctr">
+                        <a:spcAft>
+                          <a:spcPts val="0"/>
+                        </a:spcAft>
+                      </a:pPr>
+                      <a:r>
+                        <a:rPr sz="1400" b="1" dirty="0">
+                          <a:solidFill>
+                            <a:schemeClr val="tx1"/>
+                          </a:solidFill>
+                          <a:latin typeface="微软雅黑"/>
+                          <a:ea typeface="微软雅黑"/>
+                        </a:rPr>
+                        <a:t>4B Hit@10</a:t>
+                      </a:r>
+                    </a:p>
+                  </a:txBody>
+                  <a:tcPr marL="41148" marR="41148" marT="18288" marB="18288" anchor="ctr">
+                    <a:solidFill>
+                      <a:srgbClr val="E2E8F0"/>
+                    </a:solidFill>
+                  </a:tcPr>
+                </a:tc>
+                <a:extLst>
+                  <a:ext uri="{0D108BD9-81ED-4DB2-BD59-A6C34878D82A}">
+                    <a16:rowId xmlns:a16="http://schemas.microsoft.com/office/drawing/2014/main" val="10000"/>
+                  </a:ext>
+                </a:extLst>
+              </a:tr>
+              <a:tr h="366164">
+                <a:tc>
+                  <a:txBody>
+                    <a:bodyPr/>
+                    <a:lstStyle/>
+                    <a:p>
+                      <a:pPr algn="ctr">
+                        <a:spcAft>
+                          <a:spcPts val="0"/>
+                        </a:spcAft>
+                      </a:pPr>
+                      <a:r>
+                        <a:rPr sz="1400" b="1" dirty="0">
+                          <a:solidFill>
+                            <a:schemeClr val="tx1"/>
+                          </a:solidFill>
+                          <a:latin typeface="微软雅黑"/>
+                          <a:ea typeface="微软雅黑"/>
+                        </a:rPr>
+                        <a:t>1–2 </a:t>
+                      </a:r>
+                      <a:r>
+                        <a:rPr sz="1400" b="1" dirty="0" err="1">
+                          <a:solidFill>
+                            <a:schemeClr val="tx1"/>
+                          </a:solidFill>
+                          <a:latin typeface="微软雅黑"/>
+                          <a:ea typeface="微软雅黑"/>
+                        </a:rPr>
+                        <a:t>字</a:t>
+                      </a:r>
+                      <a:endParaRPr sz="1400" b="1" dirty="0">
+                        <a:solidFill>
+                          <a:schemeClr val="tx1"/>
+                        </a:solidFill>
+                        <a:latin typeface="微软雅黑"/>
+                        <a:ea typeface="微软雅黑"/>
+                      </a:endParaRPr>
+                    </a:p>
+                  </a:txBody>
+                  <a:tcPr marL="41148" marR="41148" marT="18288" marB="18288" anchor="ctr">
+                    <a:solidFill>
+                      <a:srgbClr val="FFFFFF"/>
+                    </a:solidFill>
+                  </a:tcPr>
+                </a:tc>
+                <a:tc>
+                  <a:txBody>
+                    <a:bodyPr/>
+                    <a:lstStyle/>
+                    <a:p>
+                      <a:pPr algn="ctr">
+                        <a:spcAft>
+                          <a:spcPts val="0"/>
+                        </a:spcAft>
+                      </a:pPr>
+                      <a:r>
+                        <a:rPr sz="1400" b="0" dirty="0">
+                          <a:solidFill>
+                            <a:schemeClr val="tx1"/>
+                          </a:solidFill>
+                          <a:latin typeface="微软雅黑"/>
+                          <a:ea typeface="微软雅黑"/>
+                        </a:rPr>
+                        <a:t>2,927</a:t>
+                      </a:r>
+                    </a:p>
+                  </a:txBody>
+                  <a:tcPr marL="41148" marR="41148" marT="18288" marB="18288" anchor="ctr">
+                    <a:solidFill>
+                      <a:srgbClr val="FFFFFF"/>
+                    </a:solidFill>
+                  </a:tcPr>
+                </a:tc>
+                <a:tc>
+                  <a:txBody>
+                    <a:bodyPr/>
+                    <a:lstStyle/>
+                    <a:p>
+                      <a:pPr algn="ctr">
+                        <a:spcAft>
+                          <a:spcPts val="0"/>
+                        </a:spcAft>
+                      </a:pPr>
+                      <a:r>
+                        <a:rPr sz="1400" b="0" dirty="0">
+                          <a:solidFill>
+                            <a:schemeClr val="tx1"/>
+                          </a:solidFill>
+                          <a:latin typeface="微软雅黑"/>
+                          <a:ea typeface="微软雅黑"/>
+                        </a:rPr>
+                        <a:t>0.92%</a:t>
+                      </a:r>
+                    </a:p>
+                  </a:txBody>
+                  <a:tcPr marL="41148" marR="41148" marT="18288" marB="18288" anchor="ctr">
+                    <a:solidFill>
+                      <a:srgbClr val="FFFFFF"/>
+                    </a:solidFill>
+                  </a:tcPr>
+                </a:tc>
+                <a:tc>
+                  <a:txBody>
+                    <a:bodyPr/>
+                    <a:lstStyle/>
+                    <a:p>
+                      <a:pPr algn="ctr">
+                        <a:spcAft>
+                          <a:spcPts val="0"/>
+                        </a:spcAft>
+                      </a:pPr>
+                      <a:r>
+                        <a:rPr sz="1400" b="0" dirty="0">
+                          <a:solidFill>
+                            <a:schemeClr val="tx1"/>
+                          </a:solidFill>
+                          <a:latin typeface="微软雅黑"/>
+                          <a:ea typeface="微软雅黑"/>
+                        </a:rPr>
+                        <a:t>5.06%</a:t>
+                      </a:r>
+                    </a:p>
+                  </a:txBody>
+                  <a:tcPr marL="41148" marR="41148" marT="18288" marB="18288" anchor="ctr">
+                    <a:solidFill>
+                      <a:srgbClr val="FFFFFF"/>
+                    </a:solidFill>
+                  </a:tcPr>
+                </a:tc>
+                <a:tc>
+                  <a:txBody>
+                    <a:bodyPr/>
+                    <a:lstStyle/>
+                    <a:p>
+                      <a:pPr algn="ctr">
+                        <a:spcAft>
+                          <a:spcPts val="0"/>
+                        </a:spcAft>
+                      </a:pPr>
+                      <a:r>
+                        <a:rPr sz="1400" b="0" dirty="0">
+                          <a:solidFill>
+                            <a:schemeClr val="tx1"/>
+                          </a:solidFill>
+                          <a:latin typeface="微软雅黑"/>
+                          <a:ea typeface="微软雅黑"/>
+                        </a:rPr>
+                        <a:t>0.51%</a:t>
+                      </a:r>
+                    </a:p>
+                  </a:txBody>
+                  <a:tcPr marL="41148" marR="41148" marT="18288" marB="18288" anchor="ctr">
+                    <a:solidFill>
+                      <a:srgbClr val="FFFFFF"/>
+                    </a:solidFill>
+                  </a:tcPr>
+                </a:tc>
+                <a:tc>
+                  <a:txBody>
+                    <a:bodyPr/>
+                    <a:lstStyle/>
+                    <a:p>
+                      <a:pPr algn="ctr">
+                        <a:spcAft>
+                          <a:spcPts val="0"/>
+                        </a:spcAft>
+                      </a:pPr>
+                      <a:r>
+                        <a:rPr sz="1400" b="0" dirty="0">
+                          <a:solidFill>
+                            <a:schemeClr val="tx1"/>
+                          </a:solidFill>
+                          <a:latin typeface="微软雅黑"/>
+                          <a:ea typeface="微软雅黑"/>
+                        </a:rPr>
+                        <a:t>2.43%</a:t>
+                      </a:r>
+                    </a:p>
+                  </a:txBody>
+                  <a:tcPr marL="41148" marR="41148" marT="18288" marB="18288" anchor="ctr">
+                    <a:solidFill>
+                      <a:srgbClr val="FFFFFF"/>
+                    </a:solidFill>
+                  </a:tcPr>
+                </a:tc>
+                <a:extLst>
+                  <a:ext uri="{0D108BD9-81ED-4DB2-BD59-A6C34878D82A}">
+                    <a16:rowId xmlns:a16="http://schemas.microsoft.com/office/drawing/2014/main" val="10001"/>
+                  </a:ext>
+                </a:extLst>
+              </a:tr>
+              <a:tr h="366164">
+                <a:tc>
+                  <a:txBody>
+                    <a:bodyPr/>
+                    <a:lstStyle/>
+                    <a:p>
+                      <a:pPr algn="ctr">
+                        <a:spcAft>
+                          <a:spcPts val="0"/>
+                        </a:spcAft>
+                      </a:pPr>
+                      <a:r>
+                        <a:rPr sz="1400" b="1">
+                          <a:solidFill>
+                            <a:schemeClr val="tx1"/>
+                          </a:solidFill>
+                          <a:latin typeface="微软雅黑"/>
+                          <a:ea typeface="微软雅黑"/>
+                        </a:rPr>
+                        <a:t>3–5 字</a:t>
+                      </a:r>
+                    </a:p>
+                  </a:txBody>
+                  <a:tcPr marL="41148" marR="41148" marT="18288" marB="18288" anchor="ctr">
+                    <a:solidFill>
+                      <a:srgbClr val="F8FAFC"/>
+                    </a:solidFill>
+                  </a:tcPr>
+                </a:tc>
+                <a:tc>
+                  <a:txBody>
+                    <a:bodyPr/>
+                    <a:lstStyle/>
+                    <a:p>
+                      <a:pPr algn="ctr">
+                        <a:spcAft>
+                          <a:spcPts val="0"/>
+                        </a:spcAft>
+                      </a:pPr>
+                      <a:r>
+                        <a:rPr sz="1400" b="0" dirty="0">
+                          <a:solidFill>
+                            <a:schemeClr val="tx1"/>
+                          </a:solidFill>
+                          <a:latin typeface="微软雅黑"/>
+                          <a:ea typeface="微软雅黑"/>
+                        </a:rPr>
+                        <a:t>4,552</a:t>
+                      </a:r>
+                    </a:p>
+                  </a:txBody>
+                  <a:tcPr marL="41148" marR="41148" marT="18288" marB="18288" anchor="ctr">
+                    <a:solidFill>
+                      <a:srgbClr val="F8FAFC"/>
+                    </a:solidFill>
+                  </a:tcPr>
+                </a:tc>
+                <a:tc>
+                  <a:txBody>
+                    <a:bodyPr/>
+                    <a:lstStyle/>
+                    <a:p>
+                      <a:pPr algn="ctr">
+                        <a:spcAft>
+                          <a:spcPts val="0"/>
+                        </a:spcAft>
+                      </a:pPr>
+                      <a:r>
+                        <a:rPr sz="1400" b="0" dirty="0">
+                          <a:solidFill>
+                            <a:schemeClr val="tx1"/>
+                          </a:solidFill>
+                          <a:latin typeface="微软雅黑"/>
+                          <a:ea typeface="微软雅黑"/>
+                        </a:rPr>
+                        <a:t>8.88%</a:t>
+                      </a:r>
+                    </a:p>
+                  </a:txBody>
+                  <a:tcPr marL="41148" marR="41148" marT="18288" marB="18288" anchor="ctr">
+                    <a:solidFill>
+                      <a:srgbClr val="F8FAFC"/>
+                    </a:solidFill>
+                  </a:tcPr>
+                </a:tc>
+                <a:tc>
+                  <a:txBody>
+                    <a:bodyPr/>
+                    <a:lstStyle/>
+                    <a:p>
+                      <a:pPr algn="ctr">
+                        <a:spcAft>
+                          <a:spcPts val="0"/>
+                        </a:spcAft>
+                      </a:pPr>
+                      <a:r>
+                        <a:rPr sz="1400" b="0" dirty="0">
+                          <a:solidFill>
+                            <a:schemeClr val="tx1"/>
+                          </a:solidFill>
+                          <a:latin typeface="微软雅黑"/>
+                          <a:ea typeface="微软雅黑"/>
+                        </a:rPr>
+                        <a:t>28.12%</a:t>
+                      </a:r>
+                    </a:p>
+                  </a:txBody>
+                  <a:tcPr marL="41148" marR="41148" marT="18288" marB="18288" anchor="ctr">
+                    <a:solidFill>
+                      <a:srgbClr val="F8FAFC"/>
+                    </a:solidFill>
+                  </a:tcPr>
+                </a:tc>
+                <a:tc>
+                  <a:txBody>
+                    <a:bodyPr/>
+                    <a:lstStyle/>
+                    <a:p>
+                      <a:pPr algn="ctr">
+                        <a:spcAft>
+                          <a:spcPts val="0"/>
+                        </a:spcAft>
+                      </a:pPr>
+                      <a:r>
+                        <a:rPr sz="1400" b="0" dirty="0">
+                          <a:solidFill>
+                            <a:schemeClr val="tx1"/>
+                          </a:solidFill>
+                          <a:latin typeface="微软雅黑"/>
+                          <a:ea typeface="微软雅黑"/>
+                        </a:rPr>
+                        <a:t>6.30%</a:t>
+                      </a:r>
+                    </a:p>
+                  </a:txBody>
+                  <a:tcPr marL="41148" marR="41148" marT="18288" marB="18288" anchor="ctr">
+                    <a:solidFill>
+                      <a:srgbClr val="F8FAFC"/>
+                    </a:solidFill>
+                  </a:tcPr>
+                </a:tc>
+                <a:tc>
+                  <a:txBody>
+                    <a:bodyPr/>
+                    <a:lstStyle/>
+                    <a:p>
+                      <a:pPr algn="ctr">
+                        <a:spcAft>
+                          <a:spcPts val="0"/>
+                        </a:spcAft>
+                      </a:pPr>
+                      <a:r>
+                        <a:rPr sz="1400" b="0" dirty="0">
+                          <a:solidFill>
+                            <a:schemeClr val="tx1"/>
+                          </a:solidFill>
+                          <a:latin typeface="微软雅黑"/>
+                          <a:ea typeface="微软雅黑"/>
+                        </a:rPr>
+                        <a:t>17.99%</a:t>
+                      </a:r>
+                    </a:p>
+                  </a:txBody>
+                  <a:tcPr marL="41148" marR="41148" marT="18288" marB="18288" anchor="ctr">
+                    <a:solidFill>
+                      <a:srgbClr val="F8FAFC"/>
+                    </a:solidFill>
+                  </a:tcPr>
+                </a:tc>
+                <a:extLst>
+                  <a:ext uri="{0D108BD9-81ED-4DB2-BD59-A6C34878D82A}">
+                    <a16:rowId xmlns:a16="http://schemas.microsoft.com/office/drawing/2014/main" val="10002"/>
+                  </a:ext>
+                </a:extLst>
+              </a:tr>
+              <a:tr h="366164">
+                <a:tc>
+                  <a:txBody>
+                    <a:bodyPr/>
+                    <a:lstStyle/>
+                    <a:p>
+                      <a:pPr algn="ctr">
+                        <a:spcAft>
+                          <a:spcPts val="0"/>
+                        </a:spcAft>
+                      </a:pPr>
+                      <a:r>
+                        <a:rPr sz="1400" b="1">
+                          <a:solidFill>
+                            <a:schemeClr val="tx1"/>
+                          </a:solidFill>
+                          <a:latin typeface="微软雅黑"/>
+                          <a:ea typeface="微软雅黑"/>
+                        </a:rPr>
+                        <a:t>6–10 字</a:t>
+                      </a:r>
+                    </a:p>
+                  </a:txBody>
+                  <a:tcPr marL="41148" marR="41148" marT="18288" marB="18288" anchor="ctr">
+                    <a:solidFill>
+                      <a:srgbClr val="FFFFFF"/>
+                    </a:solidFill>
+                  </a:tcPr>
+                </a:tc>
+                <a:tc>
+                  <a:txBody>
+                    <a:bodyPr/>
+                    <a:lstStyle/>
+                    <a:p>
+                      <a:pPr algn="ctr">
+                        <a:spcAft>
+                          <a:spcPts val="0"/>
+                        </a:spcAft>
+                      </a:pPr>
+                      <a:r>
+                        <a:rPr sz="1400" b="0">
+                          <a:solidFill>
+                            <a:schemeClr val="tx1"/>
+                          </a:solidFill>
+                          <a:latin typeface="微软雅黑"/>
+                          <a:ea typeface="微软雅黑"/>
+                        </a:rPr>
+                        <a:t>1,796</a:t>
+                      </a:r>
+                    </a:p>
+                  </a:txBody>
+                  <a:tcPr marL="41148" marR="41148" marT="18288" marB="18288" anchor="ctr">
+                    <a:solidFill>
+                      <a:srgbClr val="FFFFFF"/>
+                    </a:solidFill>
+                  </a:tcPr>
+                </a:tc>
+                <a:tc>
+                  <a:txBody>
+                    <a:bodyPr/>
+                    <a:lstStyle/>
+                    <a:p>
+                      <a:pPr algn="ctr">
+                        <a:spcAft>
+                          <a:spcPts val="0"/>
+                        </a:spcAft>
+                      </a:pPr>
+                      <a:r>
+                        <a:rPr sz="1400" b="0" dirty="0">
+                          <a:solidFill>
+                            <a:schemeClr val="tx1"/>
+                          </a:solidFill>
+                          <a:latin typeface="微软雅黑"/>
+                          <a:ea typeface="微软雅黑"/>
+                        </a:rPr>
+                        <a:t>27.56%</a:t>
+                      </a:r>
+                    </a:p>
+                  </a:txBody>
+                  <a:tcPr marL="41148" marR="41148" marT="18288" marB="18288" anchor="ctr">
+                    <a:solidFill>
+                      <a:srgbClr val="FFFFFF"/>
+                    </a:solidFill>
+                  </a:tcPr>
+                </a:tc>
+                <a:tc>
+                  <a:txBody>
+                    <a:bodyPr/>
+                    <a:lstStyle/>
+                    <a:p>
+                      <a:pPr algn="ctr">
+                        <a:spcAft>
+                          <a:spcPts val="0"/>
+                        </a:spcAft>
+                      </a:pPr>
+                      <a:r>
+                        <a:rPr sz="1400" b="0" dirty="0">
+                          <a:solidFill>
+                            <a:schemeClr val="tx1"/>
+                          </a:solidFill>
+                          <a:latin typeface="微软雅黑"/>
+                          <a:ea typeface="微软雅黑"/>
+                        </a:rPr>
+                        <a:t>54.62%</a:t>
+                      </a:r>
+                    </a:p>
+                  </a:txBody>
+                  <a:tcPr marL="41148" marR="41148" marT="18288" marB="18288" anchor="ctr">
+                    <a:solidFill>
+                      <a:srgbClr val="FFFFFF"/>
+                    </a:solidFill>
+                  </a:tcPr>
+                </a:tc>
+                <a:tc>
+                  <a:txBody>
+                    <a:bodyPr/>
+                    <a:lstStyle/>
+                    <a:p>
+                      <a:pPr algn="ctr">
+                        <a:spcAft>
+                          <a:spcPts val="0"/>
+                        </a:spcAft>
+                      </a:pPr>
+                      <a:r>
+                        <a:rPr sz="1400" b="0" dirty="0">
+                          <a:solidFill>
+                            <a:schemeClr val="tx1"/>
+                          </a:solidFill>
+                          <a:latin typeface="微软雅黑"/>
+                          <a:ea typeface="微软雅黑"/>
+                        </a:rPr>
+                        <a:t>23.16%</a:t>
+                      </a:r>
+                    </a:p>
+                  </a:txBody>
+                  <a:tcPr marL="41148" marR="41148" marT="18288" marB="18288" anchor="ctr">
+                    <a:solidFill>
+                      <a:srgbClr val="FFFFFF"/>
+                    </a:solidFill>
+                  </a:tcPr>
+                </a:tc>
+                <a:tc>
+                  <a:txBody>
+                    <a:bodyPr/>
+                    <a:lstStyle/>
+                    <a:p>
+                      <a:pPr algn="ctr">
+                        <a:spcAft>
+                          <a:spcPts val="0"/>
+                        </a:spcAft>
+                      </a:pPr>
+                      <a:r>
+                        <a:rPr sz="1400" b="0" dirty="0">
+                          <a:solidFill>
+                            <a:schemeClr val="tx1"/>
+                          </a:solidFill>
+                          <a:latin typeface="微软雅黑"/>
+                          <a:ea typeface="微软雅黑"/>
+                        </a:rPr>
+                        <a:t>48.22%</a:t>
+                      </a:r>
+                    </a:p>
+                  </a:txBody>
+                  <a:tcPr marL="41148" marR="41148" marT="18288" marB="18288" anchor="ctr">
+                    <a:solidFill>
+                      <a:srgbClr val="FFFFFF"/>
+                    </a:solidFill>
+                  </a:tcPr>
+                </a:tc>
+                <a:extLst>
+                  <a:ext uri="{0D108BD9-81ED-4DB2-BD59-A6C34878D82A}">
+                    <a16:rowId xmlns:a16="http://schemas.microsoft.com/office/drawing/2014/main" val="10003"/>
+                  </a:ext>
+                </a:extLst>
+              </a:tr>
+              <a:tr h="366164">
+                <a:tc>
+                  <a:txBody>
+                    <a:bodyPr/>
+                    <a:lstStyle/>
+                    <a:p>
+                      <a:pPr algn="ctr">
+                        <a:spcAft>
+                          <a:spcPts val="0"/>
+                        </a:spcAft>
+                      </a:pPr>
+                      <a:r>
+                        <a:rPr sz="1400" b="1" dirty="0">
+                          <a:solidFill>
+                            <a:schemeClr val="tx1"/>
+                          </a:solidFill>
+                          <a:latin typeface="微软雅黑"/>
+                          <a:ea typeface="微软雅黑"/>
+                        </a:rPr>
+                        <a:t>&gt;10 </a:t>
+                      </a:r>
+                      <a:r>
+                        <a:rPr sz="1400" b="1" dirty="0" err="1">
+                          <a:solidFill>
+                            <a:schemeClr val="tx1"/>
+                          </a:solidFill>
+                          <a:latin typeface="微软雅黑"/>
+                          <a:ea typeface="微软雅黑"/>
+                        </a:rPr>
+                        <a:t>字</a:t>
+                      </a:r>
+                      <a:endParaRPr sz="1400" b="1" dirty="0">
+                        <a:solidFill>
+                          <a:schemeClr val="tx1"/>
+                        </a:solidFill>
+                        <a:latin typeface="微软雅黑"/>
+                        <a:ea typeface="微软雅黑"/>
+                      </a:endParaRPr>
+                    </a:p>
+                  </a:txBody>
+                  <a:tcPr marL="41148" marR="41148" marT="18288" marB="18288" anchor="ctr">
+                    <a:solidFill>
+                      <a:srgbClr val="F8FAFC"/>
+                    </a:solidFill>
+                  </a:tcPr>
+                </a:tc>
+                <a:tc>
+                  <a:txBody>
+                    <a:bodyPr/>
+                    <a:lstStyle/>
+                    <a:p>
+                      <a:pPr algn="ctr">
+                        <a:spcAft>
+                          <a:spcPts val="0"/>
+                        </a:spcAft>
+                      </a:pPr>
+                      <a:r>
+                        <a:rPr sz="1400" b="0" dirty="0">
+                          <a:solidFill>
+                            <a:schemeClr val="tx1"/>
+                          </a:solidFill>
+                          <a:latin typeface="微软雅黑"/>
+                          <a:ea typeface="微软雅黑"/>
+                        </a:rPr>
+                        <a:t>725</a:t>
+                      </a:r>
+                    </a:p>
+                  </a:txBody>
+                  <a:tcPr marL="41148" marR="41148" marT="18288" marB="18288" anchor="ctr">
+                    <a:solidFill>
+                      <a:srgbClr val="F8FAFC"/>
+                    </a:solidFill>
+                  </a:tcPr>
+                </a:tc>
+                <a:tc>
+                  <a:txBody>
+                    <a:bodyPr/>
+                    <a:lstStyle/>
+                    <a:p>
+                      <a:pPr algn="ctr">
+                        <a:spcAft>
+                          <a:spcPts val="0"/>
+                        </a:spcAft>
+                      </a:pPr>
+                      <a:r>
+                        <a:rPr sz="1400" b="0" dirty="0">
+                          <a:solidFill>
+                            <a:schemeClr val="tx1"/>
+                          </a:solidFill>
+                          <a:latin typeface="微软雅黑"/>
+                          <a:ea typeface="微软雅黑"/>
+                        </a:rPr>
+                        <a:t>38.21%</a:t>
+                      </a:r>
+                    </a:p>
+                  </a:txBody>
+                  <a:tcPr marL="41148" marR="41148" marT="18288" marB="18288" anchor="ctr">
+                    <a:solidFill>
+                      <a:srgbClr val="F8FAFC"/>
+                    </a:solidFill>
+                  </a:tcPr>
+                </a:tc>
+                <a:tc>
+                  <a:txBody>
+                    <a:bodyPr/>
+                    <a:lstStyle/>
+                    <a:p>
+                      <a:pPr algn="ctr">
+                        <a:spcAft>
+                          <a:spcPts val="0"/>
+                        </a:spcAft>
+                      </a:pPr>
+                      <a:r>
+                        <a:rPr sz="1400" b="0">
+                          <a:solidFill>
+                            <a:schemeClr val="tx1"/>
+                          </a:solidFill>
+                          <a:latin typeface="微软雅黑"/>
+                          <a:ea typeface="微软雅黑"/>
+                        </a:rPr>
+                        <a:t>57.38%</a:t>
+                      </a:r>
+                    </a:p>
+                  </a:txBody>
+                  <a:tcPr marL="41148" marR="41148" marT="18288" marB="18288" anchor="ctr">
+                    <a:solidFill>
+                      <a:srgbClr val="F8FAFC"/>
+                    </a:solidFill>
+                  </a:tcPr>
+                </a:tc>
+                <a:tc>
+                  <a:txBody>
+                    <a:bodyPr/>
+                    <a:lstStyle/>
+                    <a:p>
+                      <a:pPr algn="ctr">
+                        <a:spcAft>
+                          <a:spcPts val="0"/>
+                        </a:spcAft>
+                      </a:pPr>
+                      <a:r>
+                        <a:rPr sz="1400" b="0" dirty="0">
+                          <a:solidFill>
+                            <a:schemeClr val="tx1"/>
+                          </a:solidFill>
+                          <a:latin typeface="微软雅黑"/>
+                          <a:ea typeface="微软雅黑"/>
+                        </a:rPr>
+                        <a:t>35.03%</a:t>
+                      </a:r>
+                    </a:p>
+                  </a:txBody>
+                  <a:tcPr marL="41148" marR="41148" marT="18288" marB="18288" anchor="ctr">
+                    <a:solidFill>
+                      <a:srgbClr val="F8FAFC"/>
+                    </a:solidFill>
+                  </a:tcPr>
+                </a:tc>
+                <a:tc>
+                  <a:txBody>
+                    <a:bodyPr/>
+                    <a:lstStyle/>
+                    <a:p>
+                      <a:pPr algn="ctr">
+                        <a:spcAft>
+                          <a:spcPts val="0"/>
+                        </a:spcAft>
+                      </a:pPr>
+                      <a:r>
+                        <a:rPr sz="1400" b="0" dirty="0">
+                          <a:solidFill>
+                            <a:schemeClr val="tx1"/>
+                          </a:solidFill>
+                          <a:latin typeface="微软雅黑"/>
+                          <a:ea typeface="微软雅黑"/>
+                        </a:rPr>
+                        <a:t>49.93%</a:t>
+                      </a:r>
+                    </a:p>
+                  </a:txBody>
+                  <a:tcPr marL="41148" marR="41148" marT="18288" marB="18288" anchor="ctr">
+                    <a:solidFill>
+                      <a:srgbClr val="F8FAFC"/>
+                    </a:solidFill>
+                  </a:tcPr>
+                </a:tc>
+                <a:extLst>
+                  <a:ext uri="{0D108BD9-81ED-4DB2-BD59-A6C34878D82A}">
+                    <a16:rowId xmlns:a16="http://schemas.microsoft.com/office/drawing/2014/main" val="10004"/>
+                  </a:ext>
+                </a:extLst>
+              </a:tr>
+            </a:tbl>
+          </a:graphicData>
+        </a:graphic>
+      </p:graphicFrame>
+      <p:sp>
+        <p:nvSpPr>
+          <p:cNvPr id="21" name="TextBox 4">
+            <a:extLst>
+              <a:ext uri="{FF2B5EF4-FFF2-40B4-BE49-F238E27FC236}">
+                <a16:creationId xmlns:a16="http://schemas.microsoft.com/office/drawing/2014/main" id="{4BF5F2B0-078C-6A93-699C-BD06A9C8B254}"/>
+              </a:ext>
+            </a:extLst>
+          </p:cNvPr>
+          <p:cNvSpPr txBox="1"/>
+          <p:nvPr/>
+        </p:nvSpPr>
+        <p:spPr>
+          <a:xfrm>
+            <a:off x="566928" y="3301249"/>
+            <a:ext cx="4389120" cy="344710"/>
+          </a:xfrm>
+          <a:prstGeom prst="rect">
+            <a:avLst/>
+          </a:prstGeom>
+          <a:noFill/>
+        </p:spPr>
+        <p:txBody>
+          <a:bodyPr wrap="square" lIns="18288" tIns="18288" rIns="18288" bIns="18288" anchor="ctr">
+            <a:spAutoFit/>
+          </a:bodyPr>
+          <a:lstStyle/>
+          <a:p>
+            <a:pPr algn="l">
+              <a:lnSpc>
+                <a:spcPct val="100000"/>
+              </a:lnSpc>
+              <a:spcAft>
+                <a:spcPts val="0"/>
+              </a:spcAft>
+            </a:pPr>
+            <a:r>
+              <a:rPr lang="en-US" altLang="zh-CN" sz="2000" b="1" dirty="0">
+                <a:latin typeface="微软雅黑"/>
+                <a:ea typeface="微软雅黑"/>
+              </a:rPr>
+              <a:t>Case </a:t>
+            </a:r>
+            <a:r>
+              <a:rPr lang="zh-CN" altLang="en-US" sz="2000" b="1" dirty="0">
+                <a:latin typeface="微软雅黑"/>
+                <a:ea typeface="微软雅黑"/>
+              </a:rPr>
+              <a:t>分析</a:t>
+            </a:r>
+            <a:endParaRPr sz="2000" b="1" dirty="0">
+              <a:latin typeface="微软雅黑"/>
+              <a:ea typeface="微软雅黑"/>
+            </a:endParaRPr>
+          </a:p>
+        </p:txBody>
+      </p:sp>
+      <p:graphicFrame>
+        <p:nvGraphicFramePr>
+          <p:cNvPr id="22" name="Table 6">
+            <a:extLst>
+              <a:ext uri="{FF2B5EF4-FFF2-40B4-BE49-F238E27FC236}">
+                <a16:creationId xmlns:a16="http://schemas.microsoft.com/office/drawing/2014/main" id="{7AE9D80F-3A2B-91ED-5C5D-476C8F974B7D}"/>
+              </a:ext>
+            </a:extLst>
+          </p:cNvPr>
+          <p:cNvGraphicFramePr>
+            <a:graphicFrameLocks noGrp="1"/>
+          </p:cNvGraphicFramePr>
+          <p:nvPr>
+            <p:extLst>
+              <p:ext uri="{D42A27DB-BD31-4B8C-83A1-F6EECF244321}">
+                <p14:modId xmlns:p14="http://schemas.microsoft.com/office/powerpoint/2010/main" val="1833809065"/>
+              </p:ext>
+            </p:extLst>
+          </p:nvPr>
+        </p:nvGraphicFramePr>
+        <p:xfrm>
+          <a:off x="566928" y="3805201"/>
+          <a:ext cx="11055095" cy="2617902"/>
+        </p:xfrm>
+        <a:graphic>
+          <a:graphicData uri="http://schemas.openxmlformats.org/drawingml/2006/table">
+            <a:tbl>
+              <a:tblPr firstRow="1" bandRow="1">
+                <a:tableStyleId>{5C22544A-7EE6-4342-B048-85BDC9FD1C3A}</a:tableStyleId>
+              </a:tblPr>
+              <a:tblGrid>
+                <a:gridCol w="1590747">
+                  <a:extLst>
+                    <a:ext uri="{9D8B030D-6E8A-4147-A177-3AD203B41FA5}">
+                      <a16:colId xmlns:a16="http://schemas.microsoft.com/office/drawing/2014/main" val="20000"/>
+                    </a:ext>
+                  </a:extLst>
+                </a:gridCol>
+                <a:gridCol w="1980375">
+                  <a:extLst>
+                    <a:ext uri="{9D8B030D-6E8A-4147-A177-3AD203B41FA5}">
+                      <a16:colId xmlns:a16="http://schemas.microsoft.com/office/drawing/2014/main" val="20001"/>
+                    </a:ext>
+                  </a:extLst>
+                </a:gridCol>
+                <a:gridCol w="1105325">
+                  <a:extLst>
+                    <a:ext uri="{9D8B030D-6E8A-4147-A177-3AD203B41FA5}">
+                      <a16:colId xmlns:a16="http://schemas.microsoft.com/office/drawing/2014/main" val="20002"/>
+                    </a:ext>
+                  </a:extLst>
+                </a:gridCol>
+                <a:gridCol w="1024729">
+                  <a:extLst>
+                    <a:ext uri="{9D8B030D-6E8A-4147-A177-3AD203B41FA5}">
+                      <a16:colId xmlns:a16="http://schemas.microsoft.com/office/drawing/2014/main" val="20003"/>
+                    </a:ext>
+                  </a:extLst>
+                </a:gridCol>
+                <a:gridCol w="5353919">
+                  <a:extLst>
+                    <a:ext uri="{9D8B030D-6E8A-4147-A177-3AD203B41FA5}">
+                      <a16:colId xmlns:a16="http://schemas.microsoft.com/office/drawing/2014/main" val="20004"/>
+                    </a:ext>
+                  </a:extLst>
+                </a:gridCol>
+              </a:tblGrid>
+              <a:tr h="373986">
+                <a:tc>
+                  <a:txBody>
+                    <a:bodyPr/>
+                    <a:lstStyle/>
+                    <a:p>
+                      <a:pPr algn="ctr" fontAlgn="t">
+                        <a:buNone/>
+                      </a:pPr>
+                      <a:r>
+                        <a:rPr lang="zh-CN" sz="1400" dirty="0">
+                          <a:solidFill>
+                            <a:schemeClr val="tx1"/>
+                          </a:solidFill>
+                          <a:effectLst/>
+                          <a:latin typeface="Microsoft YaHei" panose="020B0503020204020204" pitchFamily="34" charset="-122"/>
+                          <a:ea typeface="Microsoft YaHei" panose="020B0503020204020204" pitchFamily="34" charset="-122"/>
+                        </a:rPr>
+                        <a:t>Query</a:t>
+                      </a:r>
+                    </a:p>
+                  </a:txBody>
+                  <a:tcPr anchor="ctr">
+                    <a:solidFill>
+                      <a:srgbClr val="E2E8F0"/>
+                    </a:solidFill>
+                  </a:tcPr>
+                </a:tc>
+                <a:tc>
+                  <a:txBody>
+                    <a:bodyPr/>
+                    <a:lstStyle/>
+                    <a:p>
+                      <a:pPr algn="ctr" fontAlgn="t">
+                        <a:buNone/>
+                      </a:pPr>
+                      <a:r>
+                        <a:rPr lang="zh-CN" sz="1400">
+                          <a:solidFill>
+                            <a:schemeClr val="tx1"/>
+                          </a:solidFill>
+                          <a:effectLst/>
+                          <a:latin typeface="Microsoft YaHei" panose="020B0503020204020204" pitchFamily="34" charset="-122"/>
+                          <a:ea typeface="Microsoft YaHei" panose="020B0503020204020204" pitchFamily="34" charset="-122"/>
+                        </a:rPr>
+                        <a:t>目标 POI</a:t>
+                      </a:r>
+                    </a:p>
+                  </a:txBody>
+                  <a:tcPr anchor="ctr">
+                    <a:solidFill>
+                      <a:srgbClr val="E2E8F0"/>
+                    </a:solidFill>
+                  </a:tcPr>
+                </a:tc>
+                <a:tc>
+                  <a:txBody>
+                    <a:bodyPr/>
+                    <a:lstStyle/>
+                    <a:p>
+                      <a:pPr algn="ctr" fontAlgn="t">
+                        <a:buNone/>
+                      </a:pPr>
+                      <a:r>
+                        <a:rPr lang="zh-CN" sz="1400">
+                          <a:solidFill>
+                            <a:schemeClr val="tx1"/>
+                          </a:solidFill>
+                          <a:effectLst/>
+                          <a:latin typeface="Microsoft YaHei" panose="020B0503020204020204" pitchFamily="34" charset="-122"/>
+                          <a:ea typeface="Microsoft YaHei" panose="020B0503020204020204" pitchFamily="34" charset="-122"/>
+                        </a:rPr>
+                        <a:t>0.6B 排名</a:t>
+                      </a:r>
+                    </a:p>
+                  </a:txBody>
+                  <a:tcPr anchor="ctr">
+                    <a:solidFill>
+                      <a:srgbClr val="E2E8F0"/>
+                    </a:solidFill>
+                  </a:tcPr>
+                </a:tc>
+                <a:tc>
+                  <a:txBody>
+                    <a:bodyPr/>
+                    <a:lstStyle/>
+                    <a:p>
+                      <a:pPr algn="ctr" fontAlgn="t">
+                        <a:buNone/>
+                      </a:pPr>
+                      <a:r>
+                        <a:rPr lang="zh-CN" sz="1400" dirty="0">
+                          <a:solidFill>
+                            <a:schemeClr val="tx1"/>
+                          </a:solidFill>
+                          <a:effectLst/>
+                          <a:latin typeface="Microsoft YaHei" panose="020B0503020204020204" pitchFamily="34" charset="-122"/>
+                          <a:ea typeface="Microsoft YaHei" panose="020B0503020204020204" pitchFamily="34" charset="-122"/>
+                        </a:rPr>
+                        <a:t>4B 排名</a:t>
+                      </a:r>
+                    </a:p>
+                  </a:txBody>
+                  <a:tcPr anchor="ctr">
+                    <a:solidFill>
+                      <a:srgbClr val="E2E8F0"/>
+                    </a:solidFill>
+                  </a:tcPr>
+                </a:tc>
+                <a:tc>
+                  <a:txBody>
+                    <a:bodyPr/>
+                    <a:lstStyle/>
+                    <a:p>
+                      <a:pPr algn="ctr" fontAlgn="t">
+                        <a:buNone/>
+                      </a:pPr>
+                      <a:r>
+                        <a:rPr lang="zh-CN" sz="1400">
+                          <a:solidFill>
+                            <a:schemeClr val="tx1"/>
+                          </a:solidFill>
+                          <a:effectLst/>
+                          <a:latin typeface="Microsoft YaHei" panose="020B0503020204020204" pitchFamily="34" charset="-122"/>
+                          <a:ea typeface="Microsoft YaHei" panose="020B0503020204020204" pitchFamily="34" charset="-122"/>
+                        </a:rPr>
+                        <a:t>现象</a:t>
+                      </a:r>
+                    </a:p>
+                  </a:txBody>
+                  <a:tcPr anchor="ctr">
+                    <a:solidFill>
+                      <a:srgbClr val="E2E8F0"/>
+                    </a:solidFill>
+                  </a:tcPr>
+                </a:tc>
+                <a:extLst>
+                  <a:ext uri="{0D108BD9-81ED-4DB2-BD59-A6C34878D82A}">
+                    <a16:rowId xmlns:a16="http://schemas.microsoft.com/office/drawing/2014/main" val="10000"/>
+                  </a:ext>
+                </a:extLst>
+              </a:tr>
+              <a:tr h="373986">
+                <a:tc>
+                  <a:txBody>
+                    <a:bodyPr/>
+                    <a:lstStyle/>
+                    <a:p>
+                      <a:pPr algn="ctr" fontAlgn="t">
+                        <a:buNone/>
+                      </a:pPr>
+                      <a:r>
+                        <a:rPr lang="zh-CN" sz="1400">
+                          <a:solidFill>
+                            <a:schemeClr val="tx1"/>
+                          </a:solidFill>
+                          <a:effectLst/>
+                          <a:latin typeface="Microsoft YaHei" panose="020B0503020204020204" pitchFamily="34" charset="-122"/>
+                          <a:ea typeface="Microsoft YaHei" panose="020B0503020204020204" pitchFamily="34" charset="-122"/>
+                        </a:rPr>
+                        <a:t>双桥万达</a:t>
+                      </a:r>
+                    </a:p>
+                  </a:txBody>
+                  <a:tcPr anchor="ctr">
+                    <a:solidFill>
+                      <a:srgbClr val="FFFFFF"/>
+                    </a:solidFill>
+                  </a:tcPr>
+                </a:tc>
+                <a:tc>
+                  <a:txBody>
+                    <a:bodyPr/>
+                    <a:lstStyle/>
+                    <a:p>
+                      <a:pPr algn="ctr" fontAlgn="t">
+                        <a:buNone/>
+                      </a:pPr>
+                      <a:r>
+                        <a:rPr lang="zh-CN" sz="1400">
+                          <a:solidFill>
+                            <a:schemeClr val="tx1"/>
+                          </a:solidFill>
+                          <a:effectLst/>
+                          <a:latin typeface="Microsoft YaHei" panose="020B0503020204020204" pitchFamily="34" charset="-122"/>
+                          <a:ea typeface="Microsoft YaHei" panose="020B0503020204020204" pitchFamily="34" charset="-122"/>
+                        </a:rPr>
+                        <a:t>万达广场（双桥店）</a:t>
+                      </a:r>
+                    </a:p>
+                  </a:txBody>
+                  <a:tcPr anchor="ctr">
+                    <a:solidFill>
+                      <a:srgbClr val="FFFFFF"/>
+                    </a:solidFill>
+                  </a:tcPr>
+                </a:tc>
+                <a:tc>
+                  <a:txBody>
+                    <a:bodyPr/>
+                    <a:lstStyle/>
+                    <a:p>
+                      <a:pPr algn="ctr" fontAlgn="t">
+                        <a:buNone/>
+                      </a:pPr>
+                      <a:r>
+                        <a:rPr lang="zh-CN" sz="1400">
+                          <a:solidFill>
+                            <a:schemeClr val="tx1"/>
+                          </a:solidFill>
+                          <a:effectLst/>
+                          <a:latin typeface="Microsoft YaHei" panose="020B0503020204020204" pitchFamily="34" charset="-122"/>
+                          <a:ea typeface="Microsoft YaHei" panose="020B0503020204020204" pitchFamily="34" charset="-122"/>
+                        </a:rPr>
+                        <a:t>5</a:t>
+                      </a:r>
+                    </a:p>
+                  </a:txBody>
+                  <a:tcPr anchor="ctr">
+                    <a:solidFill>
+                      <a:srgbClr val="FFFFFF"/>
+                    </a:solidFill>
+                  </a:tcPr>
+                </a:tc>
+                <a:tc>
+                  <a:txBody>
+                    <a:bodyPr/>
+                    <a:lstStyle/>
+                    <a:p>
+                      <a:pPr algn="ctr" fontAlgn="t">
+                        <a:buNone/>
+                      </a:pPr>
+                      <a:r>
+                        <a:rPr lang="zh-CN" sz="1400">
+                          <a:solidFill>
+                            <a:schemeClr val="tx1"/>
+                          </a:solidFill>
+                          <a:effectLst/>
+                          <a:latin typeface="Microsoft YaHei" panose="020B0503020204020204" pitchFamily="34" charset="-122"/>
+                          <a:ea typeface="Microsoft YaHei" panose="020B0503020204020204" pitchFamily="34" charset="-122"/>
+                        </a:rPr>
+                        <a:t>&gt;20</a:t>
+                      </a:r>
+                    </a:p>
+                  </a:txBody>
+                  <a:tcPr anchor="ctr">
+                    <a:solidFill>
+                      <a:srgbClr val="FFFFFF"/>
+                    </a:solidFill>
+                  </a:tcPr>
+                </a:tc>
+                <a:tc>
+                  <a:txBody>
+                    <a:bodyPr/>
+                    <a:lstStyle/>
+                    <a:p>
+                      <a:pPr algn="ctr" fontAlgn="t">
+                        <a:buNone/>
+                      </a:pPr>
+                      <a:r>
+                        <a:rPr lang="zh-CN" sz="1400">
+                          <a:solidFill>
+                            <a:schemeClr val="tx1"/>
+                          </a:solidFill>
+                          <a:effectLst/>
+                          <a:latin typeface="Microsoft YaHei" panose="020B0503020204020204" pitchFamily="34" charset="-122"/>
+                          <a:ea typeface="Microsoft YaHei" panose="020B0503020204020204" pitchFamily="34" charset="-122"/>
+                        </a:rPr>
+                        <a:t>0.6B 主要返回双桥万达及其入口；4B Top-1 为“万达桥”</a:t>
+                      </a:r>
+                    </a:p>
+                  </a:txBody>
+                  <a:tcPr anchor="ctr">
+                    <a:solidFill>
+                      <a:srgbClr val="FFFFFF"/>
+                    </a:solidFill>
+                  </a:tcPr>
+                </a:tc>
+                <a:extLst>
+                  <a:ext uri="{0D108BD9-81ED-4DB2-BD59-A6C34878D82A}">
+                    <a16:rowId xmlns:a16="http://schemas.microsoft.com/office/drawing/2014/main" val="10001"/>
+                  </a:ext>
+                </a:extLst>
+              </a:tr>
+              <a:tr h="373986">
+                <a:tc>
+                  <a:txBody>
+                    <a:bodyPr/>
+                    <a:lstStyle/>
+                    <a:p>
+                      <a:pPr algn="ctr" fontAlgn="t">
+                        <a:buNone/>
+                      </a:pPr>
+                      <a:r>
+                        <a:rPr lang="zh-CN" sz="1400">
+                          <a:solidFill>
+                            <a:schemeClr val="tx1"/>
+                          </a:solidFill>
+                          <a:effectLst/>
+                          <a:latin typeface="Microsoft YaHei" panose="020B0503020204020204" pitchFamily="34" charset="-122"/>
+                          <a:ea typeface="Microsoft YaHei" panose="020B0503020204020204" pitchFamily="34" charset="-122"/>
+                        </a:rPr>
+                        <a:t>北京大学东门</a:t>
+                      </a:r>
+                    </a:p>
+                  </a:txBody>
+                  <a:tcPr anchor="ctr">
+                    <a:solidFill>
+                      <a:srgbClr val="F8FAFC"/>
+                    </a:solidFill>
+                  </a:tcPr>
+                </a:tc>
+                <a:tc>
+                  <a:txBody>
+                    <a:bodyPr/>
+                    <a:lstStyle/>
+                    <a:p>
+                      <a:pPr algn="ctr" fontAlgn="t">
+                        <a:buNone/>
+                      </a:pPr>
+                      <a:r>
+                        <a:rPr lang="zh-CN" sz="1400">
+                          <a:solidFill>
+                            <a:schemeClr val="tx1"/>
+                          </a:solidFill>
+                          <a:effectLst/>
+                          <a:latin typeface="Microsoft YaHei" panose="020B0503020204020204" pitchFamily="34" charset="-122"/>
+                          <a:ea typeface="Microsoft YaHei" panose="020B0503020204020204" pitchFamily="34" charset="-122"/>
+                        </a:rPr>
+                        <a:t>北京大学-东门</a:t>
+                      </a:r>
+                    </a:p>
+                  </a:txBody>
+                  <a:tcPr anchor="ctr">
+                    <a:solidFill>
+                      <a:srgbClr val="F8FAFC"/>
+                    </a:solidFill>
+                  </a:tcPr>
+                </a:tc>
+                <a:tc>
+                  <a:txBody>
+                    <a:bodyPr/>
+                    <a:lstStyle/>
+                    <a:p>
+                      <a:pPr algn="ctr" fontAlgn="t">
+                        <a:buNone/>
+                      </a:pPr>
+                      <a:r>
+                        <a:rPr lang="zh-CN" sz="1400">
+                          <a:solidFill>
+                            <a:schemeClr val="tx1"/>
+                          </a:solidFill>
+                          <a:effectLst/>
+                          <a:latin typeface="Microsoft YaHei" panose="020B0503020204020204" pitchFamily="34" charset="-122"/>
+                          <a:ea typeface="Microsoft YaHei" panose="020B0503020204020204" pitchFamily="34" charset="-122"/>
+                        </a:rPr>
+                        <a:t>1</a:t>
+                      </a:r>
+                    </a:p>
+                  </a:txBody>
+                  <a:tcPr anchor="ctr">
+                    <a:solidFill>
+                      <a:srgbClr val="F8FAFC"/>
+                    </a:solidFill>
+                  </a:tcPr>
+                </a:tc>
+                <a:tc>
+                  <a:txBody>
+                    <a:bodyPr/>
+                    <a:lstStyle/>
+                    <a:p>
+                      <a:pPr algn="ctr" fontAlgn="t">
+                        <a:buNone/>
+                      </a:pPr>
+                      <a:r>
+                        <a:rPr lang="zh-CN" sz="1400">
+                          <a:solidFill>
+                            <a:schemeClr val="tx1"/>
+                          </a:solidFill>
+                          <a:effectLst/>
+                          <a:latin typeface="Microsoft YaHei" panose="020B0503020204020204" pitchFamily="34" charset="-122"/>
+                          <a:ea typeface="Microsoft YaHei" panose="020B0503020204020204" pitchFamily="34" charset="-122"/>
+                        </a:rPr>
+                        <a:t>&gt;20</a:t>
+                      </a:r>
+                    </a:p>
+                  </a:txBody>
+                  <a:tcPr anchor="ctr">
+                    <a:solidFill>
+                      <a:srgbClr val="F8FAFC"/>
+                    </a:solidFill>
+                  </a:tcPr>
+                </a:tc>
+                <a:tc>
+                  <a:txBody>
+                    <a:bodyPr/>
+                    <a:lstStyle/>
+                    <a:p>
+                      <a:pPr algn="ctr" fontAlgn="t">
+                        <a:buNone/>
+                      </a:pPr>
+                      <a:r>
+                        <a:rPr lang="zh-CN" sz="1400">
+                          <a:solidFill>
+                            <a:schemeClr val="tx1"/>
+                          </a:solidFill>
+                          <a:effectLst/>
+                          <a:latin typeface="Microsoft YaHei" panose="020B0503020204020204" pitchFamily="34" charset="-122"/>
+                          <a:ea typeface="Microsoft YaHei" panose="020B0503020204020204" pitchFamily="34" charset="-122"/>
+                        </a:rPr>
+                        <a:t>4B 返回“小东门”等相近入口，没有准确匹配目标实体</a:t>
+                      </a:r>
+                    </a:p>
+                  </a:txBody>
+                  <a:tcPr anchor="ctr">
+                    <a:solidFill>
+                      <a:srgbClr val="F8FAFC"/>
+                    </a:solidFill>
+                  </a:tcPr>
+                </a:tc>
+                <a:extLst>
+                  <a:ext uri="{0D108BD9-81ED-4DB2-BD59-A6C34878D82A}">
+                    <a16:rowId xmlns:a16="http://schemas.microsoft.com/office/drawing/2014/main" val="10002"/>
+                  </a:ext>
+                </a:extLst>
+              </a:tr>
+              <a:tr h="373986">
+                <a:tc>
+                  <a:txBody>
+                    <a:bodyPr/>
+                    <a:lstStyle/>
+                    <a:p>
+                      <a:pPr algn="ctr" fontAlgn="t">
+                        <a:buNone/>
+                      </a:pPr>
+                      <a:r>
+                        <a:rPr lang="zh-CN" sz="1400">
+                          <a:solidFill>
+                            <a:schemeClr val="tx1"/>
+                          </a:solidFill>
+                          <a:effectLst/>
+                          <a:latin typeface="Microsoft YaHei" panose="020B0503020204020204" pitchFamily="34" charset="-122"/>
+                          <a:ea typeface="Microsoft YaHei" panose="020B0503020204020204" pitchFamily="34" charset="-122"/>
+                        </a:rPr>
+                        <a:t>九品烤鸭店</a:t>
+                      </a:r>
+                    </a:p>
+                  </a:txBody>
+                  <a:tcPr anchor="ctr">
+                    <a:solidFill>
+                      <a:srgbClr val="FFFFFF"/>
+                    </a:solidFill>
+                  </a:tcPr>
+                </a:tc>
+                <a:tc>
+                  <a:txBody>
+                    <a:bodyPr/>
+                    <a:lstStyle/>
+                    <a:p>
+                      <a:pPr algn="ctr" fontAlgn="t">
+                        <a:buNone/>
+                      </a:pPr>
+                      <a:r>
+                        <a:rPr lang="zh-CN" sz="1400">
+                          <a:solidFill>
+                            <a:schemeClr val="tx1"/>
+                          </a:solidFill>
+                          <a:effectLst/>
+                          <a:latin typeface="Microsoft YaHei" panose="020B0503020204020204" pitchFamily="34" charset="-122"/>
+                          <a:ea typeface="Microsoft YaHei" panose="020B0503020204020204" pitchFamily="34" charset="-122"/>
+                        </a:rPr>
+                        <a:t>九品烤鸭店（角门店）</a:t>
+                      </a:r>
+                    </a:p>
+                  </a:txBody>
+                  <a:tcPr anchor="ctr">
+                    <a:solidFill>
+                      <a:srgbClr val="FFFFFF"/>
+                    </a:solidFill>
+                  </a:tcPr>
+                </a:tc>
+                <a:tc>
+                  <a:txBody>
+                    <a:bodyPr/>
+                    <a:lstStyle/>
+                    <a:p>
+                      <a:pPr algn="ctr" fontAlgn="t">
+                        <a:buNone/>
+                      </a:pPr>
+                      <a:r>
+                        <a:rPr lang="zh-CN" sz="1400">
+                          <a:solidFill>
+                            <a:schemeClr val="tx1"/>
+                          </a:solidFill>
+                          <a:effectLst/>
+                          <a:latin typeface="Microsoft YaHei" panose="020B0503020204020204" pitchFamily="34" charset="-122"/>
+                          <a:ea typeface="Microsoft YaHei" panose="020B0503020204020204" pitchFamily="34" charset="-122"/>
+                        </a:rPr>
+                        <a:t>1</a:t>
+                      </a:r>
+                    </a:p>
+                  </a:txBody>
+                  <a:tcPr anchor="ctr">
+                    <a:solidFill>
+                      <a:srgbClr val="FFFFFF"/>
+                    </a:solidFill>
+                  </a:tcPr>
+                </a:tc>
+                <a:tc>
+                  <a:txBody>
+                    <a:bodyPr/>
+                    <a:lstStyle/>
+                    <a:p>
+                      <a:pPr algn="ctr" fontAlgn="t">
+                        <a:buNone/>
+                      </a:pPr>
+                      <a:r>
+                        <a:rPr lang="zh-CN" sz="1400">
+                          <a:solidFill>
+                            <a:schemeClr val="tx1"/>
+                          </a:solidFill>
+                          <a:effectLst/>
+                          <a:latin typeface="Microsoft YaHei" panose="020B0503020204020204" pitchFamily="34" charset="-122"/>
+                          <a:ea typeface="Microsoft YaHei" panose="020B0503020204020204" pitchFamily="34" charset="-122"/>
+                        </a:rPr>
+                        <a:t>17</a:t>
+                      </a:r>
+                    </a:p>
+                  </a:txBody>
+                  <a:tcPr anchor="ctr">
+                    <a:solidFill>
+                      <a:srgbClr val="FFFFFF"/>
+                    </a:solidFill>
+                  </a:tcPr>
+                </a:tc>
+                <a:tc>
+                  <a:txBody>
+                    <a:bodyPr/>
+                    <a:lstStyle/>
+                    <a:p>
+                      <a:pPr algn="ctr" fontAlgn="t">
+                        <a:buNone/>
+                      </a:pPr>
+                      <a:r>
+                        <a:rPr lang="zh-CN" sz="1400">
+                          <a:solidFill>
+                            <a:schemeClr val="tx1"/>
+                          </a:solidFill>
+                          <a:effectLst/>
+                          <a:latin typeface="Microsoft YaHei" panose="020B0503020204020204" pitchFamily="34" charset="-122"/>
+                          <a:ea typeface="Microsoft YaHei" panose="020B0503020204020204" pitchFamily="34" charset="-122"/>
+                        </a:rPr>
+                        <a:t>4B 更偏向“烤鸭京味”等语义相关餐饮 POI</a:t>
+                      </a:r>
+                    </a:p>
+                  </a:txBody>
+                  <a:tcPr anchor="ctr">
+                    <a:solidFill>
+                      <a:srgbClr val="FFFFFF"/>
+                    </a:solidFill>
+                  </a:tcPr>
+                </a:tc>
+                <a:extLst>
+                  <a:ext uri="{0D108BD9-81ED-4DB2-BD59-A6C34878D82A}">
+                    <a16:rowId xmlns:a16="http://schemas.microsoft.com/office/drawing/2014/main" val="10003"/>
+                  </a:ext>
+                </a:extLst>
+              </a:tr>
+              <a:tr h="373986">
+                <a:tc>
+                  <a:txBody>
+                    <a:bodyPr/>
+                    <a:lstStyle/>
+                    <a:p>
+                      <a:pPr algn="ctr" fontAlgn="t">
+                        <a:buNone/>
+                      </a:pPr>
+                      <a:r>
+                        <a:rPr lang="zh-CN" sz="1400">
+                          <a:solidFill>
+                            <a:schemeClr val="tx1"/>
+                          </a:solidFill>
+                          <a:effectLst/>
+                          <a:latin typeface="Microsoft YaHei" panose="020B0503020204020204" pitchFamily="34" charset="-122"/>
+                          <a:ea typeface="Microsoft YaHei" panose="020B0503020204020204" pitchFamily="34" charset="-122"/>
+                        </a:rPr>
+                        <a:t>国家博物馆</a:t>
+                      </a:r>
+                    </a:p>
+                  </a:txBody>
+                  <a:tcPr anchor="ctr">
+                    <a:solidFill>
+                      <a:srgbClr val="F8FAFC"/>
+                    </a:solidFill>
+                  </a:tcPr>
+                </a:tc>
+                <a:tc>
+                  <a:txBody>
+                    <a:bodyPr/>
+                    <a:lstStyle/>
+                    <a:p>
+                      <a:pPr algn="ctr" fontAlgn="t">
+                        <a:buNone/>
+                      </a:pPr>
+                      <a:r>
+                        <a:rPr lang="zh-CN" sz="1400">
+                          <a:solidFill>
+                            <a:schemeClr val="tx1"/>
+                          </a:solidFill>
+                          <a:effectLst/>
+                          <a:latin typeface="Microsoft YaHei" panose="020B0503020204020204" pitchFamily="34" charset="-122"/>
+                          <a:ea typeface="Microsoft YaHei" panose="020B0503020204020204" pitchFamily="34" charset="-122"/>
+                        </a:rPr>
+                        <a:t>中国国家博物馆</a:t>
+                      </a:r>
+                    </a:p>
+                  </a:txBody>
+                  <a:tcPr anchor="ctr">
+                    <a:solidFill>
+                      <a:srgbClr val="F8FAFC"/>
+                    </a:solidFill>
+                  </a:tcPr>
+                </a:tc>
+                <a:tc>
+                  <a:txBody>
+                    <a:bodyPr/>
+                    <a:lstStyle/>
+                    <a:p>
+                      <a:pPr algn="ctr" fontAlgn="t">
+                        <a:buNone/>
+                      </a:pPr>
+                      <a:r>
+                        <a:rPr lang="zh-CN" sz="1400">
+                          <a:solidFill>
+                            <a:schemeClr val="tx1"/>
+                          </a:solidFill>
+                          <a:effectLst/>
+                          <a:latin typeface="Microsoft YaHei" panose="020B0503020204020204" pitchFamily="34" charset="-122"/>
+                          <a:ea typeface="Microsoft YaHei" panose="020B0503020204020204" pitchFamily="34" charset="-122"/>
+                        </a:rPr>
+                        <a:t>13</a:t>
+                      </a:r>
+                    </a:p>
+                  </a:txBody>
+                  <a:tcPr anchor="ctr">
+                    <a:solidFill>
+                      <a:srgbClr val="F8FAFC"/>
+                    </a:solidFill>
+                  </a:tcPr>
+                </a:tc>
+                <a:tc>
+                  <a:txBody>
+                    <a:bodyPr/>
+                    <a:lstStyle/>
+                    <a:p>
+                      <a:pPr algn="ctr" fontAlgn="t">
+                        <a:buNone/>
+                      </a:pPr>
+                      <a:r>
+                        <a:rPr lang="zh-CN" sz="1400">
+                          <a:solidFill>
+                            <a:schemeClr val="tx1"/>
+                          </a:solidFill>
+                          <a:effectLst/>
+                          <a:latin typeface="Microsoft YaHei" panose="020B0503020204020204" pitchFamily="34" charset="-122"/>
+                          <a:ea typeface="Microsoft YaHei" panose="020B0503020204020204" pitchFamily="34" charset="-122"/>
+                        </a:rPr>
+                        <a:t>1</a:t>
+                      </a:r>
+                    </a:p>
+                  </a:txBody>
+                  <a:tcPr anchor="ctr">
+                    <a:solidFill>
+                      <a:srgbClr val="F8FAFC"/>
+                    </a:solidFill>
+                  </a:tcPr>
+                </a:tc>
+                <a:tc>
+                  <a:txBody>
+                    <a:bodyPr/>
+                    <a:lstStyle/>
+                    <a:p>
+                      <a:pPr algn="ctr" fontAlgn="t">
+                        <a:buNone/>
+                      </a:pPr>
+                      <a:r>
+                        <a:rPr lang="zh-CN" sz="1400">
+                          <a:solidFill>
+                            <a:schemeClr val="tx1"/>
+                          </a:solidFill>
+                          <a:effectLst/>
+                          <a:latin typeface="Microsoft YaHei" panose="020B0503020204020204" pitchFamily="34" charset="-122"/>
+                          <a:ea typeface="Microsoft YaHei" panose="020B0503020204020204" pitchFamily="34" charset="-122"/>
+                        </a:rPr>
+                        <a:t>4B 能较好处理简称与完整名称之间的对应</a:t>
+                      </a:r>
+                    </a:p>
+                  </a:txBody>
+                  <a:tcPr anchor="ctr">
+                    <a:solidFill>
+                      <a:srgbClr val="F8FAFC"/>
+                    </a:solidFill>
+                  </a:tcPr>
+                </a:tc>
+                <a:extLst>
+                  <a:ext uri="{0D108BD9-81ED-4DB2-BD59-A6C34878D82A}">
+                    <a16:rowId xmlns:a16="http://schemas.microsoft.com/office/drawing/2014/main" val="10004"/>
+                  </a:ext>
+                </a:extLst>
+              </a:tr>
+              <a:tr h="373986">
+                <a:tc>
+                  <a:txBody>
+                    <a:bodyPr/>
+                    <a:lstStyle/>
+                    <a:p>
+                      <a:pPr algn="ctr" fontAlgn="t">
+                        <a:buNone/>
+                      </a:pPr>
+                      <a:r>
+                        <a:rPr lang="zh-CN" sz="1400">
+                          <a:solidFill>
+                            <a:schemeClr val="tx1"/>
+                          </a:solidFill>
+                          <a:effectLst/>
+                          <a:latin typeface="Microsoft YaHei" panose="020B0503020204020204" pitchFamily="34" charset="-122"/>
+                          <a:ea typeface="Microsoft YaHei" panose="020B0503020204020204" pitchFamily="34" charset="-122"/>
+                        </a:rPr>
+                        <a:t>万寿路二十号院</a:t>
+                      </a:r>
+                    </a:p>
+                  </a:txBody>
+                  <a:tcPr anchor="ctr">
+                    <a:solidFill>
+                      <a:srgbClr val="F8FAFC"/>
+                    </a:solidFill>
+                  </a:tcPr>
+                </a:tc>
+                <a:tc>
+                  <a:txBody>
+                    <a:bodyPr/>
+                    <a:lstStyle/>
+                    <a:p>
+                      <a:pPr algn="ctr" fontAlgn="t">
+                        <a:buNone/>
+                      </a:pPr>
+                      <a:r>
+                        <a:rPr lang="zh-CN" sz="1400">
+                          <a:solidFill>
+                            <a:schemeClr val="tx1"/>
+                          </a:solidFill>
+                          <a:effectLst/>
+                          <a:latin typeface="Microsoft YaHei" panose="020B0503020204020204" pitchFamily="34" charset="-122"/>
+                          <a:ea typeface="Microsoft YaHei" panose="020B0503020204020204" pitchFamily="34" charset="-122"/>
+                        </a:rPr>
+                        <a:t>万寿路20号院</a:t>
+                      </a:r>
+                    </a:p>
+                  </a:txBody>
+                  <a:tcPr anchor="ctr">
+                    <a:solidFill>
+                      <a:srgbClr val="F8FAFC"/>
+                    </a:solidFill>
+                  </a:tcPr>
+                </a:tc>
+                <a:tc>
+                  <a:txBody>
+                    <a:bodyPr/>
+                    <a:lstStyle/>
+                    <a:p>
+                      <a:pPr algn="ctr" fontAlgn="t">
+                        <a:buNone/>
+                      </a:pPr>
+                      <a:r>
+                        <a:rPr lang="zh-CN" sz="1400">
+                          <a:solidFill>
+                            <a:schemeClr val="tx1"/>
+                          </a:solidFill>
+                          <a:effectLst/>
+                          <a:latin typeface="Microsoft YaHei" panose="020B0503020204020204" pitchFamily="34" charset="-122"/>
+                          <a:ea typeface="Microsoft YaHei" panose="020B0503020204020204" pitchFamily="34" charset="-122"/>
+                        </a:rPr>
+                        <a:t>6</a:t>
+                      </a:r>
+                    </a:p>
+                  </a:txBody>
+                  <a:tcPr anchor="ctr">
+                    <a:solidFill>
+                      <a:srgbClr val="F8FAFC"/>
+                    </a:solidFill>
+                  </a:tcPr>
+                </a:tc>
+                <a:tc>
+                  <a:txBody>
+                    <a:bodyPr/>
+                    <a:lstStyle/>
+                    <a:p>
+                      <a:pPr algn="ctr" fontAlgn="t">
+                        <a:buNone/>
+                      </a:pPr>
+                      <a:r>
+                        <a:rPr lang="zh-CN" sz="1400">
+                          <a:solidFill>
+                            <a:schemeClr val="tx1"/>
+                          </a:solidFill>
+                          <a:effectLst/>
+                          <a:latin typeface="Microsoft YaHei" panose="020B0503020204020204" pitchFamily="34" charset="-122"/>
+                          <a:ea typeface="Microsoft YaHei" panose="020B0503020204020204" pitchFamily="34" charset="-122"/>
+                        </a:rPr>
+                        <a:t>1</a:t>
+                      </a:r>
+                    </a:p>
+                  </a:txBody>
+                  <a:tcPr anchor="ctr">
+                    <a:solidFill>
+                      <a:srgbClr val="F8FAFC"/>
+                    </a:solidFill>
+                  </a:tcPr>
+                </a:tc>
+                <a:tc>
+                  <a:txBody>
+                    <a:bodyPr/>
+                    <a:lstStyle/>
+                    <a:p>
+                      <a:pPr algn="ctr" fontAlgn="t">
+                        <a:buNone/>
+                      </a:pPr>
+                      <a:r>
+                        <a:rPr lang="zh-CN" sz="1400">
+                          <a:solidFill>
+                            <a:schemeClr val="tx1"/>
+                          </a:solidFill>
+                          <a:effectLst/>
+                          <a:latin typeface="Microsoft YaHei" panose="020B0503020204020204" pitchFamily="34" charset="-122"/>
+                          <a:ea typeface="Microsoft YaHei" panose="020B0503020204020204" pitchFamily="34" charset="-122"/>
+                        </a:rPr>
+                        <a:t>4B 更好地处理中文数字与阿拉伯数字的归一化</a:t>
+                      </a:r>
+                    </a:p>
+                  </a:txBody>
+                  <a:tcPr anchor="ctr">
+                    <a:solidFill>
+                      <a:srgbClr val="F8FAFC"/>
+                    </a:solidFill>
+                  </a:tcPr>
+                </a:tc>
+                <a:extLst>
+                  <a:ext uri="{0D108BD9-81ED-4DB2-BD59-A6C34878D82A}">
+                    <a16:rowId xmlns:a16="http://schemas.microsoft.com/office/drawing/2014/main" val="2382626879"/>
+                  </a:ext>
+                </a:extLst>
+              </a:tr>
+              <a:tr h="373986">
+                <a:tc>
+                  <a:txBody>
+                    <a:bodyPr/>
+                    <a:lstStyle/>
+                    <a:p>
+                      <a:pPr algn="ctr" fontAlgn="t">
+                        <a:buNone/>
+                      </a:pPr>
+                      <a:r>
+                        <a:rPr lang="zh-CN" sz="1400">
+                          <a:solidFill>
+                            <a:schemeClr val="tx1"/>
+                          </a:solidFill>
+                          <a:effectLst/>
+                          <a:latin typeface="Microsoft YaHei" panose="020B0503020204020204" pitchFamily="34" charset="-122"/>
+                          <a:ea typeface="Microsoft YaHei" panose="020B0503020204020204" pitchFamily="34" charset="-122"/>
+                        </a:rPr>
+                        <a:t>北京西站</a:t>
+                      </a:r>
+                    </a:p>
+                  </a:txBody>
+                  <a:tcPr anchor="ctr">
+                    <a:solidFill>
+                      <a:srgbClr val="F8FAFC"/>
+                    </a:solidFill>
+                  </a:tcPr>
+                </a:tc>
+                <a:tc>
+                  <a:txBody>
+                    <a:bodyPr/>
+                    <a:lstStyle/>
+                    <a:p>
+                      <a:pPr algn="ctr" fontAlgn="t">
+                        <a:buNone/>
+                      </a:pPr>
+                      <a:r>
+                        <a:rPr lang="zh-CN" sz="1400">
+                          <a:solidFill>
+                            <a:schemeClr val="tx1"/>
+                          </a:solidFill>
+                          <a:effectLst/>
+                          <a:latin typeface="Microsoft YaHei" panose="020B0503020204020204" pitchFamily="34" charset="-122"/>
+                          <a:ea typeface="Microsoft YaHei" panose="020B0503020204020204" pitchFamily="34" charset="-122"/>
+                        </a:rPr>
+                        <a:t>北京西站-2F北进站口</a:t>
+                      </a:r>
+                    </a:p>
+                  </a:txBody>
+                  <a:tcPr anchor="ctr">
+                    <a:solidFill>
+                      <a:srgbClr val="F8FAFC"/>
+                    </a:solidFill>
+                  </a:tcPr>
+                </a:tc>
+                <a:tc>
+                  <a:txBody>
+                    <a:bodyPr/>
+                    <a:lstStyle/>
+                    <a:p>
+                      <a:pPr algn="ctr" fontAlgn="t">
+                        <a:buNone/>
+                      </a:pPr>
+                      <a:r>
+                        <a:rPr lang="zh-CN" sz="1400">
+                          <a:solidFill>
+                            <a:schemeClr val="tx1"/>
+                          </a:solidFill>
+                          <a:effectLst/>
+                          <a:latin typeface="Microsoft YaHei" panose="020B0503020204020204" pitchFamily="34" charset="-122"/>
+                          <a:ea typeface="Microsoft YaHei" panose="020B0503020204020204" pitchFamily="34" charset="-122"/>
+                        </a:rPr>
+                        <a:t>&gt;20</a:t>
+                      </a:r>
+                    </a:p>
+                  </a:txBody>
+                  <a:tcPr anchor="ctr">
+                    <a:solidFill>
+                      <a:srgbClr val="F8FAFC"/>
+                    </a:solidFill>
+                  </a:tcPr>
+                </a:tc>
+                <a:tc>
+                  <a:txBody>
+                    <a:bodyPr/>
+                    <a:lstStyle/>
+                    <a:p>
+                      <a:pPr algn="ctr" fontAlgn="t">
+                        <a:buNone/>
+                      </a:pPr>
+                      <a:r>
+                        <a:rPr lang="zh-CN" sz="1400">
+                          <a:solidFill>
+                            <a:schemeClr val="tx1"/>
+                          </a:solidFill>
+                          <a:effectLst/>
+                          <a:latin typeface="Microsoft YaHei" panose="020B0503020204020204" pitchFamily="34" charset="-122"/>
+                          <a:ea typeface="Microsoft YaHei" panose="020B0503020204020204" pitchFamily="34" charset="-122"/>
+                        </a:rPr>
+                        <a:t>&gt;20</a:t>
+                      </a:r>
+                    </a:p>
+                  </a:txBody>
+                  <a:tcPr anchor="ctr">
+                    <a:solidFill>
+                      <a:srgbClr val="F8FAFC"/>
+                    </a:solidFill>
+                  </a:tcPr>
+                </a:tc>
+                <a:tc>
+                  <a:txBody>
+                    <a:bodyPr/>
+                    <a:lstStyle/>
+                    <a:p>
+                      <a:pPr algn="ctr" fontAlgn="t">
+                        <a:buNone/>
+                      </a:pPr>
+                      <a:r>
+                        <a:rPr lang="zh-CN" sz="1400" dirty="0">
+                          <a:solidFill>
+                            <a:schemeClr val="tx1"/>
+                          </a:solidFill>
+                          <a:effectLst/>
+                          <a:latin typeface="Microsoft YaHei" panose="020B0503020204020204" pitchFamily="34" charset="-122"/>
+                          <a:ea typeface="Microsoft YaHei" panose="020B0503020204020204" pitchFamily="34" charset="-122"/>
+                        </a:rPr>
+                        <a:t>Query 只指向主站，缺少入口粒度和位置条件</a:t>
+                      </a:r>
+                    </a:p>
+                  </a:txBody>
+                  <a:tcPr anchor="ctr">
+                    <a:solidFill>
+                      <a:srgbClr val="F8FAFC"/>
+                    </a:solidFill>
+                  </a:tcPr>
+                </a:tc>
+                <a:extLst>
+                  <a:ext uri="{0D108BD9-81ED-4DB2-BD59-A6C34878D82A}">
+                    <a16:rowId xmlns:a16="http://schemas.microsoft.com/office/drawing/2014/main" val="3626183382"/>
+                  </a:ext>
+                </a:extLst>
+              </a:tr>
+            </a:tbl>
+          </a:graphicData>
+        </a:graphic>
+      </p:graphicFrame>
     </p:spTree>
   </p:cSld>
   <p:clrMapOvr>
